--- a/Others/PRIVATE SHIELD Literature Review.pptx
+++ b/Others/PRIVATE SHIELD Literature Review.pptx
@@ -374,7 +374,7 @@
             <a:pPr indent="0" algn="r">
               <a:buNone/>
             </a:pPr>
-            <a:fld id="{9BF7A83A-37DE-41DA-8298-783BAC37DFF6}" type="slidenum">
+            <a:fld id="{76ED3933-E4DA-4883-BF8A-3CF5FE210858}" type="slidenum">
               <a:rPr lang="en-US" sz="1400" b="0" u="none" strike="noStrike">
                 <a:solidFill>
                   <a:srgbClr val="000000"/>
@@ -421,7 +421,7 @@
       </p:grpSpPr>
       <p:sp>
         <p:nvSpPr>
-          <p:cNvPr id="378" name="PlaceHolder 1"/>
+          <p:cNvPr id="377" name="PlaceHolder 1"/>
           <p:cNvSpPr>
             <a:spLocks noGrp="1"/>
           </p:cNvSpPr>
@@ -432,7 +432,7 @@
         <p:spPr>
           <a:xfrm>
             <a:off x="685800" y="1143000"/>
-            <a:ext cx="5486040" cy="3085920"/>
+            <a:ext cx="5485680" cy="3085560"/>
           </a:xfrm>
           <a:prstGeom prst="rect">
             <a:avLst/>
@@ -444,7 +444,7 @@
       </p:sp>
       <p:sp>
         <p:nvSpPr>
-          <p:cNvPr id="379" name="PlaceHolder 2"/>
+          <p:cNvPr id="378" name="PlaceHolder 2"/>
           <p:cNvSpPr>
             <a:spLocks noGrp="1"/>
           </p:cNvSpPr>
@@ -455,7 +455,7 @@
         <p:spPr>
           <a:xfrm>
             <a:off x="685800" y="4400640"/>
-            <a:ext cx="5486040" cy="3600000"/>
+            <a:ext cx="5485680" cy="3599640"/>
           </a:xfrm>
           <a:prstGeom prst="rect">
             <a:avLst/>
@@ -475,6 +475,9 @@
                 <a:spcPct val="100000"/>
               </a:lnSpc>
               <a:buNone/>
+              <a:tabLst>
+                <a:tab pos="0" algn="l"/>
+              </a:tabLst>
             </a:pPr>
             <a:r>
               <a:rPr lang="en-US" sz="2000" b="0" u="none" strike="noStrike">
@@ -500,7 +503,7 @@
       </p:sp>
       <p:sp>
         <p:nvSpPr>
-          <p:cNvPr id="380" name="PlaceHolder 3"/>
+          <p:cNvPr id="379" name="PlaceHolder 3"/>
           <p:cNvSpPr>
             <a:spLocks noGrp="1"/>
           </p:cNvSpPr>
@@ -511,7 +514,7 @@
         <p:spPr>
           <a:xfrm>
             <a:off x="3884760" y="8685360"/>
-            <a:ext cx="2971440" cy="458280"/>
+            <a:ext cx="2971080" cy="457920"/>
           </a:xfrm>
           <a:prstGeom prst="rect">
             <a:avLst/>
@@ -531,6 +534,9 @@
                 <a:spcPct val="100000"/>
               </a:lnSpc>
               <a:buNone/>
+              <a:tabLst>
+                <a:tab pos="0" algn="l"/>
+              </a:tabLst>
               <a:defRPr lang="en-US" sz="1200" b="0" u="none" strike="noStrike">
                 <a:solidFill>
                   <a:schemeClr val="dk1"/>
@@ -548,8 +554,11 @@
                 <a:spcPct val="100000"/>
               </a:lnSpc>
               <a:buNone/>
+              <a:tabLst>
+                <a:tab pos="0" algn="l"/>
+              </a:tabLst>
             </a:pPr>
-            <a:fld id="{FC0AFB93-79F7-4A42-A0A2-FB22CB553083}" type="slidenum">
+            <a:fld id="{A72DB66A-CCA1-4ADE-82CB-6D7264087B9A}" type="slidenum">
               <a:rPr lang="en-US" sz="1200" b="0" u="none" strike="noStrike">
                 <a:solidFill>
                   <a:schemeClr val="dk1"/>
@@ -596,7 +605,7 @@
       </p:grpSpPr>
       <p:sp>
         <p:nvSpPr>
-          <p:cNvPr id="405" name="PlaceHolder 1"/>
+          <p:cNvPr id="404" name="PlaceHolder 1"/>
           <p:cNvSpPr>
             <a:spLocks noGrp="1"/>
           </p:cNvSpPr>
@@ -607,7 +616,7 @@
         <p:spPr>
           <a:xfrm>
             <a:off x="685800" y="1143000"/>
-            <a:ext cx="5486040" cy="3085920"/>
+            <a:ext cx="5485680" cy="3085560"/>
           </a:xfrm>
           <a:prstGeom prst="rect">
             <a:avLst/>
@@ -619,7 +628,7 @@
       </p:sp>
       <p:sp>
         <p:nvSpPr>
-          <p:cNvPr id="406" name="PlaceHolder 2"/>
+          <p:cNvPr id="405" name="PlaceHolder 2"/>
           <p:cNvSpPr>
             <a:spLocks noGrp="1"/>
           </p:cNvSpPr>
@@ -630,7 +639,7 @@
         <p:spPr>
           <a:xfrm>
             <a:off x="685800" y="4400640"/>
-            <a:ext cx="5486040" cy="3600000"/>
+            <a:ext cx="5485680" cy="3599640"/>
           </a:xfrm>
           <a:prstGeom prst="rect">
             <a:avLst/>
@@ -650,6 +659,9 @@
                 <a:spcPct val="100000"/>
               </a:lnSpc>
               <a:buNone/>
+              <a:tabLst>
+                <a:tab pos="0" algn="l"/>
+              </a:tabLst>
             </a:pPr>
             <a:r>
               <a:rPr lang="en-US" sz="2000" b="0" u="none" strike="noStrike">
@@ -675,7 +687,7 @@
       </p:sp>
       <p:sp>
         <p:nvSpPr>
-          <p:cNvPr id="407" name="PlaceHolder 3"/>
+          <p:cNvPr id="406" name="PlaceHolder 3"/>
           <p:cNvSpPr>
             <a:spLocks noGrp="1"/>
           </p:cNvSpPr>
@@ -686,7 +698,7 @@
         <p:spPr>
           <a:xfrm>
             <a:off x="3884760" y="8685360"/>
-            <a:ext cx="2971440" cy="458280"/>
+            <a:ext cx="2971080" cy="457920"/>
           </a:xfrm>
           <a:prstGeom prst="rect">
             <a:avLst/>
@@ -706,6 +718,9 @@
                 <a:spcPct val="100000"/>
               </a:lnSpc>
               <a:buNone/>
+              <a:tabLst>
+                <a:tab pos="0" algn="l"/>
+              </a:tabLst>
               <a:defRPr lang="en-US" sz="1200" b="0" u="none" strike="noStrike">
                 <a:solidFill>
                   <a:schemeClr val="dk1"/>
@@ -723,8 +738,11 @@
                 <a:spcPct val="100000"/>
               </a:lnSpc>
               <a:buNone/>
+              <a:tabLst>
+                <a:tab pos="0" algn="l"/>
+              </a:tabLst>
             </a:pPr>
-            <a:fld id="{901B96FF-A716-4FA5-A1DB-D9D426B0D290}" type="slidenum">
+            <a:fld id="{6ACF14AF-4088-40DC-9DE1-38B8B8824240}" type="slidenum">
               <a:rPr lang="en-US" sz="1200" b="0" u="none" strike="noStrike">
                 <a:solidFill>
                   <a:schemeClr val="dk1"/>
@@ -734,7 +752,7 @@
                 <a:latin typeface="+mn-lt"/>
                 <a:ea typeface="+mn-ea"/>
               </a:rPr>
-              <a:t>11</a:t>
+              <a:t>&lt;number&gt;</a:t>
             </a:fld>
             <a:endParaRPr lang="en-US" sz="1200" b="0" u="none" strike="noStrike">
               <a:solidFill>
@@ -771,7 +789,7 @@
       </p:grpSpPr>
       <p:sp>
         <p:nvSpPr>
-          <p:cNvPr id="408" name="PlaceHolder 1"/>
+          <p:cNvPr id="407" name="PlaceHolder 1"/>
           <p:cNvSpPr>
             <a:spLocks noGrp="1"/>
           </p:cNvSpPr>
@@ -782,7 +800,7 @@
         <p:spPr>
           <a:xfrm>
             <a:off x="685800" y="1143000"/>
-            <a:ext cx="5486040" cy="3085920"/>
+            <a:ext cx="5485680" cy="3085560"/>
           </a:xfrm>
           <a:prstGeom prst="rect">
             <a:avLst/>
@@ -794,7 +812,7 @@
       </p:sp>
       <p:sp>
         <p:nvSpPr>
-          <p:cNvPr id="409" name="PlaceHolder 2"/>
+          <p:cNvPr id="408" name="PlaceHolder 2"/>
           <p:cNvSpPr>
             <a:spLocks noGrp="1"/>
           </p:cNvSpPr>
@@ -805,7 +823,7 @@
         <p:spPr>
           <a:xfrm>
             <a:off x="685800" y="4400640"/>
-            <a:ext cx="5486040" cy="3600000"/>
+            <a:ext cx="5485680" cy="3599640"/>
           </a:xfrm>
           <a:prstGeom prst="rect">
             <a:avLst/>
@@ -825,6 +843,9 @@
                 <a:spcPct val="100000"/>
               </a:lnSpc>
               <a:buNone/>
+              <a:tabLst>
+                <a:tab pos="0" algn="l"/>
+              </a:tabLst>
             </a:pPr>
             <a:r>
               <a:rPr lang="en-US" sz="2000" b="0" u="none" strike="noStrike">
@@ -850,7 +871,7 @@
       </p:sp>
       <p:sp>
         <p:nvSpPr>
-          <p:cNvPr id="410" name="PlaceHolder 3"/>
+          <p:cNvPr id="409" name="PlaceHolder 3"/>
           <p:cNvSpPr>
             <a:spLocks noGrp="1"/>
           </p:cNvSpPr>
@@ -861,7 +882,7 @@
         <p:spPr>
           <a:xfrm>
             <a:off x="3884760" y="8685360"/>
-            <a:ext cx="2971440" cy="458280"/>
+            <a:ext cx="2971080" cy="457920"/>
           </a:xfrm>
           <a:prstGeom prst="rect">
             <a:avLst/>
@@ -881,6 +902,9 @@
                 <a:spcPct val="100000"/>
               </a:lnSpc>
               <a:buNone/>
+              <a:tabLst>
+                <a:tab pos="0" algn="l"/>
+              </a:tabLst>
               <a:defRPr lang="en-US" sz="1200" b="0" u="none" strike="noStrike">
                 <a:solidFill>
                   <a:schemeClr val="dk1"/>
@@ -898,8 +922,11 @@
                 <a:spcPct val="100000"/>
               </a:lnSpc>
               <a:buNone/>
+              <a:tabLst>
+                <a:tab pos="0" algn="l"/>
+              </a:tabLst>
             </a:pPr>
-            <a:fld id="{BBAF19AA-2DFD-48FB-A80A-7D17ABD688F3}" type="slidenum">
+            <a:fld id="{D7D6B0E5-9C66-40E0-B6AA-6E4911005B2F}" type="slidenum">
               <a:rPr lang="en-US" sz="1200" b="0" u="none" strike="noStrike">
                 <a:solidFill>
                   <a:schemeClr val="dk1"/>
@@ -946,7 +973,7 @@
       </p:grpSpPr>
       <p:sp>
         <p:nvSpPr>
-          <p:cNvPr id="381" name="PlaceHolder 1"/>
+          <p:cNvPr id="380" name="PlaceHolder 1"/>
           <p:cNvSpPr>
             <a:spLocks noGrp="1"/>
           </p:cNvSpPr>
@@ -957,7 +984,7 @@
         <p:spPr>
           <a:xfrm>
             <a:off x="685800" y="1143000"/>
-            <a:ext cx="5486040" cy="3085920"/>
+            <a:ext cx="5485680" cy="3085560"/>
           </a:xfrm>
           <a:prstGeom prst="rect">
             <a:avLst/>
@@ -969,7 +996,7 @@
       </p:sp>
       <p:sp>
         <p:nvSpPr>
-          <p:cNvPr id="382" name="PlaceHolder 2"/>
+          <p:cNvPr id="381" name="PlaceHolder 2"/>
           <p:cNvSpPr>
             <a:spLocks noGrp="1"/>
           </p:cNvSpPr>
@@ -980,7 +1007,7 @@
         <p:spPr>
           <a:xfrm>
             <a:off x="685800" y="4400640"/>
-            <a:ext cx="5486040" cy="3600000"/>
+            <a:ext cx="5485680" cy="3599640"/>
           </a:xfrm>
           <a:prstGeom prst="rect">
             <a:avLst/>
@@ -1000,6 +1027,9 @@
                 <a:spcPct val="100000"/>
               </a:lnSpc>
               <a:buNone/>
+              <a:tabLst>
+                <a:tab pos="0" algn="l"/>
+              </a:tabLst>
             </a:pPr>
             <a:r>
               <a:rPr lang="en-US" sz="2000" b="0" u="none" strike="noStrike">
@@ -1025,7 +1055,7 @@
       </p:sp>
       <p:sp>
         <p:nvSpPr>
-          <p:cNvPr id="383" name="PlaceHolder 3"/>
+          <p:cNvPr id="382" name="PlaceHolder 3"/>
           <p:cNvSpPr>
             <a:spLocks noGrp="1"/>
           </p:cNvSpPr>
@@ -1036,7 +1066,7 @@
         <p:spPr>
           <a:xfrm>
             <a:off x="3884760" y="8685360"/>
-            <a:ext cx="2971440" cy="458280"/>
+            <a:ext cx="2971080" cy="457920"/>
           </a:xfrm>
           <a:prstGeom prst="rect">
             <a:avLst/>
@@ -1056,6 +1086,9 @@
                 <a:spcPct val="100000"/>
               </a:lnSpc>
               <a:buNone/>
+              <a:tabLst>
+                <a:tab pos="0" algn="l"/>
+              </a:tabLst>
               <a:defRPr lang="en-US" sz="1200" b="0" u="none" strike="noStrike">
                 <a:solidFill>
                   <a:schemeClr val="dk1"/>
@@ -1073,8 +1106,11 @@
                 <a:spcPct val="100000"/>
               </a:lnSpc>
               <a:buNone/>
+              <a:tabLst>
+                <a:tab pos="0" algn="l"/>
+              </a:tabLst>
             </a:pPr>
-            <a:fld id="{5204F670-5340-409D-B924-3AD631549F27}" type="slidenum">
+            <a:fld id="{347AA9D1-CE54-42F1-A354-7BEAE20919A4}" type="slidenum">
               <a:rPr lang="en-US" sz="1200" b="0" u="none" strike="noStrike">
                 <a:solidFill>
                   <a:schemeClr val="dk1"/>
@@ -1121,7 +1157,7 @@
       </p:grpSpPr>
       <p:sp>
         <p:nvSpPr>
-          <p:cNvPr id="384" name="PlaceHolder 1"/>
+          <p:cNvPr id="383" name="PlaceHolder 1"/>
           <p:cNvSpPr>
             <a:spLocks noGrp="1"/>
           </p:cNvSpPr>
@@ -1132,7 +1168,7 @@
         <p:spPr>
           <a:xfrm>
             <a:off x="685800" y="1143000"/>
-            <a:ext cx="5486040" cy="3085920"/>
+            <a:ext cx="5485680" cy="3085560"/>
           </a:xfrm>
           <a:prstGeom prst="rect">
             <a:avLst/>
@@ -1144,7 +1180,7 @@
       </p:sp>
       <p:sp>
         <p:nvSpPr>
-          <p:cNvPr id="385" name="PlaceHolder 2"/>
+          <p:cNvPr id="384" name="PlaceHolder 2"/>
           <p:cNvSpPr>
             <a:spLocks noGrp="1"/>
           </p:cNvSpPr>
@@ -1155,7 +1191,7 @@
         <p:spPr>
           <a:xfrm>
             <a:off x="685800" y="4400640"/>
-            <a:ext cx="5486040" cy="3600000"/>
+            <a:ext cx="5485680" cy="3599640"/>
           </a:xfrm>
           <a:prstGeom prst="rect">
             <a:avLst/>
@@ -1175,6 +1211,9 @@
                 <a:spcPct val="100000"/>
               </a:lnSpc>
               <a:buNone/>
+              <a:tabLst>
+                <a:tab pos="0" algn="l"/>
+              </a:tabLst>
             </a:pPr>
             <a:r>
               <a:rPr lang="en-US" sz="2000" b="0" u="none" strike="noStrike">
@@ -1200,7 +1239,7 @@
       </p:sp>
       <p:sp>
         <p:nvSpPr>
-          <p:cNvPr id="386" name="PlaceHolder 3"/>
+          <p:cNvPr id="385" name="PlaceHolder 3"/>
           <p:cNvSpPr>
             <a:spLocks noGrp="1"/>
           </p:cNvSpPr>
@@ -1211,7 +1250,7 @@
         <p:spPr>
           <a:xfrm>
             <a:off x="3884760" y="8685360"/>
-            <a:ext cx="2971440" cy="458280"/>
+            <a:ext cx="2971080" cy="457920"/>
           </a:xfrm>
           <a:prstGeom prst="rect">
             <a:avLst/>
@@ -1231,6 +1270,9 @@
                 <a:spcPct val="100000"/>
               </a:lnSpc>
               <a:buNone/>
+              <a:tabLst>
+                <a:tab pos="0" algn="l"/>
+              </a:tabLst>
               <a:defRPr lang="en-US" sz="1200" b="0" u="none" strike="noStrike">
                 <a:solidFill>
                   <a:schemeClr val="dk1"/>
@@ -1248,8 +1290,11 @@
                 <a:spcPct val="100000"/>
               </a:lnSpc>
               <a:buNone/>
+              <a:tabLst>
+                <a:tab pos="0" algn="l"/>
+              </a:tabLst>
             </a:pPr>
-            <a:fld id="{60D41F4D-A8AA-465F-9643-34609D793C4A}" type="slidenum">
+            <a:fld id="{DB8C9DC1-2F35-4A86-9A1A-8C07A8A0F45B}" type="slidenum">
               <a:rPr lang="en-US" sz="1200" b="0" u="none" strike="noStrike">
                 <a:solidFill>
                   <a:schemeClr val="dk1"/>
@@ -1296,7 +1341,7 @@
       </p:grpSpPr>
       <p:sp>
         <p:nvSpPr>
-          <p:cNvPr id="387" name="PlaceHolder 1"/>
+          <p:cNvPr id="386" name="PlaceHolder 1"/>
           <p:cNvSpPr>
             <a:spLocks noGrp="1"/>
           </p:cNvSpPr>
@@ -1307,7 +1352,7 @@
         <p:spPr>
           <a:xfrm>
             <a:off x="685800" y="1143000"/>
-            <a:ext cx="5486040" cy="3085920"/>
+            <a:ext cx="5485680" cy="3085560"/>
           </a:xfrm>
           <a:prstGeom prst="rect">
             <a:avLst/>
@@ -1319,7 +1364,7 @@
       </p:sp>
       <p:sp>
         <p:nvSpPr>
-          <p:cNvPr id="388" name="PlaceHolder 2"/>
+          <p:cNvPr id="387" name="PlaceHolder 2"/>
           <p:cNvSpPr>
             <a:spLocks noGrp="1"/>
           </p:cNvSpPr>
@@ -1330,7 +1375,7 @@
         <p:spPr>
           <a:xfrm>
             <a:off x="685800" y="4400640"/>
-            <a:ext cx="5486040" cy="3600000"/>
+            <a:ext cx="5485680" cy="3599640"/>
           </a:xfrm>
           <a:prstGeom prst="rect">
             <a:avLst/>
@@ -1350,6 +1395,9 @@
                 <a:spcPct val="100000"/>
               </a:lnSpc>
               <a:buNone/>
+              <a:tabLst>
+                <a:tab pos="0" algn="l"/>
+              </a:tabLst>
             </a:pPr>
             <a:r>
               <a:rPr lang="en-US" sz="2000" b="0" u="none" strike="noStrike">
@@ -1375,7 +1423,7 @@
       </p:sp>
       <p:sp>
         <p:nvSpPr>
-          <p:cNvPr id="389" name="PlaceHolder 3"/>
+          <p:cNvPr id="388" name="PlaceHolder 3"/>
           <p:cNvSpPr>
             <a:spLocks noGrp="1"/>
           </p:cNvSpPr>
@@ -1386,7 +1434,7 @@
         <p:spPr>
           <a:xfrm>
             <a:off x="3884760" y="8685360"/>
-            <a:ext cx="2971440" cy="458280"/>
+            <a:ext cx="2971080" cy="457920"/>
           </a:xfrm>
           <a:prstGeom prst="rect">
             <a:avLst/>
@@ -1406,6 +1454,9 @@
                 <a:spcPct val="100000"/>
               </a:lnSpc>
               <a:buNone/>
+              <a:tabLst>
+                <a:tab pos="0" algn="l"/>
+              </a:tabLst>
               <a:defRPr lang="en-US" sz="1200" b="0" u="none" strike="noStrike">
                 <a:solidFill>
                   <a:schemeClr val="dk1"/>
@@ -1423,8 +1474,11 @@
                 <a:spcPct val="100000"/>
               </a:lnSpc>
               <a:buNone/>
+              <a:tabLst>
+                <a:tab pos="0" algn="l"/>
+              </a:tabLst>
             </a:pPr>
-            <a:fld id="{6A255C95-12C1-4F42-9503-471030E5B4E9}" type="slidenum">
+            <a:fld id="{799D0D6E-BD57-4424-A324-929D0DD57127}" type="slidenum">
               <a:rPr lang="en-US" sz="1200" b="0" u="none" strike="noStrike">
                 <a:solidFill>
                   <a:schemeClr val="dk1"/>
@@ -1471,7 +1525,7 @@
       </p:grpSpPr>
       <p:sp>
         <p:nvSpPr>
-          <p:cNvPr id="390" name="PlaceHolder 1"/>
+          <p:cNvPr id="389" name="PlaceHolder 1"/>
           <p:cNvSpPr>
             <a:spLocks noGrp="1"/>
           </p:cNvSpPr>
@@ -1482,7 +1536,7 @@
         <p:spPr>
           <a:xfrm>
             <a:off x="685800" y="1143000"/>
-            <a:ext cx="5486040" cy="3085920"/>
+            <a:ext cx="5485680" cy="3085560"/>
           </a:xfrm>
           <a:prstGeom prst="rect">
             <a:avLst/>
@@ -1494,7 +1548,7 @@
       </p:sp>
       <p:sp>
         <p:nvSpPr>
-          <p:cNvPr id="391" name="PlaceHolder 2"/>
+          <p:cNvPr id="390" name="PlaceHolder 2"/>
           <p:cNvSpPr>
             <a:spLocks noGrp="1"/>
           </p:cNvSpPr>
@@ -1505,7 +1559,7 @@
         <p:spPr>
           <a:xfrm>
             <a:off x="685800" y="4400640"/>
-            <a:ext cx="5486040" cy="3600000"/>
+            <a:ext cx="5485680" cy="3599640"/>
           </a:xfrm>
           <a:prstGeom prst="rect">
             <a:avLst/>
@@ -1525,6 +1579,9 @@
                 <a:spcPct val="100000"/>
               </a:lnSpc>
               <a:buNone/>
+              <a:tabLst>
+                <a:tab pos="0" algn="l"/>
+              </a:tabLst>
             </a:pPr>
             <a:r>
               <a:rPr lang="en-US" sz="2000" b="0" u="none" strike="noStrike">
@@ -1550,7 +1607,7 @@
       </p:sp>
       <p:sp>
         <p:nvSpPr>
-          <p:cNvPr id="392" name="PlaceHolder 3"/>
+          <p:cNvPr id="391" name="PlaceHolder 3"/>
           <p:cNvSpPr>
             <a:spLocks noGrp="1"/>
           </p:cNvSpPr>
@@ -1561,7 +1618,7 @@
         <p:spPr>
           <a:xfrm>
             <a:off x="3884760" y="8685360"/>
-            <a:ext cx="2971440" cy="458280"/>
+            <a:ext cx="2971080" cy="457920"/>
           </a:xfrm>
           <a:prstGeom prst="rect">
             <a:avLst/>
@@ -1581,6 +1638,9 @@
                 <a:spcPct val="100000"/>
               </a:lnSpc>
               <a:buNone/>
+              <a:tabLst>
+                <a:tab pos="0" algn="l"/>
+              </a:tabLst>
               <a:defRPr lang="en-US" sz="1200" b="0" u="none" strike="noStrike">
                 <a:solidFill>
                   <a:schemeClr val="dk1"/>
@@ -1598,8 +1658,11 @@
                 <a:spcPct val="100000"/>
               </a:lnSpc>
               <a:buNone/>
+              <a:tabLst>
+                <a:tab pos="0" algn="l"/>
+              </a:tabLst>
             </a:pPr>
-            <a:fld id="{1E37987B-418C-468E-A587-201322956F85}" type="slidenum">
+            <a:fld id="{1BDD82A2-4B5A-4E51-AEF8-0B46AA3F4C02}" type="slidenum">
               <a:rPr lang="en-US" sz="1200" b="0" u="none" strike="noStrike">
                 <a:solidFill>
                   <a:schemeClr val="dk1"/>
@@ -1646,7 +1709,7 @@
       </p:grpSpPr>
       <p:sp>
         <p:nvSpPr>
-          <p:cNvPr id="393" name="PlaceHolder 1"/>
+          <p:cNvPr id="392" name="PlaceHolder 1"/>
           <p:cNvSpPr>
             <a:spLocks noGrp="1"/>
           </p:cNvSpPr>
@@ -1657,7 +1720,7 @@
         <p:spPr>
           <a:xfrm>
             <a:off x="685800" y="1143000"/>
-            <a:ext cx="5486040" cy="3085920"/>
+            <a:ext cx="5485680" cy="3085560"/>
           </a:xfrm>
           <a:prstGeom prst="rect">
             <a:avLst/>
@@ -1669,7 +1732,7 @@
       </p:sp>
       <p:sp>
         <p:nvSpPr>
-          <p:cNvPr id="394" name="PlaceHolder 2"/>
+          <p:cNvPr id="393" name="PlaceHolder 2"/>
           <p:cNvSpPr>
             <a:spLocks noGrp="1"/>
           </p:cNvSpPr>
@@ -1680,7 +1743,7 @@
         <p:spPr>
           <a:xfrm>
             <a:off x="685800" y="4400640"/>
-            <a:ext cx="5486040" cy="3600000"/>
+            <a:ext cx="5485680" cy="3599640"/>
           </a:xfrm>
           <a:prstGeom prst="rect">
             <a:avLst/>
@@ -1700,6 +1763,9 @@
                 <a:spcPct val="100000"/>
               </a:lnSpc>
               <a:buNone/>
+              <a:tabLst>
+                <a:tab pos="0" algn="l"/>
+              </a:tabLst>
             </a:pPr>
             <a:r>
               <a:rPr lang="en-US" sz="2000" b="0" u="none" strike="noStrike">
@@ -1725,7 +1791,7 @@
       </p:sp>
       <p:sp>
         <p:nvSpPr>
-          <p:cNvPr id="395" name="PlaceHolder 3"/>
+          <p:cNvPr id="394" name="PlaceHolder 3"/>
           <p:cNvSpPr>
             <a:spLocks noGrp="1"/>
           </p:cNvSpPr>
@@ -1736,7 +1802,7 @@
         <p:spPr>
           <a:xfrm>
             <a:off x="3884760" y="8685360"/>
-            <a:ext cx="2971440" cy="458280"/>
+            <a:ext cx="2971080" cy="457920"/>
           </a:xfrm>
           <a:prstGeom prst="rect">
             <a:avLst/>
@@ -1756,6 +1822,9 @@
                 <a:spcPct val="100000"/>
               </a:lnSpc>
               <a:buNone/>
+              <a:tabLst>
+                <a:tab pos="0" algn="l"/>
+              </a:tabLst>
               <a:defRPr lang="en-US" sz="1200" b="0" u="none" strike="noStrike">
                 <a:solidFill>
                   <a:schemeClr val="dk1"/>
@@ -1773,8 +1842,11 @@
                 <a:spcPct val="100000"/>
               </a:lnSpc>
               <a:buNone/>
+              <a:tabLst>
+                <a:tab pos="0" algn="l"/>
+              </a:tabLst>
             </a:pPr>
-            <a:fld id="{9BD5F35A-2D4B-47D3-AED5-1FEB766508C4}" type="slidenum">
+            <a:fld id="{00AD58D5-EAAD-4B58-827D-DFA38935662E}" type="slidenum">
               <a:rPr lang="en-US" sz="1200" b="0" u="none" strike="noStrike">
                 <a:solidFill>
                   <a:schemeClr val="dk1"/>
@@ -1821,7 +1893,7 @@
       </p:grpSpPr>
       <p:sp>
         <p:nvSpPr>
-          <p:cNvPr id="396" name="PlaceHolder 1"/>
+          <p:cNvPr id="395" name="PlaceHolder 1"/>
           <p:cNvSpPr>
             <a:spLocks noGrp="1"/>
           </p:cNvSpPr>
@@ -1832,7 +1904,7 @@
         <p:spPr>
           <a:xfrm>
             <a:off x="685800" y="1143000"/>
-            <a:ext cx="5486040" cy="3085920"/>
+            <a:ext cx="5485680" cy="3085560"/>
           </a:xfrm>
           <a:prstGeom prst="rect">
             <a:avLst/>
@@ -1844,7 +1916,7 @@
       </p:sp>
       <p:sp>
         <p:nvSpPr>
-          <p:cNvPr id="397" name="PlaceHolder 2"/>
+          <p:cNvPr id="396" name="PlaceHolder 2"/>
           <p:cNvSpPr>
             <a:spLocks noGrp="1"/>
           </p:cNvSpPr>
@@ -1855,7 +1927,7 @@
         <p:spPr>
           <a:xfrm>
             <a:off x="685800" y="4400640"/>
-            <a:ext cx="5486040" cy="3600000"/>
+            <a:ext cx="5485680" cy="3599640"/>
           </a:xfrm>
           <a:prstGeom prst="rect">
             <a:avLst/>
@@ -1875,6 +1947,9 @@
                 <a:spcPct val="100000"/>
               </a:lnSpc>
               <a:buNone/>
+              <a:tabLst>
+                <a:tab pos="0" algn="l"/>
+              </a:tabLst>
             </a:pPr>
             <a:r>
               <a:rPr lang="en-US" sz="2000" b="0" u="none" strike="noStrike">
@@ -1900,7 +1975,7 @@
       </p:sp>
       <p:sp>
         <p:nvSpPr>
-          <p:cNvPr id="398" name="PlaceHolder 3"/>
+          <p:cNvPr id="397" name="PlaceHolder 3"/>
           <p:cNvSpPr>
             <a:spLocks noGrp="1"/>
           </p:cNvSpPr>
@@ -1911,7 +1986,7 @@
         <p:spPr>
           <a:xfrm>
             <a:off x="3884760" y="8685360"/>
-            <a:ext cx="2971440" cy="458280"/>
+            <a:ext cx="2971080" cy="457920"/>
           </a:xfrm>
           <a:prstGeom prst="rect">
             <a:avLst/>
@@ -1931,6 +2006,9 @@
                 <a:spcPct val="100000"/>
               </a:lnSpc>
               <a:buNone/>
+              <a:tabLst>
+                <a:tab pos="0" algn="l"/>
+              </a:tabLst>
               <a:defRPr lang="en-US" sz="1200" b="0" u="none" strike="noStrike">
                 <a:solidFill>
                   <a:schemeClr val="dk1"/>
@@ -1948,8 +2026,11 @@
                 <a:spcPct val="100000"/>
               </a:lnSpc>
               <a:buNone/>
+              <a:tabLst>
+                <a:tab pos="0" algn="l"/>
+              </a:tabLst>
             </a:pPr>
-            <a:fld id="{CE03CEA0-B764-4795-958E-D70103CF7EE6}" type="slidenum">
+            <a:fld id="{0632A067-2CBF-481B-8CF7-1D988D853E12}" type="slidenum">
               <a:rPr lang="en-US" sz="1200" b="0" u="none" strike="noStrike">
                 <a:solidFill>
                   <a:schemeClr val="dk1"/>
@@ -1996,7 +2077,7 @@
       </p:grpSpPr>
       <p:sp>
         <p:nvSpPr>
-          <p:cNvPr id="399" name="PlaceHolder 1"/>
+          <p:cNvPr id="398" name="PlaceHolder 1"/>
           <p:cNvSpPr>
             <a:spLocks noGrp="1"/>
           </p:cNvSpPr>
@@ -2007,7 +2088,7 @@
         <p:spPr>
           <a:xfrm>
             <a:off x="685800" y="1143000"/>
-            <a:ext cx="5486040" cy="3085920"/>
+            <a:ext cx="5485680" cy="3085560"/>
           </a:xfrm>
           <a:prstGeom prst="rect">
             <a:avLst/>
@@ -2019,7 +2100,7 @@
       </p:sp>
       <p:sp>
         <p:nvSpPr>
-          <p:cNvPr id="400" name="PlaceHolder 2"/>
+          <p:cNvPr id="399" name="PlaceHolder 2"/>
           <p:cNvSpPr>
             <a:spLocks noGrp="1"/>
           </p:cNvSpPr>
@@ -2030,7 +2111,7 @@
         <p:spPr>
           <a:xfrm>
             <a:off x="685800" y="4400640"/>
-            <a:ext cx="5486040" cy="3600000"/>
+            <a:ext cx="5485680" cy="3599640"/>
           </a:xfrm>
           <a:prstGeom prst="rect">
             <a:avLst/>
@@ -2050,6 +2131,9 @@
                 <a:spcPct val="100000"/>
               </a:lnSpc>
               <a:buNone/>
+              <a:tabLst>
+                <a:tab pos="0" algn="l"/>
+              </a:tabLst>
             </a:pPr>
             <a:r>
               <a:rPr lang="en-US" sz="2000" b="0" u="none" strike="noStrike">
@@ -2075,7 +2159,7 @@
       </p:sp>
       <p:sp>
         <p:nvSpPr>
-          <p:cNvPr id="401" name="PlaceHolder 3"/>
+          <p:cNvPr id="400" name="PlaceHolder 3"/>
           <p:cNvSpPr>
             <a:spLocks noGrp="1"/>
           </p:cNvSpPr>
@@ -2086,7 +2170,7 @@
         <p:spPr>
           <a:xfrm>
             <a:off x="3884760" y="8685360"/>
-            <a:ext cx="2971440" cy="458280"/>
+            <a:ext cx="2971080" cy="457920"/>
           </a:xfrm>
           <a:prstGeom prst="rect">
             <a:avLst/>
@@ -2106,6 +2190,9 @@
                 <a:spcPct val="100000"/>
               </a:lnSpc>
               <a:buNone/>
+              <a:tabLst>
+                <a:tab pos="0" algn="l"/>
+              </a:tabLst>
               <a:defRPr lang="en-US" sz="1200" b="0" u="none" strike="noStrike">
                 <a:solidFill>
                   <a:schemeClr val="dk1"/>
@@ -2123,8 +2210,11 @@
                 <a:spcPct val="100000"/>
               </a:lnSpc>
               <a:buNone/>
+              <a:tabLst>
+                <a:tab pos="0" algn="l"/>
+              </a:tabLst>
             </a:pPr>
-            <a:fld id="{C98E9CA7-ED56-4646-8886-45FFE06A1DF1}" type="slidenum">
+            <a:fld id="{B92E53DC-BA97-4B25-BDCC-36C764B90436}" type="slidenum">
               <a:rPr lang="en-US" sz="1200" b="0" u="none" strike="noStrike">
                 <a:solidFill>
                   <a:schemeClr val="dk1"/>
@@ -2171,7 +2261,7 @@
       </p:grpSpPr>
       <p:sp>
         <p:nvSpPr>
-          <p:cNvPr id="402" name="PlaceHolder 1"/>
+          <p:cNvPr id="401" name="PlaceHolder 1"/>
           <p:cNvSpPr>
             <a:spLocks noGrp="1"/>
           </p:cNvSpPr>
@@ -2182,7 +2272,7 @@
         <p:spPr>
           <a:xfrm>
             <a:off x="685800" y="1143000"/>
-            <a:ext cx="5486040" cy="3085920"/>
+            <a:ext cx="5485680" cy="3085560"/>
           </a:xfrm>
           <a:prstGeom prst="rect">
             <a:avLst/>
@@ -2194,7 +2284,7 @@
       </p:sp>
       <p:sp>
         <p:nvSpPr>
-          <p:cNvPr id="403" name="PlaceHolder 2"/>
+          <p:cNvPr id="402" name="PlaceHolder 2"/>
           <p:cNvSpPr>
             <a:spLocks noGrp="1"/>
           </p:cNvSpPr>
@@ -2205,7 +2295,7 @@
         <p:spPr>
           <a:xfrm>
             <a:off x="685800" y="4400640"/>
-            <a:ext cx="5486040" cy="3600000"/>
+            <a:ext cx="5485680" cy="3599640"/>
           </a:xfrm>
           <a:prstGeom prst="rect">
             <a:avLst/>
@@ -2225,6 +2315,9 @@
                 <a:spcPct val="100000"/>
               </a:lnSpc>
               <a:buNone/>
+              <a:tabLst>
+                <a:tab pos="0" algn="l"/>
+              </a:tabLst>
             </a:pPr>
             <a:r>
               <a:rPr lang="en-US" sz="2000" b="0" u="none" strike="noStrike">
@@ -2250,7 +2343,7 @@
       </p:sp>
       <p:sp>
         <p:nvSpPr>
-          <p:cNvPr id="404" name="PlaceHolder 3"/>
+          <p:cNvPr id="403" name="PlaceHolder 3"/>
           <p:cNvSpPr>
             <a:spLocks noGrp="1"/>
           </p:cNvSpPr>
@@ -2261,7 +2354,7 @@
         <p:spPr>
           <a:xfrm>
             <a:off x="3884760" y="8685360"/>
-            <a:ext cx="2971440" cy="458280"/>
+            <a:ext cx="2971080" cy="457920"/>
           </a:xfrm>
           <a:prstGeom prst="rect">
             <a:avLst/>
@@ -2281,6 +2374,9 @@
                 <a:spcPct val="100000"/>
               </a:lnSpc>
               <a:buNone/>
+              <a:tabLst>
+                <a:tab pos="0" algn="l"/>
+              </a:tabLst>
               <a:defRPr lang="en-US" sz="1200" b="0" u="none" strike="noStrike">
                 <a:solidFill>
                   <a:schemeClr val="dk1"/>
@@ -2298,8 +2394,11 @@
                 <a:spcPct val="100000"/>
               </a:lnSpc>
               <a:buNone/>
+              <a:tabLst>
+                <a:tab pos="0" algn="l"/>
+              </a:tabLst>
             </a:pPr>
-            <a:fld id="{1EE3ACF8-0964-4349-B065-4B9E10948636}" type="slidenum">
+            <a:fld id="{9D8F0C27-2A99-464C-AF39-14FE4780D03E}" type="slidenum">
               <a:rPr lang="en-US" sz="1200" b="0" u="none" strike="noStrike">
                 <a:solidFill>
                   <a:schemeClr val="dk1"/>
@@ -2393,7 +2492,7 @@
         <p:spPr>
           <a:xfrm>
             <a:off x="609480" y="273600"/>
-            <a:ext cx="10972080" cy="1144800"/>
+            <a:ext cx="10971720" cy="1144440"/>
           </a:xfrm>
           <a:prstGeom prst="rect">
             <a:avLst/>
@@ -2409,7 +2508,13 @@
           </a:bodyPr>
           <a:lstStyle>
             <a:lvl1pPr indent="0" algn="l">
+              <a:lnSpc>
+                <a:spcPct val="100000"/>
+              </a:lnSpc>
               <a:buNone/>
+              <a:tabLst>
+                <a:tab pos="0" algn="l"/>
+              </a:tabLst>
               <a:defRPr lang="en-US" sz="1800" b="0" u="none" strike="noStrike">
                 <a:solidFill>
                   <a:schemeClr val="dk1"/>
@@ -2422,7 +2527,13 @@
           </a:lstStyle>
           <a:p>
             <a:pPr indent="0" algn="l">
+              <a:lnSpc>
+                <a:spcPct val="100000"/>
+              </a:lnSpc>
               <a:buNone/>
+              <a:tabLst>
+                <a:tab pos="0" algn="l"/>
+              </a:tabLst>
             </a:pPr>
             <a:r>
               <a:rPr lang="en-US" sz="1800" b="0" u="none" strike="noStrike">
@@ -2459,7 +2570,7 @@
         <p:spPr>
           <a:xfrm>
             <a:off x="609480" y="1604520"/>
-            <a:ext cx="10972080" cy="3977280"/>
+            <a:ext cx="10971720" cy="3976920"/>
           </a:xfrm>
           <a:prstGeom prst="rect">
             <a:avLst/>
@@ -2475,6 +2586,9 @@
           </a:bodyPr>
           <a:lstStyle>
             <a:lvl1pPr algn="l">
+              <a:lnSpc>
+                <a:spcPct val="100000"/>
+              </a:lnSpc>
               <a:spcBef>
                 <a:spcPts val="1417"/>
               </a:spcBef>
@@ -2494,6 +2608,9 @@
               </a:defRPr>
             </a:lvl1pPr>
             <a:lvl2pPr lvl="1" algn="l">
+              <a:lnSpc>
+                <a:spcPct val="100000"/>
+              </a:lnSpc>
               <a:spcBef>
                 <a:spcPts val="1134"/>
               </a:spcBef>
@@ -2513,6 +2630,9 @@
               </a:defRPr>
             </a:lvl2pPr>
             <a:lvl3pPr lvl="2" algn="l">
+              <a:lnSpc>
+                <a:spcPct val="100000"/>
+              </a:lnSpc>
               <a:spcBef>
                 <a:spcPts val="850"/>
               </a:spcBef>
@@ -2532,6 +2652,9 @@
               </a:defRPr>
             </a:lvl3pPr>
             <a:lvl4pPr lvl="3" algn="l">
+              <a:lnSpc>
+                <a:spcPct val="100000"/>
+              </a:lnSpc>
               <a:spcBef>
                 <a:spcPts val="567"/>
               </a:spcBef>
@@ -2551,6 +2674,9 @@
               </a:defRPr>
             </a:lvl4pPr>
             <a:lvl5pPr lvl="4" algn="l">
+              <a:lnSpc>
+                <a:spcPct val="100000"/>
+              </a:lnSpc>
               <a:spcBef>
                 <a:spcPts val="283"/>
               </a:spcBef>
@@ -2570,6 +2696,9 @@
               </a:defRPr>
             </a:lvl5pPr>
             <a:lvl6pPr lvl="5" algn="l">
+              <a:lnSpc>
+                <a:spcPct val="100000"/>
+              </a:lnSpc>
               <a:spcBef>
                 <a:spcPts val="283"/>
               </a:spcBef>
@@ -2589,6 +2718,9 @@
               </a:defRPr>
             </a:lvl6pPr>
             <a:lvl7pPr lvl="6" algn="l">
+              <a:lnSpc>
+                <a:spcPct val="100000"/>
+              </a:lnSpc>
               <a:spcBef>
                 <a:spcPts val="283"/>
               </a:spcBef>
@@ -2610,6 +2742,9 @@
           </a:lstStyle>
           <a:p>
             <a:pPr marL="432000" indent="-324000" algn="l">
+              <a:lnSpc>
+                <a:spcPct val="100000"/>
+              </a:lnSpc>
               <a:spcBef>
                 <a:spcPts val="1417"/>
               </a:spcBef>
@@ -2642,6 +2777,9 @@
           </a:p>
           <a:p>
             <a:pPr marL="864000" lvl="1" indent="-324000" algn="l">
+              <a:lnSpc>
+                <a:spcPct val="100000"/>
+              </a:lnSpc>
               <a:spcBef>
                 <a:spcPts val="1134"/>
               </a:spcBef>
@@ -2674,6 +2812,9 @@
           </a:p>
           <a:p>
             <a:pPr marL="1296000" lvl="2" indent="-288000" algn="l">
+              <a:lnSpc>
+                <a:spcPct val="100000"/>
+              </a:lnSpc>
               <a:spcBef>
                 <a:spcPts val="850"/>
               </a:spcBef>
@@ -2706,6 +2847,9 @@
           </a:p>
           <a:p>
             <a:pPr marL="1728000" lvl="3" indent="-216000" algn="l">
+              <a:lnSpc>
+                <a:spcPct val="100000"/>
+              </a:lnSpc>
               <a:spcBef>
                 <a:spcPts val="567"/>
               </a:spcBef>
@@ -2738,6 +2882,9 @@
           </a:p>
           <a:p>
             <a:pPr marL="2160000" lvl="4" indent="-216000" algn="l">
+              <a:lnSpc>
+                <a:spcPct val="100000"/>
+              </a:lnSpc>
               <a:spcBef>
                 <a:spcPts val="283"/>
               </a:spcBef>
@@ -2770,6 +2917,9 @@
           </a:p>
           <a:p>
             <a:pPr marL="2592000" lvl="5" indent="-216000" algn="l">
+              <a:lnSpc>
+                <a:spcPct val="100000"/>
+              </a:lnSpc>
               <a:spcBef>
                 <a:spcPts val="283"/>
               </a:spcBef>
@@ -2802,6 +2952,9 @@
           </a:p>
           <a:p>
             <a:pPr marL="3024000" lvl="6" indent="-216000" algn="l">
+              <a:lnSpc>
+                <a:spcPct val="100000"/>
+              </a:lnSpc>
               <a:spcBef>
                 <a:spcPts val="283"/>
               </a:spcBef>
@@ -2892,60 +3045,14 @@
       </p:grpSpPr>
       <p:sp>
         <p:nvSpPr>
-          <p:cNvPr id="10" name="Shape 0"/>
-          <p:cNvSpPr/>
-          <p:nvPr/>
-        </p:nvSpPr>
-        <p:spPr>
-          <a:xfrm>
-            <a:off x="-457200" y="-685800"/>
-            <a:ext cx="12191400" cy="6857640"/>
-          </a:xfrm>
-          <a:prstGeom prst="rect">
-            <a:avLst/>
-          </a:prstGeom>
-          <a:solidFill>
-            <a:srgbClr val="0B1020"/>
-          </a:solidFill>
-          <a:ln w="12700">
-            <a:solidFill>
-              <a:srgbClr val="0B1020"/>
-            </a:solidFill>
-            <a:round/>
-          </a:ln>
-        </p:spPr>
-        <p:style>
-          <a:lnRef idx="0"/>
-          <a:fillRef idx="0"/>
-          <a:effectRef idx="0"/>
-          <a:fontRef idx="minor"/>
-        </p:style>
-        <p:txBody>
-          <a:bodyPr lIns="90000" tIns="45000" rIns="90000" bIns="45000" anchor="t">
-            <a:noAutofit/>
-          </a:bodyPr>
-          <a:p>
-            <a:endParaRPr lang="en-US" sz="1800" b="0" u="none" strike="noStrike">
-              <a:solidFill>
-                <a:srgbClr val="FFFFFF"/>
-              </a:solidFill>
-              <a:effectLst/>
-              <a:uFillTx/>
-              <a:latin typeface="Arial"/>
-            </a:endParaRPr>
-          </a:p>
-        </p:txBody>
-      </p:sp>
-      <p:sp>
-        <p:nvSpPr>
-          <p:cNvPr id="11" name="Shape 1"/>
+          <p:cNvPr id="10" name="Shape 1"/>
           <p:cNvSpPr/>
           <p:nvPr/>
         </p:nvSpPr>
         <p:spPr>
           <a:xfrm>
             <a:off x="0" y="6364080"/>
-            <a:ext cx="12191400" cy="493560"/>
+            <a:ext cx="12191040" cy="493200"/>
           </a:xfrm>
           <a:prstGeom prst="rect">
             <a:avLst/>
@@ -2984,14 +3091,14 @@
       </p:sp>
       <p:sp>
         <p:nvSpPr>
-          <p:cNvPr id="12" name="Text 2"/>
+          <p:cNvPr id="11" name="Text 2"/>
           <p:cNvSpPr/>
           <p:nvPr/>
         </p:nvSpPr>
         <p:spPr>
           <a:xfrm>
             <a:off x="365760" y="6446520"/>
-            <a:ext cx="11475360" cy="200880"/>
+            <a:ext cx="11475000" cy="200520"/>
           </a:xfrm>
           <a:prstGeom prst="rect">
             <a:avLst/>
@@ -3045,14 +3152,14 @@
       </p:sp>
       <p:sp>
         <p:nvSpPr>
-          <p:cNvPr id="13" name="Shape 3"/>
+          <p:cNvPr id="12" name="Shape 3"/>
           <p:cNvSpPr/>
           <p:nvPr/>
         </p:nvSpPr>
         <p:spPr>
           <a:xfrm>
             <a:off x="0" y="0"/>
-            <a:ext cx="12191400" cy="1005480"/>
+            <a:ext cx="12191040" cy="1005120"/>
           </a:xfrm>
           <a:prstGeom prst="rect">
             <a:avLst/>
@@ -3091,14 +3198,14 @@
       </p:sp>
       <p:sp>
         <p:nvSpPr>
-          <p:cNvPr id="14" name="Text 4"/>
+          <p:cNvPr id="13" name="Text 4"/>
           <p:cNvSpPr/>
           <p:nvPr/>
         </p:nvSpPr>
         <p:spPr>
           <a:xfrm>
             <a:off x="567000" y="567000"/>
-            <a:ext cx="2331360" cy="273960"/>
+            <a:ext cx="2331000" cy="273600"/>
           </a:xfrm>
           <a:prstGeom prst="rect">
             <a:avLst/>
@@ -3151,14 +3258,14 @@
       </p:sp>
       <p:sp>
         <p:nvSpPr>
-          <p:cNvPr id="15" name="Text 5"/>
+          <p:cNvPr id="14" name="Text 5"/>
           <p:cNvSpPr/>
           <p:nvPr/>
         </p:nvSpPr>
         <p:spPr>
           <a:xfrm>
             <a:off x="567000" y="1143000"/>
-            <a:ext cx="8137800" cy="959760"/>
+            <a:ext cx="8137440" cy="959400"/>
           </a:xfrm>
           <a:prstGeom prst="rect">
             <a:avLst/>
@@ -3197,31 +3304,7 @@
                 <a:latin typeface="Aptos Display"/>
                 <a:ea typeface="Aptos Display"/>
               </a:rPr>
-              <a:t>PRIVATE SHIELD: A Privacy-Preserving </a:t>
-            </a:r>
-            <a:r>
-              <a:rPr lang="en-US" sz="2900" b="1" u="none" strike="noStrike">
-                <a:solidFill>
-                  <a:srgbClr val="F8FAFC"/>
-                </a:solidFill>
-                <a:effectLst/>
-                <a:uFillTx/>
-                <a:latin typeface="Aptos Display"/>
-                <a:ea typeface="Aptos Display"/>
-              </a:rPr>
-              <a:t>Federated Intelligence System for IoT </a:t>
-            </a:r>
-            <a:r>
-              <a:rPr lang="en-US" sz="2900" b="1" u="none" strike="noStrike">
-                <a:solidFill>
-                  <a:srgbClr val="F8FAFC"/>
-                </a:solidFill>
-                <a:effectLst/>
-                <a:uFillTx/>
-                <a:latin typeface="Aptos Display"/>
-                <a:ea typeface="Aptos Display"/>
-              </a:rPr>
-              <a:t>Threat Detection</a:t>
+              <a:t>PRIVATE SHIELD: A Privacy-Preserving Federated Intelligence System for IoT Threat Detection</a:t>
             </a:r>
             <a:endParaRPr lang="en-US" sz="2900" b="0" u="none" strike="noStrike">
               <a:solidFill>
@@ -3236,14 +3319,14 @@
       </p:sp>
       <p:sp>
         <p:nvSpPr>
-          <p:cNvPr id="16" name="Shape 6"/>
+          <p:cNvPr id="15" name="Shape 6"/>
           <p:cNvSpPr/>
           <p:nvPr/>
         </p:nvSpPr>
         <p:spPr>
           <a:xfrm>
             <a:off x="567000" y="2304360"/>
-            <a:ext cx="1828440" cy="40680"/>
+            <a:ext cx="1828080" cy="40320"/>
           </a:xfrm>
           <a:prstGeom prst="rect">
             <a:avLst/>
@@ -3282,14 +3365,14 @@
       </p:sp>
       <p:sp>
         <p:nvSpPr>
-          <p:cNvPr id="17" name="Shape 7"/>
+          <p:cNvPr id="16" name="Shape 7"/>
           <p:cNvSpPr/>
           <p:nvPr/>
         </p:nvSpPr>
         <p:spPr>
           <a:xfrm>
             <a:off x="567000" y="2578680"/>
-            <a:ext cx="3245760" cy="347040"/>
+            <a:ext cx="3245400" cy="346680"/>
           </a:xfrm>
           <a:prstGeom prst="roundRect">
             <a:avLst>
@@ -3332,14 +3415,14 @@
       </p:sp>
       <p:sp>
         <p:nvSpPr>
-          <p:cNvPr id="18" name="Text 8"/>
+          <p:cNvPr id="17" name="Text 8"/>
           <p:cNvSpPr/>
           <p:nvPr/>
         </p:nvSpPr>
         <p:spPr>
           <a:xfrm>
             <a:off x="640080" y="2619720"/>
-            <a:ext cx="3099600" cy="264960"/>
+            <a:ext cx="3099240" cy="264600"/>
           </a:xfrm>
           <a:prstGeom prst="rect">
             <a:avLst/>
@@ -3392,14 +3475,14 @@
       </p:sp>
       <p:sp>
         <p:nvSpPr>
-          <p:cNvPr id="19" name="Shape 9"/>
+          <p:cNvPr id="18" name="Shape 9"/>
           <p:cNvSpPr/>
           <p:nvPr/>
         </p:nvSpPr>
         <p:spPr>
           <a:xfrm>
             <a:off x="3950280" y="2578680"/>
-            <a:ext cx="1325520" cy="347040"/>
+            <a:ext cx="1325160" cy="346680"/>
           </a:xfrm>
           <a:prstGeom prst="roundRect">
             <a:avLst>
@@ -3442,14 +3525,14 @@
       </p:sp>
       <p:sp>
         <p:nvSpPr>
-          <p:cNvPr id="20" name="Text 10"/>
+          <p:cNvPr id="19" name="Text 10"/>
           <p:cNvSpPr/>
           <p:nvPr/>
         </p:nvSpPr>
         <p:spPr>
           <a:xfrm>
             <a:off x="4023360" y="2619720"/>
-            <a:ext cx="1179360" cy="264960"/>
+            <a:ext cx="1179000" cy="264600"/>
           </a:xfrm>
           <a:prstGeom prst="rect">
             <a:avLst/>
@@ -3502,14 +3585,14 @@
       </p:sp>
       <p:sp>
         <p:nvSpPr>
-          <p:cNvPr id="21" name="Shape 11"/>
+          <p:cNvPr id="20" name="Shape 11"/>
           <p:cNvSpPr/>
           <p:nvPr/>
         </p:nvSpPr>
         <p:spPr>
           <a:xfrm>
             <a:off x="5413320" y="2578680"/>
-            <a:ext cx="1234080" cy="347040"/>
+            <a:ext cx="1233720" cy="346680"/>
           </a:xfrm>
           <a:prstGeom prst="roundRect">
             <a:avLst>
@@ -3552,14 +3635,14 @@
       </p:sp>
       <p:sp>
         <p:nvSpPr>
-          <p:cNvPr id="22" name="Text 12"/>
+          <p:cNvPr id="21" name="Text 12"/>
           <p:cNvSpPr/>
           <p:nvPr/>
         </p:nvSpPr>
         <p:spPr>
           <a:xfrm>
             <a:off x="5486400" y="2619720"/>
-            <a:ext cx="1087920" cy="264960"/>
+            <a:ext cx="1087560" cy="264600"/>
           </a:xfrm>
           <a:prstGeom prst="rect">
             <a:avLst/>
@@ -3612,14 +3695,14 @@
       </p:sp>
       <p:sp>
         <p:nvSpPr>
-          <p:cNvPr id="23" name="Text 15"/>
+          <p:cNvPr id="22" name="Text 15"/>
           <p:cNvSpPr/>
           <p:nvPr/>
         </p:nvSpPr>
         <p:spPr>
           <a:xfrm>
             <a:off x="567000" y="3035880"/>
-            <a:ext cx="4571640" cy="219240"/>
+            <a:ext cx="4571280" cy="218880"/>
           </a:xfrm>
           <a:prstGeom prst="rect">
             <a:avLst/>
@@ -3678,14 +3761,14 @@
       </p:sp>
       <p:sp>
         <p:nvSpPr>
-          <p:cNvPr id="24" name="Text 16"/>
+          <p:cNvPr id="23" name="Text 16"/>
           <p:cNvSpPr/>
           <p:nvPr/>
         </p:nvSpPr>
         <p:spPr>
           <a:xfrm>
             <a:off x="567000" y="3703320"/>
-            <a:ext cx="2011320" cy="255600"/>
+            <a:ext cx="2010960" cy="255240"/>
           </a:xfrm>
           <a:prstGeom prst="rect">
             <a:avLst/>
@@ -3738,14 +3821,14 @@
       </p:sp>
       <p:sp>
         <p:nvSpPr>
-          <p:cNvPr id="25" name="Shape 17"/>
+          <p:cNvPr id="24" name="Shape 17"/>
           <p:cNvSpPr/>
           <p:nvPr/>
         </p:nvSpPr>
         <p:spPr>
           <a:xfrm>
             <a:off x="567000" y="4087440"/>
-            <a:ext cx="4114440" cy="255600"/>
+            <a:ext cx="4114080" cy="255240"/>
           </a:xfrm>
           <a:prstGeom prst="rect">
             <a:avLst/>
@@ -3784,14 +3867,14 @@
       </p:sp>
       <p:sp>
         <p:nvSpPr>
-          <p:cNvPr id="26" name="Text 18"/>
+          <p:cNvPr id="25" name="Text 18"/>
           <p:cNvSpPr/>
           <p:nvPr/>
         </p:nvSpPr>
         <p:spPr>
           <a:xfrm>
             <a:off x="603360" y="4128480"/>
-            <a:ext cx="4041360" cy="173520"/>
+            <a:ext cx="4041000" cy="173160"/>
           </a:xfrm>
           <a:prstGeom prst="rect">
             <a:avLst/>
@@ -3844,14 +3927,14 @@
       </p:sp>
       <p:sp>
         <p:nvSpPr>
-          <p:cNvPr id="27" name="Shape 19"/>
+          <p:cNvPr id="26" name="Shape 19"/>
           <p:cNvSpPr/>
           <p:nvPr/>
         </p:nvSpPr>
         <p:spPr>
           <a:xfrm>
             <a:off x="4681800" y="4087440"/>
-            <a:ext cx="2285640" cy="255600"/>
+            <a:ext cx="2285280" cy="255240"/>
           </a:xfrm>
           <a:prstGeom prst="rect">
             <a:avLst/>
@@ -3890,14 +3973,14 @@
       </p:sp>
       <p:sp>
         <p:nvSpPr>
-          <p:cNvPr id="28" name="Text 20"/>
+          <p:cNvPr id="27" name="Text 20"/>
           <p:cNvSpPr/>
           <p:nvPr/>
         </p:nvSpPr>
         <p:spPr>
           <a:xfrm>
             <a:off x="4718160" y="4128480"/>
-            <a:ext cx="2212560" cy="173520"/>
+            <a:ext cx="2212200" cy="173160"/>
           </a:xfrm>
           <a:prstGeom prst="rect">
             <a:avLst/>
@@ -3950,14 +4033,14 @@
       </p:sp>
       <p:sp>
         <p:nvSpPr>
-          <p:cNvPr id="29" name="Shape 21"/>
+          <p:cNvPr id="28" name="Shape 21"/>
           <p:cNvSpPr/>
           <p:nvPr/>
         </p:nvSpPr>
         <p:spPr>
           <a:xfrm>
             <a:off x="567000" y="4343400"/>
-            <a:ext cx="4114440" cy="282960"/>
+            <a:ext cx="4114080" cy="282600"/>
           </a:xfrm>
           <a:prstGeom prst="rect">
             <a:avLst/>
@@ -3996,14 +4079,14 @@
       </p:sp>
       <p:sp>
         <p:nvSpPr>
-          <p:cNvPr id="30" name="Text 22"/>
+          <p:cNvPr id="29" name="Text 22"/>
           <p:cNvSpPr/>
           <p:nvPr/>
         </p:nvSpPr>
         <p:spPr>
           <a:xfrm>
             <a:off x="603360" y="4384440"/>
-            <a:ext cx="4041360" cy="200880"/>
+            <a:ext cx="4041000" cy="200520"/>
           </a:xfrm>
           <a:prstGeom prst="rect">
             <a:avLst/>
@@ -4056,14 +4139,14 @@
       </p:sp>
       <p:sp>
         <p:nvSpPr>
-          <p:cNvPr id="31" name="Shape 23"/>
+          <p:cNvPr id="30" name="Shape 23"/>
           <p:cNvSpPr/>
           <p:nvPr/>
         </p:nvSpPr>
         <p:spPr>
           <a:xfrm>
             <a:off x="4681800" y="4343400"/>
-            <a:ext cx="2285640" cy="282960"/>
+            <a:ext cx="2285280" cy="282600"/>
           </a:xfrm>
           <a:prstGeom prst="rect">
             <a:avLst/>
@@ -4102,14 +4185,14 @@
       </p:sp>
       <p:sp>
         <p:nvSpPr>
-          <p:cNvPr id="32" name="Text 24"/>
+          <p:cNvPr id="31" name="Text 24"/>
           <p:cNvSpPr/>
           <p:nvPr/>
         </p:nvSpPr>
         <p:spPr>
           <a:xfrm>
             <a:off x="4718160" y="4384440"/>
-            <a:ext cx="2212560" cy="200880"/>
+            <a:ext cx="2212200" cy="200520"/>
           </a:xfrm>
           <a:prstGeom prst="rect">
             <a:avLst/>
@@ -4162,14 +4245,14 @@
       </p:sp>
       <p:sp>
         <p:nvSpPr>
-          <p:cNvPr id="33" name="Shape 25"/>
+          <p:cNvPr id="32" name="Shape 25"/>
           <p:cNvSpPr/>
           <p:nvPr/>
         </p:nvSpPr>
         <p:spPr>
           <a:xfrm>
             <a:off x="567000" y="4626720"/>
-            <a:ext cx="4114440" cy="282960"/>
+            <a:ext cx="4114080" cy="282600"/>
           </a:xfrm>
           <a:prstGeom prst="rect">
             <a:avLst/>
@@ -4208,14 +4291,14 @@
       </p:sp>
       <p:sp>
         <p:nvSpPr>
-          <p:cNvPr id="34" name="Text 26"/>
+          <p:cNvPr id="33" name="Text 26"/>
           <p:cNvSpPr/>
           <p:nvPr/>
         </p:nvSpPr>
         <p:spPr>
           <a:xfrm>
             <a:off x="603360" y="4668120"/>
-            <a:ext cx="4041360" cy="200880"/>
+            <a:ext cx="4041000" cy="200520"/>
           </a:xfrm>
           <a:prstGeom prst="rect">
             <a:avLst/>
@@ -4253,7 +4336,18 @@
                 <a:uFillTx/>
                 <a:latin typeface="Aptos"/>
               </a:rPr>
-              <a:t>Rima Saha</a:t>
+              <a:t>Rima </a:t>
+            </a:r>
+            <a:r>
+              <a:rPr lang="en-US" sz="939" b="0" u="none" strike="noStrike">
+                <a:solidFill>
+                  <a:srgbClr val="F8FAFC"/>
+                </a:solidFill>
+                <a:effectLst/>
+                <a:uFillTx/>
+                <a:latin typeface="Aptos"/>
+              </a:rPr>
+              <a:t>Saha</a:t>
             </a:r>
             <a:endParaRPr lang="en-US" sz="939" b="0" u="none" strike="noStrike">
               <a:solidFill>
@@ -4268,14 +4362,14 @@
       </p:sp>
       <p:sp>
         <p:nvSpPr>
-          <p:cNvPr id="35" name="Shape 27"/>
+          <p:cNvPr id="34" name="Shape 27"/>
           <p:cNvSpPr/>
           <p:nvPr/>
         </p:nvSpPr>
         <p:spPr>
           <a:xfrm>
             <a:off x="4681800" y="4626720"/>
-            <a:ext cx="2285640" cy="282960"/>
+            <a:ext cx="2285280" cy="282600"/>
           </a:xfrm>
           <a:prstGeom prst="rect">
             <a:avLst/>
@@ -4314,14 +4408,14 @@
       </p:sp>
       <p:sp>
         <p:nvSpPr>
-          <p:cNvPr id="36" name="Text 28"/>
+          <p:cNvPr id="35" name="Text 28"/>
           <p:cNvSpPr/>
           <p:nvPr/>
         </p:nvSpPr>
         <p:spPr>
           <a:xfrm>
             <a:off x="4718160" y="4668120"/>
-            <a:ext cx="2212560" cy="200880"/>
+            <a:ext cx="2212200" cy="200520"/>
           </a:xfrm>
           <a:prstGeom prst="rect">
             <a:avLst/>
@@ -4374,14 +4468,14 @@
       </p:sp>
       <p:sp>
         <p:nvSpPr>
-          <p:cNvPr id="37" name="Shape 29"/>
+          <p:cNvPr id="36" name="Shape 29"/>
           <p:cNvSpPr/>
           <p:nvPr/>
         </p:nvSpPr>
         <p:spPr>
           <a:xfrm>
             <a:off x="567000" y="4910400"/>
-            <a:ext cx="4114440" cy="282960"/>
+            <a:ext cx="4114080" cy="282600"/>
           </a:xfrm>
           <a:prstGeom prst="rect">
             <a:avLst/>
@@ -4420,14 +4514,14 @@
       </p:sp>
       <p:sp>
         <p:nvSpPr>
-          <p:cNvPr id="38" name="Text 30"/>
+          <p:cNvPr id="37" name="Text 30"/>
           <p:cNvSpPr/>
           <p:nvPr/>
         </p:nvSpPr>
         <p:spPr>
           <a:xfrm>
             <a:off x="603360" y="4951440"/>
-            <a:ext cx="4041360" cy="200880"/>
+            <a:ext cx="4041000" cy="200520"/>
           </a:xfrm>
           <a:prstGeom prst="rect">
             <a:avLst/>
@@ -4480,14 +4574,14 @@
       </p:sp>
       <p:sp>
         <p:nvSpPr>
-          <p:cNvPr id="39" name="Shape 31"/>
+          <p:cNvPr id="38" name="Shape 31"/>
           <p:cNvSpPr/>
           <p:nvPr/>
         </p:nvSpPr>
         <p:spPr>
           <a:xfrm>
             <a:off x="4681800" y="4910400"/>
-            <a:ext cx="2285640" cy="282960"/>
+            <a:ext cx="2285280" cy="282600"/>
           </a:xfrm>
           <a:prstGeom prst="rect">
             <a:avLst/>
@@ -4526,14 +4620,14 @@
       </p:sp>
       <p:sp>
         <p:nvSpPr>
-          <p:cNvPr id="40" name="Text 32"/>
+          <p:cNvPr id="39" name="Text 32"/>
           <p:cNvSpPr/>
           <p:nvPr/>
         </p:nvSpPr>
         <p:spPr>
           <a:xfrm>
             <a:off x="4718160" y="4951440"/>
-            <a:ext cx="2212560" cy="200880"/>
+            <a:ext cx="2212200" cy="200520"/>
           </a:xfrm>
           <a:prstGeom prst="rect">
             <a:avLst/>
@@ -4571,7 +4665,18 @@
                 <a:uFillTx/>
                 <a:latin typeface="Aptos"/>
               </a:rPr>
-              <a:t>2221433042</a:t>
+              <a:t>22214</a:t>
+            </a:r>
+            <a:r>
+              <a:rPr lang="en-US" sz="939" b="0" u="none" strike="noStrike">
+                <a:solidFill>
+                  <a:srgbClr val="F8FAFC"/>
+                </a:solidFill>
+                <a:effectLst/>
+                <a:uFillTx/>
+                <a:latin typeface="Aptos"/>
+              </a:rPr>
+              <a:t>33042</a:t>
             </a:r>
             <a:endParaRPr lang="en-US" sz="939" b="0" u="none" strike="noStrike">
               <a:solidFill>
@@ -4586,14 +4691,14 @@
       </p:sp>
       <p:sp>
         <p:nvSpPr>
-          <p:cNvPr id="41" name="Shape 33"/>
+          <p:cNvPr id="40" name="Shape 33"/>
           <p:cNvSpPr/>
           <p:nvPr/>
         </p:nvSpPr>
         <p:spPr>
           <a:xfrm>
             <a:off x="567000" y="5193720"/>
-            <a:ext cx="4114440" cy="282960"/>
+            <a:ext cx="4114080" cy="282600"/>
           </a:xfrm>
           <a:prstGeom prst="rect">
             <a:avLst/>
@@ -4632,14 +4737,14 @@
       </p:sp>
       <p:sp>
         <p:nvSpPr>
-          <p:cNvPr id="42" name="Text 34"/>
+          <p:cNvPr id="41" name="Text 34"/>
           <p:cNvSpPr/>
           <p:nvPr/>
         </p:nvSpPr>
         <p:spPr>
           <a:xfrm>
             <a:off x="603360" y="5235120"/>
-            <a:ext cx="4041360" cy="200880"/>
+            <a:ext cx="4041000" cy="200520"/>
           </a:xfrm>
           <a:prstGeom prst="rect">
             <a:avLst/>
@@ -4692,14 +4797,14 @@
       </p:sp>
       <p:sp>
         <p:nvSpPr>
-          <p:cNvPr id="43" name="Shape 35"/>
+          <p:cNvPr id="42" name="Shape 35"/>
           <p:cNvSpPr/>
           <p:nvPr/>
         </p:nvSpPr>
         <p:spPr>
           <a:xfrm>
             <a:off x="4681800" y="5193720"/>
-            <a:ext cx="2285640" cy="282960"/>
+            <a:ext cx="2285280" cy="282600"/>
           </a:xfrm>
           <a:prstGeom prst="rect">
             <a:avLst/>
@@ -4738,14 +4843,14 @@
       </p:sp>
       <p:sp>
         <p:nvSpPr>
-          <p:cNvPr id="44" name="Text 36"/>
+          <p:cNvPr id="43" name="Text 36"/>
           <p:cNvSpPr/>
           <p:nvPr/>
         </p:nvSpPr>
         <p:spPr>
           <a:xfrm>
             <a:off x="4718160" y="5235120"/>
-            <a:ext cx="2212560" cy="200880"/>
+            <a:ext cx="2212200" cy="200520"/>
           </a:xfrm>
           <a:prstGeom prst="rect">
             <a:avLst/>
@@ -4835,14 +4940,14 @@
       </p:grpSpPr>
       <p:sp>
         <p:nvSpPr>
-          <p:cNvPr id="342" name="Shape 0"/>
+          <p:cNvPr id="341" name="Shape 0"/>
           <p:cNvSpPr/>
           <p:nvPr/>
         </p:nvSpPr>
         <p:spPr>
           <a:xfrm>
             <a:off x="0" y="0"/>
-            <a:ext cx="12191400" cy="6857640"/>
+            <a:ext cx="12191040" cy="6857280"/>
           </a:xfrm>
           <a:prstGeom prst="rect">
             <a:avLst/>
@@ -4881,14 +4986,14 @@
       </p:sp>
       <p:sp>
         <p:nvSpPr>
-          <p:cNvPr id="343" name="Shape 1"/>
+          <p:cNvPr id="342" name="Shape 1"/>
           <p:cNvSpPr/>
           <p:nvPr/>
         </p:nvSpPr>
         <p:spPr>
           <a:xfrm>
             <a:off x="0" y="6364080"/>
-            <a:ext cx="12191400" cy="493560"/>
+            <a:ext cx="12191040" cy="493200"/>
           </a:xfrm>
           <a:prstGeom prst="rect">
             <a:avLst/>
@@ -4927,14 +5032,14 @@
       </p:sp>
       <p:sp>
         <p:nvSpPr>
-          <p:cNvPr id="344" name="Text 2"/>
+          <p:cNvPr id="343" name="Text 2"/>
           <p:cNvSpPr/>
           <p:nvPr/>
         </p:nvSpPr>
         <p:spPr>
           <a:xfrm>
             <a:off x="365760" y="6446520"/>
-            <a:ext cx="11475360" cy="200880"/>
+            <a:ext cx="11475000" cy="200520"/>
           </a:xfrm>
           <a:prstGeom prst="rect">
             <a:avLst/>
@@ -4988,14 +5093,14 @@
       </p:sp>
       <p:sp>
         <p:nvSpPr>
-          <p:cNvPr id="345" name="Text 3"/>
+          <p:cNvPr id="344" name="Text 3"/>
           <p:cNvSpPr/>
           <p:nvPr/>
         </p:nvSpPr>
         <p:spPr>
           <a:xfrm>
             <a:off x="502920" y="329040"/>
-            <a:ext cx="9966600" cy="411120"/>
+            <a:ext cx="9966240" cy="410760"/>
           </a:xfrm>
           <a:prstGeom prst="rect">
             <a:avLst/>
@@ -5049,14 +5154,14 @@
       </p:sp>
       <p:sp>
         <p:nvSpPr>
-          <p:cNvPr id="346" name="Shape 4"/>
+          <p:cNvPr id="345" name="Shape 4"/>
           <p:cNvSpPr/>
           <p:nvPr/>
         </p:nvSpPr>
         <p:spPr>
           <a:xfrm>
             <a:off x="502920" y="831960"/>
-            <a:ext cx="1325520" cy="36360"/>
+            <a:ext cx="1325160" cy="36000"/>
           </a:xfrm>
           <a:prstGeom prst="rect">
             <a:avLst/>
@@ -5095,14 +5200,14 @@
       </p:sp>
       <p:sp>
         <p:nvSpPr>
-          <p:cNvPr id="347" name="Text 5"/>
+          <p:cNvPr id="346" name="Text 5"/>
           <p:cNvSpPr/>
           <p:nvPr/>
         </p:nvSpPr>
         <p:spPr>
           <a:xfrm>
             <a:off x="1938600" y="768240"/>
-            <a:ext cx="7131960" cy="200880"/>
+            <a:ext cx="7131600" cy="200520"/>
           </a:xfrm>
           <a:prstGeom prst="rect">
             <a:avLst/>
@@ -5155,14 +5260,14 @@
       </p:sp>
       <p:sp>
         <p:nvSpPr>
-          <p:cNvPr id="348" name="Shape 6"/>
+          <p:cNvPr id="347" name="Shape 6"/>
           <p:cNvSpPr/>
           <p:nvPr/>
         </p:nvSpPr>
         <p:spPr>
           <a:xfrm>
             <a:off x="658440" y="1097280"/>
-            <a:ext cx="10926720" cy="639720"/>
+            <a:ext cx="10926360" cy="639360"/>
           </a:xfrm>
           <a:prstGeom prst="roundRect">
             <a:avLst>
@@ -5205,14 +5310,14 @@
       </p:sp>
       <p:sp>
         <p:nvSpPr>
-          <p:cNvPr id="349" name="Text 7"/>
+          <p:cNvPr id="348" name="Text 7"/>
           <p:cNvSpPr/>
           <p:nvPr/>
         </p:nvSpPr>
         <p:spPr>
           <a:xfrm>
             <a:off x="868680" y="1197720"/>
-            <a:ext cx="10496880" cy="438480"/>
+            <a:ext cx="10496520" cy="438120"/>
           </a:xfrm>
           <a:prstGeom prst="rect">
             <a:avLst/>
@@ -5265,14 +5370,14 @@
       </p:sp>
       <p:sp>
         <p:nvSpPr>
-          <p:cNvPr id="350" name="Shape 8"/>
+          <p:cNvPr id="349" name="Shape 8"/>
           <p:cNvSpPr/>
           <p:nvPr/>
         </p:nvSpPr>
         <p:spPr>
           <a:xfrm>
             <a:off x="658440" y="1883520"/>
-            <a:ext cx="10926720" cy="639720"/>
+            <a:ext cx="10926360" cy="639360"/>
           </a:xfrm>
           <a:prstGeom prst="roundRect">
             <a:avLst>
@@ -5315,14 +5420,14 @@
       </p:sp>
       <p:sp>
         <p:nvSpPr>
-          <p:cNvPr id="351" name="Text 9"/>
+          <p:cNvPr id="350" name="Text 9"/>
           <p:cNvSpPr/>
           <p:nvPr/>
         </p:nvSpPr>
         <p:spPr>
           <a:xfrm>
             <a:off x="868680" y="1984320"/>
-            <a:ext cx="10496880" cy="438480"/>
+            <a:ext cx="10496520" cy="438120"/>
           </a:xfrm>
           <a:prstGeom prst="rect">
             <a:avLst/>
@@ -5375,14 +5480,14 @@
       </p:sp>
       <p:sp>
         <p:nvSpPr>
-          <p:cNvPr id="352" name="Shape 10"/>
+          <p:cNvPr id="351" name="Shape 10"/>
           <p:cNvSpPr/>
           <p:nvPr/>
         </p:nvSpPr>
         <p:spPr>
           <a:xfrm>
             <a:off x="658440" y="2670120"/>
-            <a:ext cx="10926720" cy="639720"/>
+            <a:ext cx="10926360" cy="639360"/>
           </a:xfrm>
           <a:prstGeom prst="roundRect">
             <a:avLst>
@@ -5425,14 +5530,14 @@
       </p:sp>
       <p:sp>
         <p:nvSpPr>
-          <p:cNvPr id="353" name="Text 11"/>
+          <p:cNvPr id="352" name="Text 11"/>
           <p:cNvSpPr/>
           <p:nvPr/>
         </p:nvSpPr>
         <p:spPr>
           <a:xfrm>
             <a:off x="868680" y="2770560"/>
-            <a:ext cx="10496880" cy="438480"/>
+            <a:ext cx="10496520" cy="438120"/>
           </a:xfrm>
           <a:prstGeom prst="rect">
             <a:avLst/>
@@ -5485,14 +5590,14 @@
       </p:sp>
       <p:sp>
         <p:nvSpPr>
-          <p:cNvPr id="354" name="Shape 12"/>
+          <p:cNvPr id="353" name="Shape 12"/>
           <p:cNvSpPr/>
           <p:nvPr/>
         </p:nvSpPr>
         <p:spPr>
           <a:xfrm>
             <a:off x="658440" y="3456360"/>
-            <a:ext cx="10926720" cy="639720"/>
+            <a:ext cx="10926360" cy="639360"/>
           </a:xfrm>
           <a:prstGeom prst="roundRect">
             <a:avLst>
@@ -5535,14 +5640,14 @@
       </p:sp>
       <p:sp>
         <p:nvSpPr>
-          <p:cNvPr id="355" name="Text 13"/>
+          <p:cNvPr id="354" name="Text 13"/>
           <p:cNvSpPr/>
           <p:nvPr/>
         </p:nvSpPr>
         <p:spPr>
           <a:xfrm>
             <a:off x="868680" y="3557160"/>
-            <a:ext cx="10496880" cy="438480"/>
+            <a:ext cx="10496520" cy="438120"/>
           </a:xfrm>
           <a:prstGeom prst="rect">
             <a:avLst/>
@@ -5595,14 +5700,14 @@
       </p:sp>
       <p:sp>
         <p:nvSpPr>
-          <p:cNvPr id="356" name="Shape 14"/>
+          <p:cNvPr id="355" name="Shape 14"/>
           <p:cNvSpPr/>
           <p:nvPr/>
         </p:nvSpPr>
         <p:spPr>
           <a:xfrm>
             <a:off x="658440" y="4242960"/>
-            <a:ext cx="10926720" cy="639720"/>
+            <a:ext cx="10926360" cy="639360"/>
           </a:xfrm>
           <a:prstGeom prst="roundRect">
             <a:avLst>
@@ -5645,14 +5750,14 @@
       </p:sp>
       <p:sp>
         <p:nvSpPr>
-          <p:cNvPr id="357" name="Text 15"/>
+          <p:cNvPr id="356" name="Text 15"/>
           <p:cNvSpPr/>
           <p:nvPr/>
         </p:nvSpPr>
         <p:spPr>
           <a:xfrm>
             <a:off x="868680" y="4343400"/>
-            <a:ext cx="10496880" cy="438480"/>
+            <a:ext cx="10496520" cy="438120"/>
           </a:xfrm>
           <a:prstGeom prst="rect">
             <a:avLst/>
@@ -5705,14 +5810,14 @@
       </p:sp>
       <p:sp>
         <p:nvSpPr>
-          <p:cNvPr id="358" name="Shape 16"/>
+          <p:cNvPr id="357" name="Shape 16"/>
           <p:cNvSpPr/>
           <p:nvPr/>
         </p:nvSpPr>
         <p:spPr>
           <a:xfrm>
             <a:off x="658440" y="5029200"/>
-            <a:ext cx="10926720" cy="639720"/>
+            <a:ext cx="10926360" cy="639360"/>
           </a:xfrm>
           <a:prstGeom prst="roundRect">
             <a:avLst>
@@ -5755,14 +5860,14 @@
       </p:sp>
       <p:sp>
         <p:nvSpPr>
-          <p:cNvPr id="359" name="Text 17"/>
+          <p:cNvPr id="358" name="Text 17"/>
           <p:cNvSpPr/>
           <p:nvPr/>
         </p:nvSpPr>
         <p:spPr>
           <a:xfrm>
             <a:off x="868680" y="5129640"/>
-            <a:ext cx="10496880" cy="438480"/>
+            <a:ext cx="10496520" cy="438120"/>
           </a:xfrm>
           <a:prstGeom prst="rect">
             <a:avLst/>
@@ -5852,14 +5957,14 @@
       </p:grpSpPr>
       <p:sp>
         <p:nvSpPr>
-          <p:cNvPr id="360" name="Shape 0"/>
+          <p:cNvPr id="359" name="Shape 0"/>
           <p:cNvSpPr/>
           <p:nvPr/>
         </p:nvSpPr>
         <p:spPr>
           <a:xfrm>
             <a:off x="0" y="0"/>
-            <a:ext cx="12191400" cy="6857640"/>
+            <a:ext cx="12191040" cy="6857280"/>
           </a:xfrm>
           <a:prstGeom prst="rect">
             <a:avLst/>
@@ -5898,14 +6003,14 @@
       </p:sp>
       <p:sp>
         <p:nvSpPr>
-          <p:cNvPr id="361" name="Shape 1"/>
+          <p:cNvPr id="360" name="Shape 1"/>
           <p:cNvSpPr/>
           <p:nvPr/>
         </p:nvSpPr>
         <p:spPr>
           <a:xfrm>
             <a:off x="0" y="6364080"/>
-            <a:ext cx="12191400" cy="493560"/>
+            <a:ext cx="12191040" cy="493200"/>
           </a:xfrm>
           <a:prstGeom prst="rect">
             <a:avLst/>
@@ -5944,14 +6049,14 @@
       </p:sp>
       <p:sp>
         <p:nvSpPr>
-          <p:cNvPr id="362" name="Text 2"/>
+          <p:cNvPr id="361" name="Text 2"/>
           <p:cNvSpPr/>
           <p:nvPr/>
         </p:nvSpPr>
         <p:spPr>
           <a:xfrm>
             <a:off x="365760" y="6446520"/>
-            <a:ext cx="11475360" cy="200880"/>
+            <a:ext cx="11475000" cy="200520"/>
           </a:xfrm>
           <a:prstGeom prst="rect">
             <a:avLst/>
@@ -6005,14 +6110,14 @@
       </p:sp>
       <p:sp>
         <p:nvSpPr>
-          <p:cNvPr id="363" name="Text 3"/>
+          <p:cNvPr id="362" name="Text 3"/>
           <p:cNvSpPr/>
           <p:nvPr/>
         </p:nvSpPr>
         <p:spPr>
           <a:xfrm>
             <a:off x="502920" y="329040"/>
-            <a:ext cx="9966600" cy="411120"/>
+            <a:ext cx="9966240" cy="410760"/>
           </a:xfrm>
           <a:prstGeom prst="rect">
             <a:avLst/>
@@ -6066,14 +6171,14 @@
       </p:sp>
       <p:sp>
         <p:nvSpPr>
-          <p:cNvPr id="364" name="Shape 4"/>
+          <p:cNvPr id="363" name="Shape 4"/>
           <p:cNvSpPr/>
           <p:nvPr/>
         </p:nvSpPr>
         <p:spPr>
           <a:xfrm>
             <a:off x="502920" y="831960"/>
-            <a:ext cx="1325520" cy="36360"/>
+            <a:ext cx="1325160" cy="36000"/>
           </a:xfrm>
           <a:prstGeom prst="rect">
             <a:avLst/>
@@ -6112,14 +6217,14 @@
       </p:sp>
       <p:sp>
         <p:nvSpPr>
-          <p:cNvPr id="365" name="Text 5"/>
+          <p:cNvPr id="364" name="Text 5"/>
           <p:cNvSpPr/>
           <p:nvPr/>
         </p:nvSpPr>
         <p:spPr>
           <a:xfrm>
             <a:off x="1938600" y="768240"/>
-            <a:ext cx="7131960" cy="200880"/>
+            <a:ext cx="7131600" cy="200520"/>
           </a:xfrm>
           <a:prstGeom prst="rect">
             <a:avLst/>
@@ -6172,14 +6277,14 @@
       </p:sp>
       <p:sp>
         <p:nvSpPr>
-          <p:cNvPr id="366" name="Shape 6"/>
+          <p:cNvPr id="365" name="Shape 6"/>
           <p:cNvSpPr/>
           <p:nvPr/>
         </p:nvSpPr>
         <p:spPr>
           <a:xfrm>
             <a:off x="658440" y="1097280"/>
-            <a:ext cx="10926720" cy="639720"/>
+            <a:ext cx="10926360" cy="639360"/>
           </a:xfrm>
           <a:prstGeom prst="roundRect">
             <a:avLst>
@@ -6222,14 +6327,14 @@
       </p:sp>
       <p:sp>
         <p:nvSpPr>
-          <p:cNvPr id="367" name="Text 7"/>
+          <p:cNvPr id="366" name="Text 7"/>
           <p:cNvSpPr/>
           <p:nvPr/>
         </p:nvSpPr>
         <p:spPr>
           <a:xfrm>
             <a:off x="868680" y="1197720"/>
-            <a:ext cx="10496880" cy="438480"/>
+            <a:ext cx="10496520" cy="438120"/>
           </a:xfrm>
           <a:prstGeom prst="rect">
             <a:avLst/>
@@ -6282,14 +6387,14 @@
       </p:sp>
       <p:sp>
         <p:nvSpPr>
-          <p:cNvPr id="368" name="Shape 8"/>
+          <p:cNvPr id="367" name="Shape 8"/>
           <p:cNvSpPr/>
           <p:nvPr/>
         </p:nvSpPr>
         <p:spPr>
           <a:xfrm>
             <a:off x="658440" y="1883520"/>
-            <a:ext cx="10926720" cy="639720"/>
+            <a:ext cx="10926360" cy="639360"/>
           </a:xfrm>
           <a:prstGeom prst="roundRect">
             <a:avLst>
@@ -6332,14 +6437,14 @@
       </p:sp>
       <p:sp>
         <p:nvSpPr>
-          <p:cNvPr id="369" name="Text 9"/>
+          <p:cNvPr id="368" name="Text 9"/>
           <p:cNvSpPr/>
           <p:nvPr/>
         </p:nvSpPr>
         <p:spPr>
           <a:xfrm>
             <a:off x="868680" y="1984320"/>
-            <a:ext cx="10496880" cy="438480"/>
+            <a:ext cx="10496520" cy="438120"/>
           </a:xfrm>
           <a:prstGeom prst="rect">
             <a:avLst/>
@@ -6392,14 +6497,14 @@
       </p:sp>
       <p:sp>
         <p:nvSpPr>
-          <p:cNvPr id="370" name="Shape 10"/>
+          <p:cNvPr id="369" name="Shape 10"/>
           <p:cNvSpPr/>
           <p:nvPr/>
         </p:nvSpPr>
         <p:spPr>
           <a:xfrm>
             <a:off x="658440" y="2670120"/>
-            <a:ext cx="10926720" cy="639720"/>
+            <a:ext cx="10926360" cy="639360"/>
           </a:xfrm>
           <a:prstGeom prst="roundRect">
             <a:avLst>
@@ -6442,14 +6547,14 @@
       </p:sp>
       <p:sp>
         <p:nvSpPr>
-          <p:cNvPr id="371" name="Text 11"/>
+          <p:cNvPr id="370" name="Text 11"/>
           <p:cNvSpPr/>
           <p:nvPr/>
         </p:nvSpPr>
         <p:spPr>
           <a:xfrm>
             <a:off x="868680" y="2770560"/>
-            <a:ext cx="10496880" cy="438480"/>
+            <a:ext cx="10496520" cy="438120"/>
           </a:xfrm>
           <a:prstGeom prst="rect">
             <a:avLst/>
@@ -6502,14 +6607,14 @@
       </p:sp>
       <p:sp>
         <p:nvSpPr>
-          <p:cNvPr id="372" name="Shape 12"/>
+          <p:cNvPr id="371" name="Shape 12"/>
           <p:cNvSpPr/>
           <p:nvPr/>
         </p:nvSpPr>
         <p:spPr>
           <a:xfrm>
             <a:off x="658440" y="3456360"/>
-            <a:ext cx="10926720" cy="639720"/>
+            <a:ext cx="10926360" cy="639360"/>
           </a:xfrm>
           <a:prstGeom prst="roundRect">
             <a:avLst>
@@ -6552,14 +6657,14 @@
       </p:sp>
       <p:sp>
         <p:nvSpPr>
-          <p:cNvPr id="373" name="Text 13"/>
+          <p:cNvPr id="372" name="Text 13"/>
           <p:cNvSpPr/>
           <p:nvPr/>
         </p:nvSpPr>
         <p:spPr>
           <a:xfrm>
             <a:off x="868680" y="3557160"/>
-            <a:ext cx="10496880" cy="438480"/>
+            <a:ext cx="10496520" cy="438120"/>
           </a:xfrm>
           <a:prstGeom prst="rect">
             <a:avLst/>
@@ -6612,14 +6717,14 @@
       </p:sp>
       <p:sp>
         <p:nvSpPr>
-          <p:cNvPr id="374" name="Shape 14"/>
+          <p:cNvPr id="373" name="Shape 14"/>
           <p:cNvSpPr/>
           <p:nvPr/>
         </p:nvSpPr>
         <p:spPr>
           <a:xfrm>
             <a:off x="658440" y="4242960"/>
-            <a:ext cx="10926720" cy="639720"/>
+            <a:ext cx="10926360" cy="639360"/>
           </a:xfrm>
           <a:prstGeom prst="roundRect">
             <a:avLst>
@@ -6662,14 +6767,14 @@
       </p:sp>
       <p:sp>
         <p:nvSpPr>
-          <p:cNvPr id="375" name="Text 15"/>
+          <p:cNvPr id="374" name="Text 15"/>
           <p:cNvSpPr/>
           <p:nvPr/>
         </p:nvSpPr>
         <p:spPr>
           <a:xfrm>
             <a:off x="868680" y="4343400"/>
-            <a:ext cx="10496880" cy="438480"/>
+            <a:ext cx="10496520" cy="438120"/>
           </a:xfrm>
           <a:prstGeom prst="rect">
             <a:avLst/>
@@ -6722,14 +6827,14 @@
       </p:sp>
       <p:sp>
         <p:nvSpPr>
-          <p:cNvPr id="376" name="Shape 16"/>
+          <p:cNvPr id="375" name="Shape 16"/>
           <p:cNvSpPr/>
           <p:nvPr/>
         </p:nvSpPr>
         <p:spPr>
           <a:xfrm>
             <a:off x="658440" y="5029200"/>
-            <a:ext cx="10926720" cy="639720"/>
+            <a:ext cx="10926360" cy="639360"/>
           </a:xfrm>
           <a:prstGeom prst="roundRect">
             <a:avLst>
@@ -6772,14 +6877,14 @@
       </p:sp>
       <p:sp>
         <p:nvSpPr>
-          <p:cNvPr id="377" name="Text 17"/>
+          <p:cNvPr id="376" name="Text 17"/>
           <p:cNvSpPr/>
           <p:nvPr/>
         </p:nvSpPr>
         <p:spPr>
           <a:xfrm>
             <a:off x="868680" y="5129640"/>
-            <a:ext cx="10496880" cy="438480"/>
+            <a:ext cx="10496520" cy="438120"/>
           </a:xfrm>
           <a:prstGeom prst="rect">
             <a:avLst/>
@@ -6869,14 +6974,14 @@
       </p:grpSpPr>
       <p:sp>
         <p:nvSpPr>
-          <p:cNvPr id="45" name="Shape 0"/>
+          <p:cNvPr id="44" name="Shape 0"/>
           <p:cNvSpPr/>
           <p:nvPr/>
         </p:nvSpPr>
         <p:spPr>
           <a:xfrm>
             <a:off x="0" y="0"/>
-            <a:ext cx="12191400" cy="6857640"/>
+            <a:ext cx="12191040" cy="6857280"/>
           </a:xfrm>
           <a:prstGeom prst="rect">
             <a:avLst/>
@@ -6915,14 +7020,14 @@
       </p:sp>
       <p:sp>
         <p:nvSpPr>
-          <p:cNvPr id="46" name="Shape 1"/>
+          <p:cNvPr id="45" name="Shape 1"/>
           <p:cNvSpPr/>
           <p:nvPr/>
         </p:nvSpPr>
         <p:spPr>
           <a:xfrm>
             <a:off x="0" y="6364080"/>
-            <a:ext cx="12191400" cy="493560"/>
+            <a:ext cx="12191040" cy="493200"/>
           </a:xfrm>
           <a:prstGeom prst="rect">
             <a:avLst/>
@@ -6961,14 +7066,14 @@
       </p:sp>
       <p:sp>
         <p:nvSpPr>
-          <p:cNvPr id="47" name="Text 2"/>
+          <p:cNvPr id="46" name="Text 2"/>
           <p:cNvSpPr/>
           <p:nvPr/>
         </p:nvSpPr>
         <p:spPr>
           <a:xfrm>
             <a:off x="365760" y="6446520"/>
-            <a:ext cx="11475360" cy="200880"/>
+            <a:ext cx="11475000" cy="200520"/>
           </a:xfrm>
           <a:prstGeom prst="rect">
             <a:avLst/>
@@ -7022,14 +7127,14 @@
       </p:sp>
       <p:sp>
         <p:nvSpPr>
-          <p:cNvPr id="48" name="Text 3"/>
+          <p:cNvPr id="47" name="Text 3"/>
           <p:cNvSpPr/>
           <p:nvPr/>
         </p:nvSpPr>
         <p:spPr>
           <a:xfrm>
             <a:off x="502920" y="329040"/>
-            <a:ext cx="9966600" cy="411120"/>
+            <a:ext cx="9966240" cy="410760"/>
           </a:xfrm>
           <a:prstGeom prst="rect">
             <a:avLst/>
@@ -7083,14 +7188,14 @@
       </p:sp>
       <p:sp>
         <p:nvSpPr>
-          <p:cNvPr id="49" name="Shape 4"/>
+          <p:cNvPr id="48" name="Shape 4"/>
           <p:cNvSpPr/>
           <p:nvPr/>
         </p:nvSpPr>
         <p:spPr>
           <a:xfrm>
             <a:off x="502920" y="831960"/>
-            <a:ext cx="1325520" cy="36360"/>
+            <a:ext cx="1325160" cy="36000"/>
           </a:xfrm>
           <a:prstGeom prst="rect">
             <a:avLst/>
@@ -7129,14 +7234,14 @@
       </p:sp>
       <p:sp>
         <p:nvSpPr>
-          <p:cNvPr id="50" name="Text 5"/>
+          <p:cNvPr id="49" name="Text 5"/>
           <p:cNvSpPr/>
           <p:nvPr/>
         </p:nvSpPr>
         <p:spPr>
           <a:xfrm>
             <a:off x="1938600" y="768240"/>
-            <a:ext cx="7131960" cy="200880"/>
+            <a:ext cx="7131600" cy="200520"/>
           </a:xfrm>
           <a:prstGeom prst="rect">
             <a:avLst/>
@@ -7189,14 +7294,14 @@
       </p:sp>
       <p:sp>
         <p:nvSpPr>
-          <p:cNvPr id="51" name="Shape 6"/>
+          <p:cNvPr id="50" name="Shape 6"/>
           <p:cNvSpPr/>
           <p:nvPr/>
         </p:nvSpPr>
         <p:spPr>
           <a:xfrm>
             <a:off x="685800" y="1234440"/>
-            <a:ext cx="5303160" cy="804240"/>
+            <a:ext cx="5302800" cy="803880"/>
           </a:xfrm>
           <a:prstGeom prst="roundRect">
             <a:avLst>
@@ -7239,14 +7344,14 @@
       </p:sp>
       <p:sp>
         <p:nvSpPr>
-          <p:cNvPr id="52" name="Shape 7"/>
+          <p:cNvPr id="51" name="Shape 7"/>
           <p:cNvSpPr/>
           <p:nvPr/>
         </p:nvSpPr>
         <p:spPr>
           <a:xfrm>
             <a:off x="850320" y="1389960"/>
-            <a:ext cx="475200" cy="475200"/>
+            <a:ext cx="474840" cy="474840"/>
           </a:xfrm>
           <a:prstGeom prst="roundRect">
             <a:avLst>
@@ -7291,14 +7396,14 @@
       </p:sp>
       <p:sp>
         <p:nvSpPr>
-          <p:cNvPr id="53" name="Text 8"/>
+          <p:cNvPr id="52" name="Text 8"/>
           <p:cNvSpPr/>
           <p:nvPr/>
         </p:nvSpPr>
         <p:spPr>
           <a:xfrm>
             <a:off x="905400" y="1454040"/>
-            <a:ext cx="365400" cy="347040"/>
+            <a:ext cx="365040" cy="346680"/>
           </a:xfrm>
           <a:prstGeom prst="rect">
             <a:avLst/>
@@ -7351,14 +7456,14 @@
       </p:sp>
       <p:sp>
         <p:nvSpPr>
-          <p:cNvPr id="54" name="Text 9"/>
+          <p:cNvPr id="53" name="Text 9"/>
           <p:cNvSpPr/>
           <p:nvPr/>
         </p:nvSpPr>
         <p:spPr>
           <a:xfrm>
             <a:off x="1454040" y="1380600"/>
-            <a:ext cx="4370400" cy="237240"/>
+            <a:ext cx="4370040" cy="236880"/>
           </a:xfrm>
           <a:prstGeom prst="rect">
             <a:avLst/>
@@ -7411,14 +7516,14 @@
       </p:sp>
       <p:sp>
         <p:nvSpPr>
-          <p:cNvPr id="55" name="Text 10"/>
+          <p:cNvPr id="54" name="Text 10"/>
           <p:cNvSpPr/>
           <p:nvPr/>
         </p:nvSpPr>
         <p:spPr>
           <a:xfrm>
             <a:off x="1454040" y="1691640"/>
-            <a:ext cx="4370400" cy="209880"/>
+            <a:ext cx="4370040" cy="209520"/>
           </a:xfrm>
           <a:prstGeom prst="rect">
             <a:avLst/>
@@ -7471,14 +7576,14 @@
       </p:sp>
       <p:sp>
         <p:nvSpPr>
-          <p:cNvPr id="56" name="Shape 11"/>
+          <p:cNvPr id="55" name="Shape 11"/>
           <p:cNvSpPr/>
           <p:nvPr/>
         </p:nvSpPr>
         <p:spPr>
           <a:xfrm>
             <a:off x="685800" y="2212920"/>
-            <a:ext cx="5303160" cy="804240"/>
+            <a:ext cx="5302800" cy="803880"/>
           </a:xfrm>
           <a:prstGeom prst="roundRect">
             <a:avLst>
@@ -7521,14 +7626,14 @@
       </p:sp>
       <p:sp>
         <p:nvSpPr>
-          <p:cNvPr id="57" name="Shape 12"/>
+          <p:cNvPr id="56" name="Shape 12"/>
           <p:cNvSpPr/>
           <p:nvPr/>
         </p:nvSpPr>
         <p:spPr>
           <a:xfrm>
             <a:off x="850320" y="2368440"/>
-            <a:ext cx="475200" cy="475200"/>
+            <a:ext cx="474840" cy="474840"/>
           </a:xfrm>
           <a:prstGeom prst="roundRect">
             <a:avLst>
@@ -7573,14 +7678,14 @@
       </p:sp>
       <p:sp>
         <p:nvSpPr>
-          <p:cNvPr id="58" name="Text 13"/>
+          <p:cNvPr id="57" name="Text 13"/>
           <p:cNvSpPr/>
           <p:nvPr/>
         </p:nvSpPr>
         <p:spPr>
           <a:xfrm>
             <a:off x="905400" y="2432160"/>
-            <a:ext cx="365400" cy="347040"/>
+            <a:ext cx="365040" cy="346680"/>
           </a:xfrm>
           <a:prstGeom prst="rect">
             <a:avLst/>
@@ -7633,14 +7738,14 @@
       </p:sp>
       <p:sp>
         <p:nvSpPr>
-          <p:cNvPr id="59" name="Text 14"/>
+          <p:cNvPr id="58" name="Text 14"/>
           <p:cNvSpPr/>
           <p:nvPr/>
         </p:nvSpPr>
         <p:spPr>
           <a:xfrm>
             <a:off x="1454040" y="2359080"/>
-            <a:ext cx="4370400" cy="237240"/>
+            <a:ext cx="4370040" cy="236880"/>
           </a:xfrm>
           <a:prstGeom prst="rect">
             <a:avLst/>
@@ -7693,14 +7798,14 @@
       </p:sp>
       <p:sp>
         <p:nvSpPr>
-          <p:cNvPr id="60" name="Text 15"/>
+          <p:cNvPr id="59" name="Text 15"/>
           <p:cNvSpPr/>
           <p:nvPr/>
         </p:nvSpPr>
         <p:spPr>
           <a:xfrm>
             <a:off x="1454040" y="2670120"/>
-            <a:ext cx="4370400" cy="209880"/>
+            <a:ext cx="4370040" cy="209520"/>
           </a:xfrm>
           <a:prstGeom prst="rect">
             <a:avLst/>
@@ -7753,14 +7858,14 @@
       </p:sp>
       <p:sp>
         <p:nvSpPr>
-          <p:cNvPr id="61" name="Shape 16"/>
+          <p:cNvPr id="60" name="Shape 16"/>
           <p:cNvSpPr/>
           <p:nvPr/>
         </p:nvSpPr>
         <p:spPr>
           <a:xfrm>
             <a:off x="685800" y="3191400"/>
-            <a:ext cx="5303160" cy="804240"/>
+            <a:ext cx="5302800" cy="803880"/>
           </a:xfrm>
           <a:prstGeom prst="roundRect">
             <a:avLst>
@@ -7803,14 +7908,14 @@
       </p:sp>
       <p:sp>
         <p:nvSpPr>
-          <p:cNvPr id="62" name="Shape 17"/>
+          <p:cNvPr id="61" name="Shape 17"/>
           <p:cNvSpPr/>
           <p:nvPr/>
         </p:nvSpPr>
         <p:spPr>
           <a:xfrm>
             <a:off x="850320" y="3346560"/>
-            <a:ext cx="475200" cy="475200"/>
+            <a:ext cx="474840" cy="474840"/>
           </a:xfrm>
           <a:prstGeom prst="roundRect">
             <a:avLst>
@@ -7855,14 +7960,14 @@
       </p:sp>
       <p:sp>
         <p:nvSpPr>
-          <p:cNvPr id="63" name="Text 18"/>
+          <p:cNvPr id="62" name="Text 18"/>
           <p:cNvSpPr/>
           <p:nvPr/>
         </p:nvSpPr>
         <p:spPr>
           <a:xfrm>
             <a:off x="905400" y="3410640"/>
-            <a:ext cx="365400" cy="347040"/>
+            <a:ext cx="365040" cy="346680"/>
           </a:xfrm>
           <a:prstGeom prst="rect">
             <a:avLst/>
@@ -7915,14 +8020,14 @@
       </p:sp>
       <p:sp>
         <p:nvSpPr>
-          <p:cNvPr id="64" name="Text 19"/>
+          <p:cNvPr id="63" name="Text 19"/>
           <p:cNvSpPr/>
           <p:nvPr/>
         </p:nvSpPr>
         <p:spPr>
           <a:xfrm>
             <a:off x="1454040" y="3337560"/>
-            <a:ext cx="4370400" cy="237240"/>
+            <a:ext cx="4370040" cy="236880"/>
           </a:xfrm>
           <a:prstGeom prst="rect">
             <a:avLst/>
@@ -7975,14 +8080,14 @@
       </p:sp>
       <p:sp>
         <p:nvSpPr>
-          <p:cNvPr id="65" name="Text 20"/>
+          <p:cNvPr id="64" name="Text 20"/>
           <p:cNvSpPr/>
           <p:nvPr/>
         </p:nvSpPr>
         <p:spPr>
           <a:xfrm>
             <a:off x="1454040" y="3648600"/>
-            <a:ext cx="4370400" cy="209880"/>
+            <a:ext cx="4370040" cy="209520"/>
           </a:xfrm>
           <a:prstGeom prst="rect">
             <a:avLst/>
@@ -8035,14 +8140,14 @@
       </p:sp>
       <p:sp>
         <p:nvSpPr>
-          <p:cNvPr id="66" name="Shape 21"/>
+          <p:cNvPr id="65" name="Shape 21"/>
           <p:cNvSpPr/>
           <p:nvPr/>
         </p:nvSpPr>
         <p:spPr>
           <a:xfrm>
             <a:off x="685800" y="4169520"/>
-            <a:ext cx="5303160" cy="804240"/>
+            <a:ext cx="5302800" cy="803880"/>
           </a:xfrm>
           <a:prstGeom prst="roundRect">
             <a:avLst>
@@ -8085,14 +8190,14 @@
       </p:sp>
       <p:sp>
         <p:nvSpPr>
-          <p:cNvPr id="67" name="Shape 22"/>
+          <p:cNvPr id="66" name="Shape 22"/>
           <p:cNvSpPr/>
           <p:nvPr/>
         </p:nvSpPr>
         <p:spPr>
           <a:xfrm>
             <a:off x="850320" y="4325040"/>
-            <a:ext cx="475200" cy="475200"/>
+            <a:ext cx="474840" cy="474840"/>
           </a:xfrm>
           <a:prstGeom prst="roundRect">
             <a:avLst>
@@ -8137,14 +8242,14 @@
       </p:sp>
       <p:sp>
         <p:nvSpPr>
-          <p:cNvPr id="68" name="Text 23"/>
+          <p:cNvPr id="67" name="Text 23"/>
           <p:cNvSpPr/>
           <p:nvPr/>
         </p:nvSpPr>
         <p:spPr>
           <a:xfrm>
             <a:off x="905400" y="4389120"/>
-            <a:ext cx="365400" cy="347040"/>
+            <a:ext cx="365040" cy="346680"/>
           </a:xfrm>
           <a:prstGeom prst="rect">
             <a:avLst/>
@@ -8197,14 +8302,14 @@
       </p:sp>
       <p:sp>
         <p:nvSpPr>
-          <p:cNvPr id="69" name="Text 24"/>
+          <p:cNvPr id="68" name="Text 24"/>
           <p:cNvSpPr/>
           <p:nvPr/>
         </p:nvSpPr>
         <p:spPr>
           <a:xfrm>
             <a:off x="1454040" y="4316040"/>
-            <a:ext cx="4370400" cy="237240"/>
+            <a:ext cx="4370040" cy="236880"/>
           </a:xfrm>
           <a:prstGeom prst="rect">
             <a:avLst/>
@@ -8257,14 +8362,14 @@
       </p:sp>
       <p:sp>
         <p:nvSpPr>
-          <p:cNvPr id="70" name="Text 25"/>
+          <p:cNvPr id="69" name="Text 25"/>
           <p:cNvSpPr/>
           <p:nvPr/>
         </p:nvSpPr>
         <p:spPr>
           <a:xfrm>
             <a:off x="1454040" y="4626720"/>
-            <a:ext cx="4370400" cy="209880"/>
+            <a:ext cx="4370040" cy="209520"/>
           </a:xfrm>
           <a:prstGeom prst="rect">
             <a:avLst/>
@@ -8317,14 +8422,14 @@
       </p:sp>
       <p:sp>
         <p:nvSpPr>
-          <p:cNvPr id="71" name="Shape 26"/>
+          <p:cNvPr id="70" name="Shape 26"/>
           <p:cNvSpPr/>
           <p:nvPr/>
         </p:nvSpPr>
         <p:spPr>
           <a:xfrm>
             <a:off x="6720840" y="1508760"/>
-            <a:ext cx="1508400" cy="594000"/>
+            <a:ext cx="1508040" cy="593640"/>
           </a:xfrm>
           <a:prstGeom prst="roundRect">
             <a:avLst>
@@ -8369,14 +8474,14 @@
       </p:sp>
       <p:sp>
         <p:nvSpPr>
-          <p:cNvPr id="72" name="Text 27"/>
+          <p:cNvPr id="71" name="Text 27"/>
           <p:cNvSpPr/>
           <p:nvPr/>
         </p:nvSpPr>
         <p:spPr>
           <a:xfrm>
             <a:off x="6793920" y="1691640"/>
-            <a:ext cx="1362240" cy="182520"/>
+            <a:ext cx="1361880" cy="182160"/>
           </a:xfrm>
           <a:prstGeom prst="rect">
             <a:avLst/>
@@ -8429,14 +8534,14 @@
       </p:sp>
       <p:sp>
         <p:nvSpPr>
-          <p:cNvPr id="73" name="Shape 28"/>
+          <p:cNvPr id="72" name="Shape 28"/>
           <p:cNvSpPr/>
           <p:nvPr/>
         </p:nvSpPr>
         <p:spPr>
           <a:xfrm>
             <a:off x="6720840" y="2788920"/>
-            <a:ext cx="1508400" cy="594000"/>
+            <a:ext cx="1508040" cy="593640"/>
           </a:xfrm>
           <a:prstGeom prst="roundRect">
             <a:avLst>
@@ -8481,14 +8586,14 @@
       </p:sp>
       <p:sp>
         <p:nvSpPr>
-          <p:cNvPr id="74" name="Text 29"/>
+          <p:cNvPr id="73" name="Text 29"/>
           <p:cNvSpPr/>
           <p:nvPr/>
         </p:nvSpPr>
         <p:spPr>
           <a:xfrm>
             <a:off x="6793920" y="2971800"/>
-            <a:ext cx="1362240" cy="182520"/>
+            <a:ext cx="1361880" cy="182160"/>
           </a:xfrm>
           <a:prstGeom prst="rect">
             <a:avLst/>
@@ -8541,14 +8646,14 @@
       </p:sp>
       <p:sp>
         <p:nvSpPr>
-          <p:cNvPr id="75" name="Shape 30"/>
+          <p:cNvPr id="74" name="Shape 30"/>
           <p:cNvSpPr/>
           <p:nvPr/>
         </p:nvSpPr>
         <p:spPr>
           <a:xfrm>
             <a:off x="8961120" y="2788920"/>
-            <a:ext cx="1508400" cy="594000"/>
+            <a:ext cx="1508040" cy="593640"/>
           </a:xfrm>
           <a:prstGeom prst="roundRect">
             <a:avLst>
@@ -8593,14 +8698,14 @@
       </p:sp>
       <p:sp>
         <p:nvSpPr>
-          <p:cNvPr id="76" name="Text 31"/>
+          <p:cNvPr id="75" name="Text 31"/>
           <p:cNvSpPr/>
           <p:nvPr/>
         </p:nvSpPr>
         <p:spPr>
           <a:xfrm>
             <a:off x="9034200" y="2971800"/>
-            <a:ext cx="1362240" cy="182520"/>
+            <a:ext cx="1361880" cy="182160"/>
           </a:xfrm>
           <a:prstGeom prst="rect">
             <a:avLst/>
@@ -8653,14 +8758,14 @@
       </p:sp>
       <p:sp>
         <p:nvSpPr>
-          <p:cNvPr id="77" name="Shape 32"/>
+          <p:cNvPr id="76" name="Shape 32"/>
           <p:cNvSpPr/>
           <p:nvPr/>
         </p:nvSpPr>
         <p:spPr>
           <a:xfrm>
             <a:off x="8961120" y="4069080"/>
-            <a:ext cx="1508400" cy="594000"/>
+            <a:ext cx="1508040" cy="593640"/>
           </a:xfrm>
           <a:prstGeom prst="roundRect">
             <a:avLst>
@@ -8705,14 +8810,14 @@
       </p:sp>
       <p:sp>
         <p:nvSpPr>
-          <p:cNvPr id="78" name="Text 33"/>
+          <p:cNvPr id="77" name="Text 33"/>
           <p:cNvSpPr/>
           <p:nvPr/>
         </p:nvSpPr>
         <p:spPr>
           <a:xfrm>
             <a:off x="9034200" y="4251960"/>
-            <a:ext cx="1362240" cy="182520"/>
+            <a:ext cx="1361880" cy="182160"/>
           </a:xfrm>
           <a:prstGeom prst="rect">
             <a:avLst/>
@@ -8765,7 +8870,7 @@
       </p:sp>
       <p:sp>
         <p:nvSpPr>
-          <p:cNvPr id="79" name="Shape 34"/>
+          <p:cNvPr id="78" name="Shape 34"/>
           <p:cNvSpPr/>
           <p:nvPr/>
         </p:nvSpPr>
@@ -8792,7 +8897,7 @@
           <a:fontRef idx="minor"/>
         </p:style>
         <p:txBody>
-          <a:bodyPr lIns="90000" tIns="45000" rIns="90000" bIns="45000" anchor="t" anchorCtr="1">
+          <a:bodyPr lIns="0" tIns="45000" rIns="0" bIns="45000" anchor="t" anchorCtr="1">
             <a:noAutofit/>
           </a:bodyPr>
           <a:p>
@@ -8809,7 +8914,7 @@
       </p:sp>
       <p:sp>
         <p:nvSpPr>
-          <p:cNvPr id="80" name="Shape 35"/>
+          <p:cNvPr id="79" name="Shape 35"/>
           <p:cNvSpPr/>
           <p:nvPr/>
         </p:nvSpPr>
@@ -8853,7 +8958,7 @@
       </p:sp>
       <p:sp>
         <p:nvSpPr>
-          <p:cNvPr id="81" name="Shape 36"/>
+          <p:cNvPr id="80" name="Shape 36"/>
           <p:cNvSpPr/>
           <p:nvPr/>
         </p:nvSpPr>
@@ -8880,7 +8985,7 @@
           <a:fontRef idx="minor"/>
         </p:style>
         <p:txBody>
-          <a:bodyPr lIns="90000" tIns="45000" rIns="90000" bIns="45000" anchor="t" anchorCtr="1">
+          <a:bodyPr lIns="0" tIns="45000" rIns="0" bIns="45000" anchor="t" anchorCtr="1">
             <a:noAutofit/>
           </a:bodyPr>
           <a:p>
@@ -8934,14 +9039,14 @@
       </p:grpSpPr>
       <p:sp>
         <p:nvSpPr>
-          <p:cNvPr id="82" name="Shape 0"/>
+          <p:cNvPr id="81" name="Shape 0"/>
           <p:cNvSpPr/>
           <p:nvPr/>
         </p:nvSpPr>
         <p:spPr>
           <a:xfrm>
             <a:off x="0" y="0"/>
-            <a:ext cx="12191400" cy="6857640"/>
+            <a:ext cx="12191040" cy="6857280"/>
           </a:xfrm>
           <a:prstGeom prst="rect">
             <a:avLst/>
@@ -8980,14 +9085,14 @@
       </p:sp>
       <p:sp>
         <p:nvSpPr>
-          <p:cNvPr id="83" name="Shape 1"/>
+          <p:cNvPr id="82" name="Shape 1"/>
           <p:cNvSpPr/>
           <p:nvPr/>
         </p:nvSpPr>
         <p:spPr>
           <a:xfrm>
             <a:off x="0" y="6364080"/>
-            <a:ext cx="12191400" cy="493560"/>
+            <a:ext cx="12191040" cy="493200"/>
           </a:xfrm>
           <a:prstGeom prst="rect">
             <a:avLst/>
@@ -9026,14 +9131,14 @@
       </p:sp>
       <p:sp>
         <p:nvSpPr>
-          <p:cNvPr id="84" name="Text 2"/>
+          <p:cNvPr id="83" name="Text 2"/>
           <p:cNvSpPr/>
           <p:nvPr/>
         </p:nvSpPr>
         <p:spPr>
           <a:xfrm>
             <a:off x="365760" y="6446520"/>
-            <a:ext cx="11475360" cy="200880"/>
+            <a:ext cx="11475000" cy="200520"/>
           </a:xfrm>
           <a:prstGeom prst="rect">
             <a:avLst/>
@@ -9087,14 +9192,14 @@
       </p:sp>
       <p:sp>
         <p:nvSpPr>
-          <p:cNvPr id="85" name="Text 3"/>
+          <p:cNvPr id="84" name="Text 3"/>
           <p:cNvSpPr/>
           <p:nvPr/>
         </p:nvSpPr>
         <p:spPr>
           <a:xfrm>
             <a:off x="502920" y="329040"/>
-            <a:ext cx="9966600" cy="411120"/>
+            <a:ext cx="9966240" cy="410760"/>
           </a:xfrm>
           <a:prstGeom prst="rect">
             <a:avLst/>
@@ -9148,14 +9253,14 @@
       </p:sp>
       <p:sp>
         <p:nvSpPr>
-          <p:cNvPr id="86" name="Shape 4"/>
+          <p:cNvPr id="85" name="Shape 4"/>
           <p:cNvSpPr/>
           <p:nvPr/>
         </p:nvSpPr>
         <p:spPr>
           <a:xfrm>
             <a:off x="502920" y="831960"/>
-            <a:ext cx="1325520" cy="36360"/>
+            <a:ext cx="1325160" cy="36000"/>
           </a:xfrm>
           <a:prstGeom prst="rect">
             <a:avLst/>
@@ -9194,14 +9299,14 @@
       </p:sp>
       <p:sp>
         <p:nvSpPr>
-          <p:cNvPr id="87" name="Text 5"/>
+          <p:cNvPr id="86" name="Text 5"/>
           <p:cNvSpPr/>
           <p:nvPr/>
         </p:nvSpPr>
         <p:spPr>
           <a:xfrm>
             <a:off x="1938600" y="768240"/>
-            <a:ext cx="7131960" cy="200880"/>
+            <a:ext cx="7131600" cy="200520"/>
           </a:xfrm>
           <a:prstGeom prst="rect">
             <a:avLst/>
@@ -9254,14 +9359,14 @@
       </p:sp>
       <p:sp>
         <p:nvSpPr>
-          <p:cNvPr id="88" name="Shape 6"/>
+          <p:cNvPr id="87" name="Shape 6"/>
           <p:cNvSpPr/>
           <p:nvPr/>
         </p:nvSpPr>
         <p:spPr>
           <a:xfrm>
             <a:off x="640080" y="1143000"/>
-            <a:ext cx="3474360" cy="959760"/>
+            <a:ext cx="3474000" cy="959400"/>
           </a:xfrm>
           <a:prstGeom prst="roundRect">
             <a:avLst>
@@ -9304,14 +9409,14 @@
       </p:sp>
       <p:sp>
         <p:nvSpPr>
-          <p:cNvPr id="89" name="Shape 7"/>
+          <p:cNvPr id="88" name="Shape 7"/>
           <p:cNvSpPr/>
           <p:nvPr/>
         </p:nvSpPr>
         <p:spPr>
           <a:xfrm>
             <a:off x="640080" y="1143000"/>
-            <a:ext cx="54360" cy="959760"/>
+            <a:ext cx="54000" cy="959400"/>
           </a:xfrm>
           <a:prstGeom prst="rect">
             <a:avLst/>
@@ -9333,7 +9438,7 @@
           <a:fontRef idx="minor"/>
         </p:style>
         <p:txBody>
-          <a:bodyPr lIns="90000" tIns="45000" rIns="90000" bIns="45000" anchor="t">
+          <a:bodyPr lIns="27000" tIns="45000" rIns="27000" bIns="45000" anchor="t">
             <a:noAutofit/>
           </a:bodyPr>
           <a:p>
@@ -9350,14 +9455,14 @@
       </p:sp>
       <p:sp>
         <p:nvSpPr>
-          <p:cNvPr id="90" name="Text 8"/>
+          <p:cNvPr id="89" name="Text 8"/>
           <p:cNvSpPr/>
           <p:nvPr/>
         </p:nvSpPr>
         <p:spPr>
           <a:xfrm>
             <a:off x="822960" y="1252800"/>
-            <a:ext cx="3200040" cy="237240"/>
+            <a:ext cx="3199680" cy="236880"/>
           </a:xfrm>
           <a:prstGeom prst="rect">
             <a:avLst/>
@@ -9410,14 +9515,14 @@
       </p:sp>
       <p:sp>
         <p:nvSpPr>
-          <p:cNvPr id="91" name="Text 9"/>
+          <p:cNvPr id="90" name="Text 9"/>
           <p:cNvSpPr/>
           <p:nvPr/>
         </p:nvSpPr>
         <p:spPr>
           <a:xfrm>
             <a:off x="822960" y="1554480"/>
-            <a:ext cx="3200040" cy="456840"/>
+            <a:ext cx="3199680" cy="456480"/>
           </a:xfrm>
           <a:prstGeom prst="rect">
             <a:avLst/>
@@ -9470,14 +9575,14 @@
       </p:sp>
       <p:sp>
         <p:nvSpPr>
-          <p:cNvPr id="92" name="Shape 10"/>
+          <p:cNvPr id="91" name="Shape 10"/>
           <p:cNvSpPr/>
           <p:nvPr/>
         </p:nvSpPr>
         <p:spPr>
           <a:xfrm>
             <a:off x="640080" y="2331720"/>
-            <a:ext cx="3474360" cy="959760"/>
+            <a:ext cx="3474000" cy="959400"/>
           </a:xfrm>
           <a:prstGeom prst="roundRect">
             <a:avLst>
@@ -9520,14 +9625,14 @@
       </p:sp>
       <p:sp>
         <p:nvSpPr>
-          <p:cNvPr id="93" name="Shape 11"/>
+          <p:cNvPr id="92" name="Shape 11"/>
           <p:cNvSpPr/>
           <p:nvPr/>
         </p:nvSpPr>
         <p:spPr>
           <a:xfrm>
             <a:off x="640080" y="2331720"/>
-            <a:ext cx="54360" cy="959760"/>
+            <a:ext cx="54000" cy="959400"/>
           </a:xfrm>
           <a:prstGeom prst="rect">
             <a:avLst/>
@@ -9549,7 +9654,7 @@
           <a:fontRef idx="minor"/>
         </p:style>
         <p:txBody>
-          <a:bodyPr lIns="90000" tIns="45000" rIns="90000" bIns="45000" anchor="t">
+          <a:bodyPr lIns="27000" tIns="45000" rIns="27000" bIns="45000" anchor="t">
             <a:noAutofit/>
           </a:bodyPr>
           <a:p>
@@ -9566,14 +9671,14 @@
       </p:sp>
       <p:sp>
         <p:nvSpPr>
-          <p:cNvPr id="94" name="Text 12"/>
+          <p:cNvPr id="93" name="Text 12"/>
           <p:cNvSpPr/>
           <p:nvPr/>
         </p:nvSpPr>
         <p:spPr>
           <a:xfrm>
             <a:off x="822960" y="2441520"/>
-            <a:ext cx="3200040" cy="237240"/>
+            <a:ext cx="3199680" cy="236880"/>
           </a:xfrm>
           <a:prstGeom prst="rect">
             <a:avLst/>
@@ -9626,14 +9731,14 @@
       </p:sp>
       <p:sp>
         <p:nvSpPr>
-          <p:cNvPr id="95" name="Text 13"/>
+          <p:cNvPr id="94" name="Text 13"/>
           <p:cNvSpPr/>
           <p:nvPr/>
         </p:nvSpPr>
         <p:spPr>
           <a:xfrm>
             <a:off x="822960" y="2743200"/>
-            <a:ext cx="3200040" cy="456840"/>
+            <a:ext cx="3199680" cy="456480"/>
           </a:xfrm>
           <a:prstGeom prst="rect">
             <a:avLst/>
@@ -9686,14 +9791,14 @@
       </p:sp>
       <p:sp>
         <p:nvSpPr>
-          <p:cNvPr id="96" name="Shape 14"/>
+          <p:cNvPr id="95" name="Shape 14"/>
           <p:cNvSpPr/>
           <p:nvPr/>
         </p:nvSpPr>
         <p:spPr>
           <a:xfrm>
             <a:off x="640080" y="3520440"/>
-            <a:ext cx="3474360" cy="1096920"/>
+            <a:ext cx="3474000" cy="1096560"/>
           </a:xfrm>
           <a:prstGeom prst="roundRect">
             <a:avLst>
@@ -9736,14 +9841,14 @@
       </p:sp>
       <p:sp>
         <p:nvSpPr>
-          <p:cNvPr id="97" name="Shape 15"/>
+          <p:cNvPr id="96" name="Shape 15"/>
           <p:cNvSpPr/>
           <p:nvPr/>
         </p:nvSpPr>
         <p:spPr>
           <a:xfrm>
             <a:off x="640080" y="3520440"/>
-            <a:ext cx="54360" cy="1096920"/>
+            <a:ext cx="54000" cy="1096560"/>
           </a:xfrm>
           <a:prstGeom prst="rect">
             <a:avLst/>
@@ -9765,7 +9870,7 @@
           <a:fontRef idx="minor"/>
         </p:style>
         <p:txBody>
-          <a:bodyPr lIns="90000" tIns="45000" rIns="90000" bIns="45000" anchor="t">
+          <a:bodyPr lIns="27000" tIns="45000" rIns="27000" bIns="45000" anchor="t">
             <a:noAutofit/>
           </a:bodyPr>
           <a:p>
@@ -9782,14 +9887,14 @@
       </p:sp>
       <p:sp>
         <p:nvSpPr>
-          <p:cNvPr id="98" name="Text 16"/>
+          <p:cNvPr id="97" name="Text 16"/>
           <p:cNvSpPr/>
           <p:nvPr/>
         </p:nvSpPr>
         <p:spPr>
           <a:xfrm>
             <a:off x="822960" y="3630240"/>
-            <a:ext cx="3200040" cy="237240"/>
+            <a:ext cx="3199680" cy="236880"/>
           </a:xfrm>
           <a:prstGeom prst="rect">
             <a:avLst/>
@@ -9842,14 +9947,14 @@
       </p:sp>
       <p:sp>
         <p:nvSpPr>
-          <p:cNvPr id="99" name="Text 17"/>
+          <p:cNvPr id="98" name="Text 17"/>
           <p:cNvSpPr/>
           <p:nvPr/>
         </p:nvSpPr>
         <p:spPr>
           <a:xfrm>
             <a:off x="822960" y="3931920"/>
-            <a:ext cx="3200040" cy="594000"/>
+            <a:ext cx="3199680" cy="593640"/>
           </a:xfrm>
           <a:prstGeom prst="rect">
             <a:avLst/>
@@ -9902,14 +10007,14 @@
       </p:sp>
       <p:sp>
         <p:nvSpPr>
-          <p:cNvPr id="100" name="Shape 18"/>
+          <p:cNvPr id="99" name="Shape 18"/>
           <p:cNvSpPr/>
           <p:nvPr/>
         </p:nvSpPr>
         <p:spPr>
           <a:xfrm>
             <a:off x="4617720" y="1143000"/>
-            <a:ext cx="3337200" cy="1096920"/>
+            <a:ext cx="3336840" cy="1096560"/>
           </a:xfrm>
           <a:prstGeom prst="roundRect">
             <a:avLst>
@@ -9952,14 +10057,14 @@
       </p:sp>
       <p:sp>
         <p:nvSpPr>
-          <p:cNvPr id="101" name="Shape 19"/>
+          <p:cNvPr id="100" name="Shape 19"/>
           <p:cNvSpPr/>
           <p:nvPr/>
         </p:nvSpPr>
         <p:spPr>
           <a:xfrm>
             <a:off x="4617720" y="1143000"/>
-            <a:ext cx="54360" cy="1096920"/>
+            <a:ext cx="54000" cy="1096560"/>
           </a:xfrm>
           <a:prstGeom prst="rect">
             <a:avLst/>
@@ -9981,7 +10086,7 @@
           <a:fontRef idx="minor"/>
         </p:style>
         <p:txBody>
-          <a:bodyPr lIns="90000" tIns="45000" rIns="90000" bIns="45000" anchor="t">
+          <a:bodyPr lIns="27000" tIns="45000" rIns="27000" bIns="45000" anchor="t">
             <a:noAutofit/>
           </a:bodyPr>
           <a:p>
@@ -9998,14 +10103,14 @@
       </p:sp>
       <p:sp>
         <p:nvSpPr>
-          <p:cNvPr id="102" name="Text 20"/>
+          <p:cNvPr id="101" name="Text 20"/>
           <p:cNvSpPr/>
           <p:nvPr/>
         </p:nvSpPr>
         <p:spPr>
           <a:xfrm>
             <a:off x="4800600" y="1252800"/>
-            <a:ext cx="3062880" cy="237240"/>
+            <a:ext cx="3062520" cy="236880"/>
           </a:xfrm>
           <a:prstGeom prst="rect">
             <a:avLst/>
@@ -10058,14 +10163,14 @@
       </p:sp>
       <p:sp>
         <p:nvSpPr>
-          <p:cNvPr id="103" name="Text 21"/>
+          <p:cNvPr id="102" name="Text 21"/>
           <p:cNvSpPr/>
           <p:nvPr/>
         </p:nvSpPr>
         <p:spPr>
           <a:xfrm>
             <a:off x="4800600" y="1554480"/>
-            <a:ext cx="3062880" cy="594000"/>
+            <a:ext cx="3062520" cy="593640"/>
           </a:xfrm>
           <a:prstGeom prst="rect">
             <a:avLst/>
@@ -10118,14 +10223,14 @@
       </p:sp>
       <p:sp>
         <p:nvSpPr>
-          <p:cNvPr id="104" name="Shape 22"/>
+          <p:cNvPr id="103" name="Shape 22"/>
           <p:cNvSpPr/>
           <p:nvPr/>
         </p:nvSpPr>
         <p:spPr>
           <a:xfrm>
             <a:off x="4617720" y="2468880"/>
-            <a:ext cx="3337200" cy="959760"/>
+            <a:ext cx="3336840" cy="959400"/>
           </a:xfrm>
           <a:prstGeom prst="roundRect">
             <a:avLst>
@@ -10168,14 +10273,14 @@
       </p:sp>
       <p:sp>
         <p:nvSpPr>
-          <p:cNvPr id="105" name="Shape 23"/>
+          <p:cNvPr id="104" name="Shape 23"/>
           <p:cNvSpPr/>
           <p:nvPr/>
         </p:nvSpPr>
         <p:spPr>
           <a:xfrm>
             <a:off x="4617720" y="2468880"/>
-            <a:ext cx="54360" cy="959760"/>
+            <a:ext cx="54000" cy="959400"/>
           </a:xfrm>
           <a:prstGeom prst="rect">
             <a:avLst/>
@@ -10197,7 +10302,7 @@
           <a:fontRef idx="minor"/>
         </p:style>
         <p:txBody>
-          <a:bodyPr lIns="90000" tIns="45000" rIns="90000" bIns="45000" anchor="t">
+          <a:bodyPr lIns="27000" tIns="45000" rIns="27000" bIns="45000" anchor="t">
             <a:noAutofit/>
           </a:bodyPr>
           <a:p>
@@ -10214,14 +10319,14 @@
       </p:sp>
       <p:sp>
         <p:nvSpPr>
-          <p:cNvPr id="106" name="Text 24"/>
+          <p:cNvPr id="105" name="Text 24"/>
           <p:cNvSpPr/>
           <p:nvPr/>
         </p:nvSpPr>
         <p:spPr>
           <a:xfrm>
             <a:off x="4800600" y="2578680"/>
-            <a:ext cx="3062880" cy="237240"/>
+            <a:ext cx="3062520" cy="236880"/>
           </a:xfrm>
           <a:prstGeom prst="rect">
             <a:avLst/>
@@ -10274,14 +10379,14 @@
       </p:sp>
       <p:sp>
         <p:nvSpPr>
-          <p:cNvPr id="107" name="Text 25"/>
+          <p:cNvPr id="106" name="Text 25"/>
           <p:cNvSpPr/>
           <p:nvPr/>
         </p:nvSpPr>
         <p:spPr>
           <a:xfrm>
             <a:off x="4800600" y="2880360"/>
-            <a:ext cx="3062880" cy="456840"/>
+            <a:ext cx="3062520" cy="456480"/>
           </a:xfrm>
           <a:prstGeom prst="rect">
             <a:avLst/>
@@ -10334,14 +10439,14 @@
       </p:sp>
       <p:sp>
         <p:nvSpPr>
-          <p:cNvPr id="108" name="Shape 26"/>
+          <p:cNvPr id="107" name="Shape 26"/>
           <p:cNvSpPr/>
           <p:nvPr/>
         </p:nvSpPr>
         <p:spPr>
           <a:xfrm>
             <a:off x="4617720" y="3657600"/>
-            <a:ext cx="3337200" cy="959760"/>
+            <a:ext cx="3336840" cy="959400"/>
           </a:xfrm>
           <a:prstGeom prst="roundRect">
             <a:avLst>
@@ -10384,14 +10489,14 @@
       </p:sp>
       <p:sp>
         <p:nvSpPr>
-          <p:cNvPr id="109" name="Shape 27"/>
+          <p:cNvPr id="108" name="Shape 27"/>
           <p:cNvSpPr/>
           <p:nvPr/>
         </p:nvSpPr>
         <p:spPr>
           <a:xfrm>
             <a:off x="4617720" y="3657600"/>
-            <a:ext cx="54360" cy="959760"/>
+            <a:ext cx="54000" cy="959400"/>
           </a:xfrm>
           <a:prstGeom prst="rect">
             <a:avLst/>
@@ -10413,7 +10518,7 @@
           <a:fontRef idx="minor"/>
         </p:style>
         <p:txBody>
-          <a:bodyPr lIns="90000" tIns="45000" rIns="90000" bIns="45000" anchor="t">
+          <a:bodyPr lIns="27000" tIns="45000" rIns="27000" bIns="45000" anchor="t">
             <a:noAutofit/>
           </a:bodyPr>
           <a:p>
@@ -10430,14 +10535,14 @@
       </p:sp>
       <p:sp>
         <p:nvSpPr>
-          <p:cNvPr id="110" name="Text 28"/>
+          <p:cNvPr id="109" name="Text 28"/>
           <p:cNvSpPr/>
           <p:nvPr/>
         </p:nvSpPr>
         <p:spPr>
           <a:xfrm>
             <a:off x="4800600" y="3767400"/>
-            <a:ext cx="3062880" cy="237240"/>
+            <a:ext cx="3062520" cy="236880"/>
           </a:xfrm>
           <a:prstGeom prst="rect">
             <a:avLst/>
@@ -10490,14 +10595,14 @@
       </p:sp>
       <p:sp>
         <p:nvSpPr>
-          <p:cNvPr id="111" name="Text 29"/>
+          <p:cNvPr id="110" name="Text 29"/>
           <p:cNvSpPr/>
           <p:nvPr/>
         </p:nvSpPr>
         <p:spPr>
           <a:xfrm>
             <a:off x="4800600" y="4069080"/>
-            <a:ext cx="3062880" cy="456840"/>
+            <a:ext cx="3062520" cy="456480"/>
           </a:xfrm>
           <a:prstGeom prst="rect">
             <a:avLst/>
@@ -10550,14 +10655,14 @@
       </p:sp>
       <p:sp>
         <p:nvSpPr>
-          <p:cNvPr id="112" name="Shape 30"/>
+          <p:cNvPr id="111" name="Shape 30"/>
           <p:cNvSpPr/>
           <p:nvPr/>
         </p:nvSpPr>
         <p:spPr>
           <a:xfrm>
             <a:off x="8458200" y="1325880"/>
-            <a:ext cx="2697120" cy="3337200"/>
+            <a:ext cx="2696760" cy="3336840"/>
           </a:xfrm>
           <a:prstGeom prst="roundRect">
             <a:avLst>
@@ -10600,14 +10705,14 @@
       </p:sp>
       <p:sp>
         <p:nvSpPr>
-          <p:cNvPr id="113" name="Text 31"/>
+          <p:cNvPr id="112" name="Text 31"/>
           <p:cNvSpPr/>
           <p:nvPr/>
         </p:nvSpPr>
         <p:spPr>
           <a:xfrm>
             <a:off x="8732520" y="1600200"/>
-            <a:ext cx="2148480" cy="255600"/>
+            <a:ext cx="2148120" cy="255240"/>
           </a:xfrm>
           <a:prstGeom prst="rect">
             <a:avLst/>
@@ -10660,14 +10765,14 @@
       </p:sp>
       <p:sp>
         <p:nvSpPr>
-          <p:cNvPr id="114" name="Shape 32"/>
+          <p:cNvPr id="113" name="Shape 32"/>
           <p:cNvSpPr/>
           <p:nvPr/>
         </p:nvSpPr>
         <p:spPr>
           <a:xfrm>
             <a:off x="8732520" y="2103120"/>
-            <a:ext cx="2148480" cy="328680"/>
+            <a:ext cx="2148120" cy="328320"/>
           </a:xfrm>
           <a:prstGeom prst="roundRect">
             <a:avLst>
@@ -10710,14 +10815,14 @@
       </p:sp>
       <p:sp>
         <p:nvSpPr>
-          <p:cNvPr id="115" name="Text 33"/>
+          <p:cNvPr id="114" name="Text 33"/>
           <p:cNvSpPr/>
           <p:nvPr/>
         </p:nvSpPr>
         <p:spPr>
           <a:xfrm>
             <a:off x="8805600" y="2144160"/>
-            <a:ext cx="2002320" cy="246600"/>
+            <a:ext cx="2001960" cy="246240"/>
           </a:xfrm>
           <a:prstGeom prst="rect">
             <a:avLst/>
@@ -10770,14 +10875,14 @@
       </p:sp>
       <p:sp>
         <p:nvSpPr>
-          <p:cNvPr id="116" name="Shape 34"/>
+          <p:cNvPr id="115" name="Shape 34"/>
           <p:cNvSpPr/>
           <p:nvPr/>
         </p:nvSpPr>
         <p:spPr>
           <a:xfrm>
             <a:off x="8732520" y="2670120"/>
-            <a:ext cx="2148480" cy="328680"/>
+            <a:ext cx="2148120" cy="328320"/>
           </a:xfrm>
           <a:prstGeom prst="roundRect">
             <a:avLst>
@@ -10820,14 +10925,14 @@
       </p:sp>
       <p:sp>
         <p:nvSpPr>
-          <p:cNvPr id="117" name="Text 35"/>
+          <p:cNvPr id="116" name="Text 35"/>
           <p:cNvSpPr/>
           <p:nvPr/>
         </p:nvSpPr>
         <p:spPr>
           <a:xfrm>
             <a:off x="8805600" y="2711160"/>
-            <a:ext cx="2002320" cy="246600"/>
+            <a:ext cx="2001960" cy="246240"/>
           </a:xfrm>
           <a:prstGeom prst="rect">
             <a:avLst/>
@@ -10880,14 +10985,14 @@
       </p:sp>
       <p:sp>
         <p:nvSpPr>
-          <p:cNvPr id="118" name="Shape 36"/>
+          <p:cNvPr id="117" name="Shape 36"/>
           <p:cNvSpPr/>
           <p:nvPr/>
         </p:nvSpPr>
         <p:spPr>
           <a:xfrm>
             <a:off x="8732520" y="3237120"/>
-            <a:ext cx="2148480" cy="328680"/>
+            <a:ext cx="2148120" cy="328320"/>
           </a:xfrm>
           <a:prstGeom prst="roundRect">
             <a:avLst>
@@ -10930,14 +11035,14 @@
       </p:sp>
       <p:sp>
         <p:nvSpPr>
-          <p:cNvPr id="119" name="Text 37"/>
+          <p:cNvPr id="118" name="Text 37"/>
           <p:cNvSpPr/>
           <p:nvPr/>
         </p:nvSpPr>
         <p:spPr>
           <a:xfrm>
             <a:off x="8805600" y="3278160"/>
-            <a:ext cx="2002320" cy="246600"/>
+            <a:ext cx="2001960" cy="246240"/>
           </a:xfrm>
           <a:prstGeom prst="rect">
             <a:avLst/>
@@ -10990,14 +11095,14 @@
       </p:sp>
       <p:sp>
         <p:nvSpPr>
-          <p:cNvPr id="120" name="Shape 38"/>
+          <p:cNvPr id="119" name="Shape 38"/>
           <p:cNvSpPr/>
           <p:nvPr/>
         </p:nvSpPr>
         <p:spPr>
           <a:xfrm>
             <a:off x="8732520" y="3803760"/>
-            <a:ext cx="2148480" cy="328680"/>
+            <a:ext cx="2148120" cy="328320"/>
           </a:xfrm>
           <a:prstGeom prst="roundRect">
             <a:avLst>
@@ -11040,14 +11145,14 @@
       </p:sp>
       <p:sp>
         <p:nvSpPr>
-          <p:cNvPr id="121" name="Text 39"/>
+          <p:cNvPr id="120" name="Text 39"/>
           <p:cNvSpPr/>
           <p:nvPr/>
         </p:nvSpPr>
         <p:spPr>
           <a:xfrm>
             <a:off x="8805600" y="3845160"/>
-            <a:ext cx="2002320" cy="246600"/>
+            <a:ext cx="2001960" cy="246240"/>
           </a:xfrm>
           <a:prstGeom prst="rect">
             <a:avLst/>
@@ -11137,14 +11242,14 @@
       </p:grpSpPr>
       <p:sp>
         <p:nvSpPr>
-          <p:cNvPr id="122" name="Shape 0"/>
+          <p:cNvPr id="121" name="Shape 0"/>
           <p:cNvSpPr/>
           <p:nvPr/>
         </p:nvSpPr>
         <p:spPr>
           <a:xfrm>
             <a:off x="0" y="0"/>
-            <a:ext cx="12191400" cy="6857640"/>
+            <a:ext cx="12191040" cy="6857280"/>
           </a:xfrm>
           <a:prstGeom prst="rect">
             <a:avLst/>
@@ -11183,14 +11288,14 @@
       </p:sp>
       <p:sp>
         <p:nvSpPr>
-          <p:cNvPr id="123" name="Shape 1"/>
+          <p:cNvPr id="122" name="Shape 1"/>
           <p:cNvSpPr/>
           <p:nvPr/>
         </p:nvSpPr>
         <p:spPr>
           <a:xfrm>
             <a:off x="0" y="6364080"/>
-            <a:ext cx="12191400" cy="493560"/>
+            <a:ext cx="12191040" cy="493200"/>
           </a:xfrm>
           <a:prstGeom prst="rect">
             <a:avLst/>
@@ -11229,14 +11334,14 @@
       </p:sp>
       <p:sp>
         <p:nvSpPr>
-          <p:cNvPr id="124" name="Text 2"/>
+          <p:cNvPr id="123" name="Text 2"/>
           <p:cNvSpPr/>
           <p:nvPr/>
         </p:nvSpPr>
         <p:spPr>
           <a:xfrm>
             <a:off x="365760" y="6446520"/>
-            <a:ext cx="11475360" cy="200880"/>
+            <a:ext cx="11475000" cy="200520"/>
           </a:xfrm>
           <a:prstGeom prst="rect">
             <a:avLst/>
@@ -11290,14 +11395,14 @@
       </p:sp>
       <p:sp>
         <p:nvSpPr>
-          <p:cNvPr id="125" name="Text 3"/>
+          <p:cNvPr id="124" name="Text 3"/>
           <p:cNvSpPr/>
           <p:nvPr/>
         </p:nvSpPr>
         <p:spPr>
           <a:xfrm>
             <a:off x="502920" y="329040"/>
-            <a:ext cx="9966600" cy="411120"/>
+            <a:ext cx="9966240" cy="410760"/>
           </a:xfrm>
           <a:prstGeom prst="rect">
             <a:avLst/>
@@ -11351,14 +11456,14 @@
       </p:sp>
       <p:sp>
         <p:nvSpPr>
-          <p:cNvPr id="126" name="Shape 4"/>
+          <p:cNvPr id="125" name="Shape 4"/>
           <p:cNvSpPr/>
           <p:nvPr/>
         </p:nvSpPr>
         <p:spPr>
           <a:xfrm>
             <a:off x="502920" y="831960"/>
-            <a:ext cx="1325520" cy="36360"/>
+            <a:ext cx="1325160" cy="36000"/>
           </a:xfrm>
           <a:prstGeom prst="rect">
             <a:avLst/>
@@ -11397,14 +11502,14 @@
       </p:sp>
       <p:sp>
         <p:nvSpPr>
-          <p:cNvPr id="127" name="Text 5"/>
+          <p:cNvPr id="126" name="Text 5"/>
           <p:cNvSpPr/>
           <p:nvPr/>
         </p:nvSpPr>
         <p:spPr>
           <a:xfrm>
             <a:off x="1938600" y="768240"/>
-            <a:ext cx="7131960" cy="200880"/>
+            <a:ext cx="7131600" cy="200520"/>
           </a:xfrm>
           <a:prstGeom prst="rect">
             <a:avLst/>
@@ -11457,14 +11562,14 @@
       </p:sp>
       <p:sp>
         <p:nvSpPr>
-          <p:cNvPr id="128" name="Shape 6"/>
+          <p:cNvPr id="127" name="Shape 6"/>
           <p:cNvSpPr/>
           <p:nvPr/>
         </p:nvSpPr>
         <p:spPr>
           <a:xfrm>
             <a:off x="640080" y="1124640"/>
-            <a:ext cx="5257440" cy="868320"/>
+            <a:ext cx="5257080" cy="867960"/>
           </a:xfrm>
           <a:prstGeom prst="roundRect">
             <a:avLst>
@@ -11507,14 +11612,14 @@
       </p:sp>
       <p:sp>
         <p:nvSpPr>
-          <p:cNvPr id="129" name="Shape 7"/>
+          <p:cNvPr id="128" name="Shape 7"/>
           <p:cNvSpPr/>
           <p:nvPr/>
         </p:nvSpPr>
         <p:spPr>
           <a:xfrm>
             <a:off x="804600" y="1280160"/>
-            <a:ext cx="475200" cy="475200"/>
+            <a:ext cx="474840" cy="474840"/>
           </a:xfrm>
           <a:prstGeom prst="roundRect">
             <a:avLst>
@@ -11559,14 +11664,14 @@
       </p:sp>
       <p:sp>
         <p:nvSpPr>
-          <p:cNvPr id="130" name="Text 8"/>
+          <p:cNvPr id="129" name="Text 8"/>
           <p:cNvSpPr/>
           <p:nvPr/>
         </p:nvSpPr>
         <p:spPr>
           <a:xfrm>
             <a:off x="859680" y="1344240"/>
-            <a:ext cx="365400" cy="347040"/>
+            <a:ext cx="365040" cy="346680"/>
           </a:xfrm>
           <a:prstGeom prst="rect">
             <a:avLst/>
@@ -11619,14 +11724,14 @@
       </p:sp>
       <p:sp>
         <p:nvSpPr>
-          <p:cNvPr id="131" name="Text 9"/>
+          <p:cNvPr id="130" name="Text 9"/>
           <p:cNvSpPr/>
           <p:nvPr/>
         </p:nvSpPr>
         <p:spPr>
           <a:xfrm>
             <a:off x="1408320" y="1271160"/>
-            <a:ext cx="4324680" cy="237240"/>
+            <a:ext cx="4324320" cy="236880"/>
           </a:xfrm>
           <a:prstGeom prst="rect">
             <a:avLst/>
@@ -11679,14 +11784,14 @@
       </p:sp>
       <p:sp>
         <p:nvSpPr>
-          <p:cNvPr id="132" name="Text 10"/>
+          <p:cNvPr id="131" name="Text 10"/>
           <p:cNvSpPr/>
           <p:nvPr/>
         </p:nvSpPr>
         <p:spPr>
           <a:xfrm>
             <a:off x="1408320" y="1581840"/>
-            <a:ext cx="4324680" cy="273960"/>
+            <a:ext cx="4324320" cy="273600"/>
           </a:xfrm>
           <a:prstGeom prst="rect">
             <a:avLst/>
@@ -11739,14 +11844,14 @@
       </p:sp>
       <p:sp>
         <p:nvSpPr>
-          <p:cNvPr id="133" name="Shape 11"/>
+          <p:cNvPr id="132" name="Shape 11"/>
           <p:cNvSpPr/>
           <p:nvPr/>
         </p:nvSpPr>
         <p:spPr>
           <a:xfrm>
             <a:off x="640080" y="2221920"/>
-            <a:ext cx="5257440" cy="868320"/>
+            <a:ext cx="5257080" cy="867960"/>
           </a:xfrm>
           <a:prstGeom prst="roundRect">
             <a:avLst>
@@ -11789,14 +11894,14 @@
       </p:sp>
       <p:sp>
         <p:nvSpPr>
-          <p:cNvPr id="134" name="Shape 12"/>
+          <p:cNvPr id="133" name="Shape 12"/>
           <p:cNvSpPr/>
           <p:nvPr/>
         </p:nvSpPr>
         <p:spPr>
           <a:xfrm>
             <a:off x="804600" y="2377440"/>
-            <a:ext cx="475200" cy="475200"/>
+            <a:ext cx="474840" cy="474840"/>
           </a:xfrm>
           <a:prstGeom prst="roundRect">
             <a:avLst>
@@ -11841,14 +11946,14 @@
       </p:sp>
       <p:sp>
         <p:nvSpPr>
-          <p:cNvPr id="135" name="Text 13"/>
+          <p:cNvPr id="134" name="Text 13"/>
           <p:cNvSpPr/>
           <p:nvPr/>
         </p:nvSpPr>
         <p:spPr>
           <a:xfrm>
             <a:off x="859680" y="2441520"/>
-            <a:ext cx="365400" cy="347040"/>
+            <a:ext cx="365040" cy="346680"/>
           </a:xfrm>
           <a:prstGeom prst="rect">
             <a:avLst/>
@@ -11901,14 +12006,14 @@
       </p:sp>
       <p:sp>
         <p:nvSpPr>
-          <p:cNvPr id="136" name="Text 14"/>
+          <p:cNvPr id="135" name="Text 14"/>
           <p:cNvSpPr/>
           <p:nvPr/>
         </p:nvSpPr>
         <p:spPr>
           <a:xfrm>
             <a:off x="1408320" y="2368440"/>
-            <a:ext cx="4324680" cy="237240"/>
+            <a:ext cx="4324320" cy="236880"/>
           </a:xfrm>
           <a:prstGeom prst="rect">
             <a:avLst/>
@@ -11961,14 +12066,14 @@
       </p:sp>
       <p:sp>
         <p:nvSpPr>
-          <p:cNvPr id="137" name="Text 15"/>
+          <p:cNvPr id="136" name="Text 15"/>
           <p:cNvSpPr/>
           <p:nvPr/>
         </p:nvSpPr>
         <p:spPr>
           <a:xfrm>
             <a:off x="1408320" y="2679120"/>
-            <a:ext cx="4324680" cy="273960"/>
+            <a:ext cx="4324320" cy="273600"/>
           </a:xfrm>
           <a:prstGeom prst="rect">
             <a:avLst/>
@@ -12021,14 +12126,14 @@
       </p:sp>
       <p:sp>
         <p:nvSpPr>
-          <p:cNvPr id="138" name="Shape 16"/>
+          <p:cNvPr id="137" name="Shape 16"/>
           <p:cNvSpPr/>
           <p:nvPr/>
         </p:nvSpPr>
         <p:spPr>
           <a:xfrm>
             <a:off x="640080" y="3319200"/>
-            <a:ext cx="5257440" cy="868320"/>
+            <a:ext cx="5257080" cy="867960"/>
           </a:xfrm>
           <a:prstGeom prst="roundRect">
             <a:avLst>
@@ -12071,14 +12176,14 @@
       </p:sp>
       <p:sp>
         <p:nvSpPr>
-          <p:cNvPr id="139" name="Shape 17"/>
+          <p:cNvPr id="138" name="Shape 17"/>
           <p:cNvSpPr/>
           <p:nvPr/>
         </p:nvSpPr>
         <p:spPr>
           <a:xfrm>
             <a:off x="804600" y="3474720"/>
-            <a:ext cx="475200" cy="475200"/>
+            <a:ext cx="474840" cy="474840"/>
           </a:xfrm>
           <a:prstGeom prst="roundRect">
             <a:avLst>
@@ -12123,14 +12228,14 @@
       </p:sp>
       <p:sp>
         <p:nvSpPr>
-          <p:cNvPr id="140" name="Text 18"/>
+          <p:cNvPr id="139" name="Text 18"/>
           <p:cNvSpPr/>
           <p:nvPr/>
         </p:nvSpPr>
         <p:spPr>
           <a:xfrm>
             <a:off x="859680" y="3538800"/>
-            <a:ext cx="365400" cy="347040"/>
+            <a:ext cx="365040" cy="346680"/>
           </a:xfrm>
           <a:prstGeom prst="rect">
             <a:avLst/>
@@ -12183,14 +12288,14 @@
       </p:sp>
       <p:sp>
         <p:nvSpPr>
-          <p:cNvPr id="141" name="Text 19"/>
+          <p:cNvPr id="140" name="Text 19"/>
           <p:cNvSpPr/>
           <p:nvPr/>
         </p:nvSpPr>
         <p:spPr>
           <a:xfrm>
             <a:off x="1408320" y="3465720"/>
-            <a:ext cx="4324680" cy="237240"/>
+            <a:ext cx="4324320" cy="236880"/>
           </a:xfrm>
           <a:prstGeom prst="rect">
             <a:avLst/>
@@ -12243,14 +12348,14 @@
       </p:sp>
       <p:sp>
         <p:nvSpPr>
-          <p:cNvPr id="142" name="Text 20"/>
+          <p:cNvPr id="141" name="Text 20"/>
           <p:cNvSpPr/>
           <p:nvPr/>
         </p:nvSpPr>
         <p:spPr>
           <a:xfrm>
             <a:off x="1408320" y="3776400"/>
-            <a:ext cx="4324680" cy="273960"/>
+            <a:ext cx="4324320" cy="273600"/>
           </a:xfrm>
           <a:prstGeom prst="rect">
             <a:avLst/>
@@ -12303,14 +12408,14 @@
       </p:sp>
       <p:sp>
         <p:nvSpPr>
-          <p:cNvPr id="143" name="Shape 21"/>
+          <p:cNvPr id="142" name="Shape 21"/>
           <p:cNvSpPr/>
           <p:nvPr/>
         </p:nvSpPr>
         <p:spPr>
           <a:xfrm>
             <a:off x="640080" y="4416480"/>
-            <a:ext cx="5257440" cy="868320"/>
+            <a:ext cx="5257080" cy="867960"/>
           </a:xfrm>
           <a:prstGeom prst="roundRect">
             <a:avLst>
@@ -12353,14 +12458,14 @@
       </p:sp>
       <p:sp>
         <p:nvSpPr>
-          <p:cNvPr id="144" name="Shape 22"/>
+          <p:cNvPr id="143" name="Shape 22"/>
           <p:cNvSpPr/>
           <p:nvPr/>
         </p:nvSpPr>
         <p:spPr>
           <a:xfrm>
             <a:off x="804600" y="4572000"/>
-            <a:ext cx="475200" cy="475200"/>
+            <a:ext cx="474840" cy="474840"/>
           </a:xfrm>
           <a:prstGeom prst="roundRect">
             <a:avLst>
@@ -12405,14 +12510,14 @@
       </p:sp>
       <p:sp>
         <p:nvSpPr>
-          <p:cNvPr id="145" name="Text 23"/>
+          <p:cNvPr id="144" name="Text 23"/>
           <p:cNvSpPr/>
           <p:nvPr/>
         </p:nvSpPr>
         <p:spPr>
           <a:xfrm>
             <a:off x="859680" y="4636080"/>
-            <a:ext cx="365400" cy="347040"/>
+            <a:ext cx="365040" cy="346680"/>
           </a:xfrm>
           <a:prstGeom prst="rect">
             <a:avLst/>
@@ -12465,14 +12570,14 @@
       </p:sp>
       <p:sp>
         <p:nvSpPr>
-          <p:cNvPr id="146" name="Text 24"/>
+          <p:cNvPr id="145" name="Text 24"/>
           <p:cNvSpPr/>
           <p:nvPr/>
         </p:nvSpPr>
         <p:spPr>
           <a:xfrm>
             <a:off x="1408320" y="4563000"/>
-            <a:ext cx="4324680" cy="237240"/>
+            <a:ext cx="4324320" cy="236880"/>
           </a:xfrm>
           <a:prstGeom prst="rect">
             <a:avLst/>
@@ -12525,14 +12630,14 @@
       </p:sp>
       <p:sp>
         <p:nvSpPr>
-          <p:cNvPr id="147" name="Text 25"/>
+          <p:cNvPr id="146" name="Text 25"/>
           <p:cNvSpPr/>
           <p:nvPr/>
         </p:nvSpPr>
         <p:spPr>
           <a:xfrm>
             <a:off x="1408320" y="4873680"/>
-            <a:ext cx="4324680" cy="273960"/>
+            <a:ext cx="4324320" cy="273600"/>
           </a:xfrm>
           <a:prstGeom prst="rect">
             <a:avLst/>
@@ -12585,14 +12690,14 @@
       </p:sp>
       <p:sp>
         <p:nvSpPr>
-          <p:cNvPr id="148" name="Text 26"/>
+          <p:cNvPr id="147" name="Text 26"/>
           <p:cNvSpPr/>
           <p:nvPr/>
         </p:nvSpPr>
         <p:spPr>
           <a:xfrm>
             <a:off x="6537960" y="1051560"/>
-            <a:ext cx="4388760" cy="273960"/>
+            <a:ext cx="4388400" cy="273600"/>
           </a:xfrm>
           <a:prstGeom prst="rect">
             <a:avLst/>
@@ -12645,14 +12750,14 @@
       </p:sp>
       <p:sp>
         <p:nvSpPr>
-          <p:cNvPr id="149" name="Shape 27"/>
+          <p:cNvPr id="148" name="Shape 27"/>
           <p:cNvSpPr/>
           <p:nvPr/>
         </p:nvSpPr>
         <p:spPr>
           <a:xfrm>
             <a:off x="6583680" y="1600200"/>
-            <a:ext cx="3794400" cy="511560"/>
+            <a:ext cx="3794040" cy="511200"/>
           </a:xfrm>
           <a:prstGeom prst="chevron">
             <a:avLst>
@@ -12697,14 +12802,14 @@
       </p:sp>
       <p:sp>
         <p:nvSpPr>
-          <p:cNvPr id="150" name="Text 28"/>
+          <p:cNvPr id="149" name="Text 28"/>
           <p:cNvSpPr/>
           <p:nvPr/>
         </p:nvSpPr>
         <p:spPr>
           <a:xfrm>
             <a:off x="6784920" y="1710000"/>
-            <a:ext cx="3337200" cy="164160"/>
+            <a:ext cx="3336840" cy="163800"/>
           </a:xfrm>
           <a:prstGeom prst="rect">
             <a:avLst/>
@@ -12742,18 +12847,7 @@
                 <a:uFillTx/>
                 <a:latin typeface="Aptos"/>
               </a:rPr>
-              <a:t>Data / gradient privacy — </a:t>
-            </a:r>
-            <a:r>
-              <a:rPr lang="en-US" sz="939" b="1" u="none" strike="noStrike">
-                <a:solidFill>
-                  <a:srgbClr val="07111F"/>
-                </a:solidFill>
-                <a:effectLst/>
-                <a:uFillTx/>
-                <a:latin typeface="Aptos"/>
-              </a:rPr>
-              <a:t>DP, secure aggregation</a:t>
+              <a:t>Data / gradient privacy — DP, secure aggregation</a:t>
             </a:r>
             <a:endParaRPr lang="en-US" sz="939" b="0" u="none" strike="noStrike">
               <a:solidFill>
@@ -12768,14 +12862,14 @@
       </p:sp>
       <p:sp>
         <p:nvSpPr>
-          <p:cNvPr id="151" name="Shape 29"/>
+          <p:cNvPr id="150" name="Shape 29"/>
           <p:cNvSpPr/>
           <p:nvPr/>
         </p:nvSpPr>
         <p:spPr>
           <a:xfrm>
             <a:off x="6583680" y="2404800"/>
-            <a:ext cx="3794400" cy="511560"/>
+            <a:ext cx="3794040" cy="511200"/>
           </a:xfrm>
           <a:prstGeom prst="chevron">
             <a:avLst>
@@ -12820,14 +12914,14 @@
       </p:sp>
       <p:sp>
         <p:nvSpPr>
-          <p:cNvPr id="152" name="Text 30"/>
+          <p:cNvPr id="151" name="Text 30"/>
           <p:cNvSpPr/>
           <p:nvPr/>
         </p:nvSpPr>
         <p:spPr>
           <a:xfrm>
             <a:off x="6784920" y="2514600"/>
-            <a:ext cx="3337200" cy="164160"/>
+            <a:ext cx="3336840" cy="163800"/>
           </a:xfrm>
           <a:prstGeom prst="rect">
             <a:avLst/>
@@ -12880,14 +12974,14 @@
       </p:sp>
       <p:sp>
         <p:nvSpPr>
-          <p:cNvPr id="153" name="Shape 31"/>
+          <p:cNvPr id="152" name="Shape 31"/>
           <p:cNvSpPr/>
           <p:nvPr/>
         </p:nvSpPr>
         <p:spPr>
           <a:xfrm>
             <a:off x="6583680" y="3209400"/>
-            <a:ext cx="3794400" cy="511560"/>
+            <a:ext cx="3794040" cy="511200"/>
           </a:xfrm>
           <a:prstGeom prst="chevron">
             <a:avLst>
@@ -12932,14 +13026,14 @@
       </p:sp>
       <p:sp>
         <p:nvSpPr>
-          <p:cNvPr id="154" name="Text 32"/>
+          <p:cNvPr id="153" name="Text 32"/>
           <p:cNvSpPr/>
           <p:nvPr/>
         </p:nvSpPr>
         <p:spPr>
           <a:xfrm>
             <a:off x="6784920" y="3319200"/>
-            <a:ext cx="3337200" cy="164160"/>
+            <a:ext cx="3336840" cy="163800"/>
           </a:xfrm>
           <a:prstGeom prst="rect">
             <a:avLst/>
@@ -12992,14 +13086,14 @@
       </p:sp>
       <p:sp>
         <p:nvSpPr>
-          <p:cNvPr id="155" name="Shape 33"/>
+          <p:cNvPr id="154" name="Shape 33"/>
           <p:cNvSpPr/>
           <p:nvPr/>
         </p:nvSpPr>
         <p:spPr>
           <a:xfrm>
             <a:off x="6583680" y="4014360"/>
-            <a:ext cx="3794400" cy="511560"/>
+            <a:ext cx="3794040" cy="511200"/>
           </a:xfrm>
           <a:prstGeom prst="chevron">
             <a:avLst>
@@ -13044,14 +13138,14 @@
       </p:sp>
       <p:sp>
         <p:nvSpPr>
-          <p:cNvPr id="156" name="Text 34"/>
+          <p:cNvPr id="155" name="Text 34"/>
           <p:cNvSpPr/>
           <p:nvPr/>
         </p:nvSpPr>
         <p:spPr>
           <a:xfrm>
             <a:off x="6784920" y="4123800"/>
-            <a:ext cx="3337200" cy="164160"/>
+            <a:ext cx="3336840" cy="163800"/>
           </a:xfrm>
           <a:prstGeom prst="rect">
             <a:avLst/>
@@ -13104,14 +13198,14 @@
       </p:sp>
       <p:sp>
         <p:nvSpPr>
-          <p:cNvPr id="157" name="Text 35"/>
+          <p:cNvPr id="156" name="Text 35"/>
           <p:cNvSpPr/>
           <p:nvPr/>
         </p:nvSpPr>
         <p:spPr>
           <a:xfrm>
             <a:off x="6583680" y="4983480"/>
-            <a:ext cx="3885840" cy="502560"/>
+            <a:ext cx="3885480" cy="502200"/>
           </a:xfrm>
           <a:prstGeom prst="rect">
             <a:avLst/>
@@ -13201,14 +13295,14 @@
       </p:grpSpPr>
       <p:sp>
         <p:nvSpPr>
-          <p:cNvPr id="158" name="Shape 0"/>
+          <p:cNvPr id="157" name="Shape 0"/>
           <p:cNvSpPr/>
           <p:nvPr/>
         </p:nvSpPr>
         <p:spPr>
           <a:xfrm>
             <a:off x="0" y="0"/>
-            <a:ext cx="12191400" cy="6857640"/>
+            <a:ext cx="12191040" cy="6857280"/>
           </a:xfrm>
           <a:prstGeom prst="rect">
             <a:avLst/>
@@ -13247,14 +13341,14 @@
       </p:sp>
       <p:sp>
         <p:nvSpPr>
-          <p:cNvPr id="159" name="Shape 1"/>
+          <p:cNvPr id="158" name="Shape 1"/>
           <p:cNvSpPr/>
           <p:nvPr/>
         </p:nvSpPr>
         <p:spPr>
           <a:xfrm>
             <a:off x="0" y="6364080"/>
-            <a:ext cx="12191400" cy="493560"/>
+            <a:ext cx="12191040" cy="493200"/>
           </a:xfrm>
           <a:prstGeom prst="rect">
             <a:avLst/>
@@ -13293,14 +13387,14 @@
       </p:sp>
       <p:sp>
         <p:nvSpPr>
-          <p:cNvPr id="160" name="Text 2"/>
+          <p:cNvPr id="159" name="Text 2"/>
           <p:cNvSpPr/>
           <p:nvPr/>
         </p:nvSpPr>
         <p:spPr>
           <a:xfrm>
             <a:off x="365760" y="6446520"/>
-            <a:ext cx="11475360" cy="200880"/>
+            <a:ext cx="11475000" cy="200520"/>
           </a:xfrm>
           <a:prstGeom prst="rect">
             <a:avLst/>
@@ -13354,14 +13448,14 @@
       </p:sp>
       <p:sp>
         <p:nvSpPr>
-          <p:cNvPr id="161" name="Text 3"/>
+          <p:cNvPr id="160" name="Text 3"/>
           <p:cNvSpPr/>
           <p:nvPr/>
         </p:nvSpPr>
         <p:spPr>
           <a:xfrm>
             <a:off x="502920" y="329040"/>
-            <a:ext cx="9966600" cy="411120"/>
+            <a:ext cx="9966240" cy="410760"/>
           </a:xfrm>
           <a:prstGeom prst="rect">
             <a:avLst/>
@@ -13415,14 +13509,14 @@
       </p:sp>
       <p:sp>
         <p:nvSpPr>
-          <p:cNvPr id="162" name="Shape 4"/>
+          <p:cNvPr id="161" name="Shape 4"/>
           <p:cNvSpPr/>
           <p:nvPr/>
         </p:nvSpPr>
         <p:spPr>
           <a:xfrm>
             <a:off x="502920" y="831960"/>
-            <a:ext cx="1325520" cy="36360"/>
+            <a:ext cx="1325160" cy="36000"/>
           </a:xfrm>
           <a:prstGeom prst="rect">
             <a:avLst/>
@@ -13461,14 +13555,14 @@
       </p:sp>
       <p:sp>
         <p:nvSpPr>
-          <p:cNvPr id="163" name="Text 5"/>
+          <p:cNvPr id="162" name="Text 5"/>
           <p:cNvSpPr/>
           <p:nvPr/>
         </p:nvSpPr>
         <p:spPr>
           <a:xfrm>
             <a:off x="1938600" y="768240"/>
-            <a:ext cx="7131960" cy="200880"/>
+            <a:ext cx="7131600" cy="200520"/>
           </a:xfrm>
           <a:prstGeom prst="rect">
             <a:avLst/>
@@ -13521,14 +13615,14 @@
       </p:sp>
       <p:sp>
         <p:nvSpPr>
-          <p:cNvPr id="164" name="Shape 6"/>
+          <p:cNvPr id="163" name="Shape 6"/>
           <p:cNvSpPr/>
           <p:nvPr/>
         </p:nvSpPr>
         <p:spPr>
           <a:xfrm>
             <a:off x="621720" y="1115640"/>
-            <a:ext cx="5166000" cy="914040"/>
+            <a:ext cx="5165640" cy="913680"/>
           </a:xfrm>
           <a:prstGeom prst="roundRect">
             <a:avLst>
@@ -13571,14 +13665,14 @@
       </p:sp>
       <p:sp>
         <p:nvSpPr>
-          <p:cNvPr id="165" name="Shape 7"/>
+          <p:cNvPr id="164" name="Shape 7"/>
           <p:cNvSpPr/>
           <p:nvPr/>
         </p:nvSpPr>
         <p:spPr>
           <a:xfrm>
             <a:off x="786240" y="1271160"/>
-            <a:ext cx="475200" cy="475200"/>
+            <a:ext cx="474840" cy="474840"/>
           </a:xfrm>
           <a:prstGeom prst="roundRect">
             <a:avLst>
@@ -13623,14 +13717,14 @@
       </p:sp>
       <p:sp>
         <p:nvSpPr>
-          <p:cNvPr id="166" name="Text 8"/>
+          <p:cNvPr id="165" name="Text 8"/>
           <p:cNvSpPr/>
           <p:nvPr/>
         </p:nvSpPr>
         <p:spPr>
           <a:xfrm>
             <a:off x="841320" y="1334880"/>
-            <a:ext cx="365400" cy="347040"/>
+            <a:ext cx="365040" cy="346680"/>
           </a:xfrm>
           <a:prstGeom prst="rect">
             <a:avLst/>
@@ -13683,14 +13777,14 @@
       </p:sp>
       <p:sp>
         <p:nvSpPr>
-          <p:cNvPr id="167" name="Text 9"/>
+          <p:cNvPr id="166" name="Text 9"/>
           <p:cNvSpPr/>
           <p:nvPr/>
         </p:nvSpPr>
         <p:spPr>
           <a:xfrm>
             <a:off x="1389960" y="1261800"/>
-            <a:ext cx="4233240" cy="237240"/>
+            <a:ext cx="4232880" cy="236880"/>
           </a:xfrm>
           <a:prstGeom prst="rect">
             <a:avLst/>
@@ -13743,14 +13837,14 @@
       </p:sp>
       <p:sp>
         <p:nvSpPr>
-          <p:cNvPr id="168" name="Text 10"/>
+          <p:cNvPr id="167" name="Text 10"/>
           <p:cNvSpPr/>
           <p:nvPr/>
         </p:nvSpPr>
         <p:spPr>
           <a:xfrm>
             <a:off x="1389960" y="1572840"/>
-            <a:ext cx="4233240" cy="319680"/>
+            <a:ext cx="4232880" cy="319320"/>
           </a:xfrm>
           <a:prstGeom prst="rect">
             <a:avLst/>
@@ -13803,14 +13897,14 @@
       </p:sp>
       <p:sp>
         <p:nvSpPr>
-          <p:cNvPr id="169" name="Shape 11"/>
+          <p:cNvPr id="168" name="Shape 11"/>
           <p:cNvSpPr/>
           <p:nvPr/>
         </p:nvSpPr>
         <p:spPr>
           <a:xfrm>
             <a:off x="6245280" y="1115640"/>
-            <a:ext cx="5166000" cy="914040"/>
+            <a:ext cx="5165640" cy="913680"/>
           </a:xfrm>
           <a:prstGeom prst="roundRect">
             <a:avLst>
@@ -13853,14 +13947,14 @@
       </p:sp>
       <p:sp>
         <p:nvSpPr>
-          <p:cNvPr id="170" name="Shape 12"/>
+          <p:cNvPr id="169" name="Shape 12"/>
           <p:cNvSpPr/>
           <p:nvPr/>
         </p:nvSpPr>
         <p:spPr>
           <a:xfrm>
             <a:off x="6409800" y="1271160"/>
-            <a:ext cx="475200" cy="475200"/>
+            <a:ext cx="474840" cy="474840"/>
           </a:xfrm>
           <a:prstGeom prst="roundRect">
             <a:avLst>
@@ -13905,14 +13999,14 @@
       </p:sp>
       <p:sp>
         <p:nvSpPr>
-          <p:cNvPr id="171" name="Text 13"/>
+          <p:cNvPr id="170" name="Text 13"/>
           <p:cNvSpPr/>
           <p:nvPr/>
         </p:nvSpPr>
         <p:spPr>
           <a:xfrm>
             <a:off x="6464880" y="1334880"/>
-            <a:ext cx="365400" cy="347040"/>
+            <a:ext cx="365040" cy="346680"/>
           </a:xfrm>
           <a:prstGeom prst="rect">
             <a:avLst/>
@@ -13965,14 +14059,14 @@
       </p:sp>
       <p:sp>
         <p:nvSpPr>
-          <p:cNvPr id="172" name="Text 14"/>
+          <p:cNvPr id="171" name="Text 14"/>
           <p:cNvSpPr/>
           <p:nvPr/>
         </p:nvSpPr>
         <p:spPr>
           <a:xfrm>
             <a:off x="7013520" y="1261800"/>
-            <a:ext cx="4233240" cy="237240"/>
+            <a:ext cx="4232880" cy="236880"/>
           </a:xfrm>
           <a:prstGeom prst="rect">
             <a:avLst/>
@@ -14025,14 +14119,14 @@
       </p:sp>
       <p:sp>
         <p:nvSpPr>
-          <p:cNvPr id="173" name="Text 15"/>
+          <p:cNvPr id="172" name="Text 15"/>
           <p:cNvSpPr/>
           <p:nvPr/>
         </p:nvSpPr>
         <p:spPr>
           <a:xfrm>
             <a:off x="7013520" y="1572840"/>
-            <a:ext cx="4233240" cy="319680"/>
+            <a:ext cx="4232880" cy="319320"/>
           </a:xfrm>
           <a:prstGeom prst="rect">
             <a:avLst/>
@@ -14085,14 +14179,14 @@
       </p:sp>
       <p:sp>
         <p:nvSpPr>
-          <p:cNvPr id="174" name="Shape 16"/>
+          <p:cNvPr id="173" name="Shape 16"/>
           <p:cNvSpPr/>
           <p:nvPr/>
         </p:nvSpPr>
         <p:spPr>
           <a:xfrm>
             <a:off x="621720" y="2468880"/>
-            <a:ext cx="5166000" cy="914040"/>
+            <a:ext cx="5165640" cy="913680"/>
           </a:xfrm>
           <a:prstGeom prst="roundRect">
             <a:avLst>
@@ -14135,14 +14229,14 @@
       </p:sp>
       <p:sp>
         <p:nvSpPr>
-          <p:cNvPr id="175" name="Shape 17"/>
+          <p:cNvPr id="174" name="Shape 17"/>
           <p:cNvSpPr/>
           <p:nvPr/>
         </p:nvSpPr>
         <p:spPr>
           <a:xfrm>
             <a:off x="786240" y="2624400"/>
-            <a:ext cx="475200" cy="475200"/>
+            <a:ext cx="474840" cy="474840"/>
           </a:xfrm>
           <a:prstGeom prst="roundRect">
             <a:avLst>
@@ -14187,14 +14281,14 @@
       </p:sp>
       <p:sp>
         <p:nvSpPr>
-          <p:cNvPr id="176" name="Text 18"/>
+          <p:cNvPr id="175" name="Text 18"/>
           <p:cNvSpPr/>
           <p:nvPr/>
         </p:nvSpPr>
         <p:spPr>
           <a:xfrm>
             <a:off x="841320" y="2688480"/>
-            <a:ext cx="365400" cy="347040"/>
+            <a:ext cx="365040" cy="346680"/>
           </a:xfrm>
           <a:prstGeom prst="rect">
             <a:avLst/>
@@ -14247,14 +14341,14 @@
       </p:sp>
       <p:sp>
         <p:nvSpPr>
-          <p:cNvPr id="177" name="Text 19"/>
+          <p:cNvPr id="176" name="Text 19"/>
           <p:cNvSpPr/>
           <p:nvPr/>
         </p:nvSpPr>
         <p:spPr>
           <a:xfrm>
             <a:off x="1389960" y="2615040"/>
-            <a:ext cx="4233240" cy="237240"/>
+            <a:ext cx="4232880" cy="236880"/>
           </a:xfrm>
           <a:prstGeom prst="rect">
             <a:avLst/>
@@ -14307,14 +14401,14 @@
       </p:sp>
       <p:sp>
         <p:nvSpPr>
-          <p:cNvPr id="178" name="Text 20"/>
+          <p:cNvPr id="177" name="Text 20"/>
           <p:cNvSpPr/>
           <p:nvPr/>
         </p:nvSpPr>
         <p:spPr>
           <a:xfrm>
             <a:off x="1389960" y="2926080"/>
-            <a:ext cx="4233240" cy="319680"/>
+            <a:ext cx="4232880" cy="319320"/>
           </a:xfrm>
           <a:prstGeom prst="rect">
             <a:avLst/>
@@ -14352,29 +14446,7 @@
                 <a:uFillTx/>
                 <a:latin typeface="Aptos"/>
               </a:rPr>
-              <a:t>FL reduces raw-data sharing, but model </a:t>
-            </a:r>
-            <a:r>
-              <a:rPr lang="en-US" sz="1030" b="0" u="none" strike="noStrike">
-                <a:solidFill>
-                  <a:srgbClr val="A8B3C7"/>
-                </a:solidFill>
-                <a:effectLst/>
-                <a:uFillTx/>
-                <a:latin typeface="Aptos"/>
-              </a:rPr>
-              <a:t>updates can still expose private </a:t>
-            </a:r>
-            <a:r>
-              <a:rPr lang="en-US" sz="1030" b="0" u="none" strike="noStrike">
-                <a:solidFill>
-                  <a:srgbClr val="A8B3C7"/>
-                </a:solidFill>
-                <a:effectLst/>
-                <a:uFillTx/>
-                <a:latin typeface="Aptos"/>
-              </a:rPr>
-              <a:t>information [7], [8], [10].</a:t>
+              <a:t>FL reduces raw-data sharing, but model updates can still expose private information [7], [8], [10].</a:t>
             </a:r>
             <a:endParaRPr lang="en-US" sz="1030" b="0" u="none" strike="noStrike">
               <a:solidFill>
@@ -14389,14 +14461,14 @@
       </p:sp>
       <p:sp>
         <p:nvSpPr>
-          <p:cNvPr id="179" name="Shape 21"/>
+          <p:cNvPr id="178" name="Shape 21"/>
           <p:cNvSpPr/>
           <p:nvPr/>
         </p:nvSpPr>
         <p:spPr>
           <a:xfrm>
             <a:off x="6245280" y="2468880"/>
-            <a:ext cx="5166000" cy="914040"/>
+            <a:ext cx="5165640" cy="913680"/>
           </a:xfrm>
           <a:prstGeom prst="roundRect">
             <a:avLst>
@@ -14439,14 +14511,14 @@
       </p:sp>
       <p:sp>
         <p:nvSpPr>
-          <p:cNvPr id="180" name="Shape 22"/>
+          <p:cNvPr id="179" name="Shape 22"/>
           <p:cNvSpPr/>
           <p:nvPr/>
         </p:nvSpPr>
         <p:spPr>
           <a:xfrm>
             <a:off x="6409800" y="2624400"/>
-            <a:ext cx="475200" cy="475200"/>
+            <a:ext cx="474840" cy="474840"/>
           </a:xfrm>
           <a:prstGeom prst="roundRect">
             <a:avLst>
@@ -14491,14 +14563,14 @@
       </p:sp>
       <p:sp>
         <p:nvSpPr>
-          <p:cNvPr id="181" name="Text 23"/>
+          <p:cNvPr id="180" name="Text 23"/>
           <p:cNvSpPr/>
           <p:nvPr/>
         </p:nvSpPr>
         <p:spPr>
           <a:xfrm>
             <a:off x="6464880" y="2688480"/>
-            <a:ext cx="365400" cy="347040"/>
+            <a:ext cx="365040" cy="346680"/>
           </a:xfrm>
           <a:prstGeom prst="rect">
             <a:avLst/>
@@ -14551,14 +14623,14 @@
       </p:sp>
       <p:sp>
         <p:nvSpPr>
-          <p:cNvPr id="182" name="Text 24"/>
+          <p:cNvPr id="181" name="Text 24"/>
           <p:cNvSpPr/>
           <p:nvPr/>
         </p:nvSpPr>
         <p:spPr>
           <a:xfrm>
             <a:off x="7013520" y="2615040"/>
-            <a:ext cx="4233240" cy="237240"/>
+            <a:ext cx="4232880" cy="236880"/>
           </a:xfrm>
           <a:prstGeom prst="rect">
             <a:avLst/>
@@ -14611,14 +14683,14 @@
       </p:sp>
       <p:sp>
         <p:nvSpPr>
-          <p:cNvPr id="183" name="Text 25"/>
+          <p:cNvPr id="182" name="Text 25"/>
           <p:cNvSpPr/>
           <p:nvPr/>
         </p:nvSpPr>
         <p:spPr>
           <a:xfrm>
             <a:off x="7013520" y="2926080"/>
-            <a:ext cx="4233240" cy="319680"/>
+            <a:ext cx="4232880" cy="319320"/>
           </a:xfrm>
           <a:prstGeom prst="rect">
             <a:avLst/>
@@ -14671,14 +14743,14 @@
       </p:sp>
       <p:sp>
         <p:nvSpPr>
-          <p:cNvPr id="184" name="Shape 26"/>
+          <p:cNvPr id="183" name="Shape 26"/>
           <p:cNvSpPr/>
           <p:nvPr/>
         </p:nvSpPr>
         <p:spPr>
           <a:xfrm>
             <a:off x="621720" y="3822120"/>
-            <a:ext cx="5166000" cy="914040"/>
+            <a:ext cx="5165640" cy="913680"/>
           </a:xfrm>
           <a:prstGeom prst="roundRect">
             <a:avLst>
@@ -14721,14 +14793,14 @@
       </p:sp>
       <p:sp>
         <p:nvSpPr>
-          <p:cNvPr id="185" name="Shape 27"/>
+          <p:cNvPr id="184" name="Shape 27"/>
           <p:cNvSpPr/>
           <p:nvPr/>
         </p:nvSpPr>
         <p:spPr>
           <a:xfrm>
             <a:off x="786240" y="3977640"/>
-            <a:ext cx="475200" cy="475200"/>
+            <a:ext cx="474840" cy="474840"/>
           </a:xfrm>
           <a:prstGeom prst="roundRect">
             <a:avLst>
@@ -14773,14 +14845,14 @@
       </p:sp>
       <p:sp>
         <p:nvSpPr>
-          <p:cNvPr id="186" name="Text 28"/>
+          <p:cNvPr id="185" name="Text 28"/>
           <p:cNvSpPr/>
           <p:nvPr/>
         </p:nvSpPr>
         <p:spPr>
           <a:xfrm>
             <a:off x="841320" y="4041720"/>
-            <a:ext cx="365400" cy="347040"/>
+            <a:ext cx="365040" cy="346680"/>
           </a:xfrm>
           <a:prstGeom prst="rect">
             <a:avLst/>
@@ -14833,14 +14905,14 @@
       </p:sp>
       <p:sp>
         <p:nvSpPr>
-          <p:cNvPr id="187" name="Text 29"/>
+          <p:cNvPr id="186" name="Text 29"/>
           <p:cNvSpPr/>
           <p:nvPr/>
         </p:nvSpPr>
         <p:spPr>
           <a:xfrm>
             <a:off x="1389960" y="3968640"/>
-            <a:ext cx="4233240" cy="237240"/>
+            <a:ext cx="4232880" cy="236880"/>
           </a:xfrm>
           <a:prstGeom prst="rect">
             <a:avLst/>
@@ -14893,14 +14965,14 @@
       </p:sp>
       <p:sp>
         <p:nvSpPr>
-          <p:cNvPr id="188" name="Text 30"/>
+          <p:cNvPr id="187" name="Text 30"/>
           <p:cNvSpPr/>
           <p:nvPr/>
         </p:nvSpPr>
         <p:spPr>
           <a:xfrm>
             <a:off x="1389960" y="4279320"/>
-            <a:ext cx="4233240" cy="319680"/>
+            <a:ext cx="4232880" cy="319320"/>
           </a:xfrm>
           <a:prstGeom prst="rect">
             <a:avLst/>
@@ -14953,14 +15025,14 @@
       </p:sp>
       <p:sp>
         <p:nvSpPr>
-          <p:cNvPr id="189" name="Shape 31"/>
+          <p:cNvPr id="188" name="Shape 31"/>
           <p:cNvSpPr/>
           <p:nvPr/>
         </p:nvSpPr>
         <p:spPr>
           <a:xfrm>
             <a:off x="6245280" y="3822120"/>
-            <a:ext cx="5166000" cy="914040"/>
+            <a:ext cx="5165640" cy="913680"/>
           </a:xfrm>
           <a:prstGeom prst="roundRect">
             <a:avLst>
@@ -15003,14 +15075,14 @@
       </p:sp>
       <p:sp>
         <p:nvSpPr>
-          <p:cNvPr id="190" name="Shape 32"/>
+          <p:cNvPr id="189" name="Shape 32"/>
           <p:cNvSpPr/>
           <p:nvPr/>
         </p:nvSpPr>
         <p:spPr>
           <a:xfrm>
             <a:off x="6409800" y="3977640"/>
-            <a:ext cx="475200" cy="475200"/>
+            <a:ext cx="474840" cy="474840"/>
           </a:xfrm>
           <a:prstGeom prst="roundRect">
             <a:avLst>
@@ -15055,14 +15127,14 @@
       </p:sp>
       <p:sp>
         <p:nvSpPr>
-          <p:cNvPr id="191" name="Text 33"/>
+          <p:cNvPr id="190" name="Text 33"/>
           <p:cNvSpPr/>
           <p:nvPr/>
         </p:nvSpPr>
         <p:spPr>
           <a:xfrm>
             <a:off x="6464880" y="4041720"/>
-            <a:ext cx="365400" cy="347040"/>
+            <a:ext cx="365040" cy="346680"/>
           </a:xfrm>
           <a:prstGeom prst="rect">
             <a:avLst/>
@@ -15115,14 +15187,14 @@
       </p:sp>
       <p:sp>
         <p:nvSpPr>
-          <p:cNvPr id="192" name="Text 34"/>
+          <p:cNvPr id="191" name="Text 34"/>
           <p:cNvSpPr/>
           <p:nvPr/>
         </p:nvSpPr>
         <p:spPr>
           <a:xfrm>
             <a:off x="7013520" y="3968640"/>
-            <a:ext cx="4233240" cy="237240"/>
+            <a:ext cx="4232880" cy="236880"/>
           </a:xfrm>
           <a:prstGeom prst="rect">
             <a:avLst/>
@@ -15160,18 +15232,7 @@
                 <a:uFillTx/>
                 <a:latin typeface="Aptos"/>
               </a:rPr>
-              <a:t>Limited SOC </a:t>
-            </a:r>
-            <a:r>
-              <a:rPr lang="en-US" sz="1350" b="1" u="none" strike="noStrike">
-                <a:solidFill>
-                  <a:srgbClr val="F8FAFC"/>
-                </a:solidFill>
-                <a:effectLst/>
-                <a:uFillTx/>
-                <a:latin typeface="Aptos"/>
-              </a:rPr>
-              <a:t>explainability</a:t>
+              <a:t>Limited SOC explainability</a:t>
             </a:r>
             <a:endParaRPr lang="en-US" sz="1350" b="0" u="none" strike="noStrike">
               <a:solidFill>
@@ -15186,14 +15247,14 @@
       </p:sp>
       <p:sp>
         <p:nvSpPr>
-          <p:cNvPr id="193" name="Text 35"/>
+          <p:cNvPr id="192" name="Text 35"/>
           <p:cNvSpPr/>
           <p:nvPr/>
         </p:nvSpPr>
         <p:spPr>
           <a:xfrm>
             <a:off x="7013520" y="4279320"/>
-            <a:ext cx="4233240" cy="319680"/>
+            <a:ext cx="4232880" cy="319320"/>
           </a:xfrm>
           <a:prstGeom prst="rect">
             <a:avLst/>
@@ -15246,14 +15307,14 @@
       </p:sp>
       <p:sp>
         <p:nvSpPr>
-          <p:cNvPr id="194" name="Text 36"/>
+          <p:cNvPr id="193" name="Text 36"/>
           <p:cNvSpPr/>
           <p:nvPr/>
         </p:nvSpPr>
         <p:spPr>
           <a:xfrm>
             <a:off x="914400" y="5440680"/>
-            <a:ext cx="10332360" cy="383760"/>
+            <a:ext cx="10332000" cy="383400"/>
           </a:xfrm>
           <a:prstGeom prst="rect">
             <a:avLst/>
@@ -15291,18 +15352,7 @@
                 <a:uFillTx/>
                 <a:latin typeface="Aptos"/>
               </a:rPr>
-              <a:t>Observation: no single reviewed approach fully unifies privacy, adversarial robustness, </a:t>
-            </a:r>
-            <a:r>
-              <a:rPr lang="en-US" sz="1350" b="1" u="none" strike="noStrike">
-                <a:solidFill>
-                  <a:srgbClr val="F8FAFC"/>
-                </a:solidFill>
-                <a:effectLst/>
-                <a:uFillTx/>
-                <a:latin typeface="Aptos"/>
-              </a:rPr>
-              <a:t>free-rider validation, and SOC-level explanation for constrained IoT IDS.</a:t>
+              <a:t>Observation: no single reviewed approach fully unifies privacy, adversarial robustness, free-rider validation, and SOC-level explanation for constrained IoT IDS.</a:t>
             </a:r>
             <a:endParaRPr lang="en-US" sz="1350" b="0" u="none" strike="noStrike">
               <a:solidFill>
@@ -15354,14 +15404,14 @@
       </p:grpSpPr>
       <p:sp>
         <p:nvSpPr>
-          <p:cNvPr id="195" name="Shape 0"/>
+          <p:cNvPr id="194" name="Shape 0"/>
           <p:cNvSpPr/>
           <p:nvPr/>
         </p:nvSpPr>
         <p:spPr>
           <a:xfrm>
             <a:off x="0" y="0"/>
-            <a:ext cx="12191400" cy="6857640"/>
+            <a:ext cx="12191040" cy="6857280"/>
           </a:xfrm>
           <a:prstGeom prst="rect">
             <a:avLst/>
@@ -15400,14 +15450,14 @@
       </p:sp>
       <p:sp>
         <p:nvSpPr>
-          <p:cNvPr id="196" name="Shape 1"/>
+          <p:cNvPr id="195" name="Shape 1"/>
           <p:cNvSpPr/>
           <p:nvPr/>
         </p:nvSpPr>
         <p:spPr>
           <a:xfrm>
             <a:off x="0" y="6364080"/>
-            <a:ext cx="12191400" cy="493560"/>
+            <a:ext cx="12191040" cy="493200"/>
           </a:xfrm>
           <a:prstGeom prst="rect">
             <a:avLst/>
@@ -15446,14 +15496,14 @@
       </p:sp>
       <p:sp>
         <p:nvSpPr>
-          <p:cNvPr id="197" name="Text 2"/>
+          <p:cNvPr id="196" name="Text 2"/>
           <p:cNvSpPr/>
           <p:nvPr/>
         </p:nvSpPr>
         <p:spPr>
           <a:xfrm>
             <a:off x="365760" y="6446520"/>
-            <a:ext cx="11475360" cy="200880"/>
+            <a:ext cx="11475000" cy="200520"/>
           </a:xfrm>
           <a:prstGeom prst="rect">
             <a:avLst/>
@@ -15507,14 +15557,14 @@
       </p:sp>
       <p:sp>
         <p:nvSpPr>
-          <p:cNvPr id="198" name="Text 3"/>
+          <p:cNvPr id="197" name="Text 3"/>
           <p:cNvSpPr/>
           <p:nvPr/>
         </p:nvSpPr>
         <p:spPr>
           <a:xfrm>
             <a:off x="502920" y="329040"/>
-            <a:ext cx="9966600" cy="411120"/>
+            <a:ext cx="9966240" cy="410760"/>
           </a:xfrm>
           <a:prstGeom prst="rect">
             <a:avLst/>
@@ -15568,14 +15618,14 @@
       </p:sp>
       <p:sp>
         <p:nvSpPr>
-          <p:cNvPr id="199" name="Shape 4"/>
+          <p:cNvPr id="198" name="Shape 4"/>
           <p:cNvSpPr/>
           <p:nvPr/>
         </p:nvSpPr>
         <p:spPr>
           <a:xfrm>
             <a:off x="502920" y="831960"/>
-            <a:ext cx="1325520" cy="36360"/>
+            <a:ext cx="1325160" cy="36000"/>
           </a:xfrm>
           <a:prstGeom prst="rect">
             <a:avLst/>
@@ -15614,14 +15664,14 @@
       </p:sp>
       <p:sp>
         <p:nvSpPr>
-          <p:cNvPr id="200" name="Text 5"/>
+          <p:cNvPr id="199" name="Text 5"/>
           <p:cNvSpPr/>
           <p:nvPr/>
         </p:nvSpPr>
         <p:spPr>
           <a:xfrm>
             <a:off x="1938600" y="768240"/>
-            <a:ext cx="7131960" cy="200880"/>
+            <a:ext cx="7131600" cy="200520"/>
           </a:xfrm>
           <a:prstGeom prst="rect">
             <a:avLst/>
@@ -15674,14 +15724,14 @@
       </p:sp>
       <p:sp>
         <p:nvSpPr>
-          <p:cNvPr id="201" name="Shape 6"/>
+          <p:cNvPr id="200" name="Shape 6"/>
           <p:cNvSpPr/>
           <p:nvPr/>
         </p:nvSpPr>
         <p:spPr>
           <a:xfrm>
             <a:off x="502920" y="1207080"/>
-            <a:ext cx="2331360" cy="392760"/>
+            <a:ext cx="2331000" cy="392400"/>
           </a:xfrm>
           <a:prstGeom prst="rect">
             <a:avLst/>
@@ -15720,14 +15770,14 @@
       </p:sp>
       <p:sp>
         <p:nvSpPr>
-          <p:cNvPr id="202" name="Text 7"/>
+          <p:cNvPr id="201" name="Text 7"/>
           <p:cNvSpPr/>
           <p:nvPr/>
         </p:nvSpPr>
         <p:spPr>
           <a:xfrm>
             <a:off x="539640" y="1248120"/>
-            <a:ext cx="2258280" cy="310680"/>
+            <a:ext cx="2257920" cy="310320"/>
           </a:xfrm>
           <a:prstGeom prst="rect">
             <a:avLst/>
@@ -15780,14 +15830,14 @@
       </p:sp>
       <p:sp>
         <p:nvSpPr>
-          <p:cNvPr id="203" name="Shape 8"/>
+          <p:cNvPr id="202" name="Shape 8"/>
           <p:cNvSpPr/>
           <p:nvPr/>
         </p:nvSpPr>
         <p:spPr>
           <a:xfrm>
             <a:off x="2834640" y="1207080"/>
-            <a:ext cx="2971440" cy="392760"/>
+            <a:ext cx="2971080" cy="392400"/>
           </a:xfrm>
           <a:prstGeom prst="rect">
             <a:avLst/>
@@ -15826,14 +15876,14 @@
       </p:sp>
       <p:sp>
         <p:nvSpPr>
-          <p:cNvPr id="204" name="Text 9"/>
+          <p:cNvPr id="203" name="Text 9"/>
           <p:cNvSpPr/>
           <p:nvPr/>
         </p:nvSpPr>
         <p:spPr>
           <a:xfrm>
             <a:off x="2871360" y="1248120"/>
-            <a:ext cx="2898360" cy="310680"/>
+            <a:ext cx="2898000" cy="310320"/>
           </a:xfrm>
           <a:prstGeom prst="rect">
             <a:avLst/>
@@ -15886,14 +15936,14 @@
       </p:sp>
       <p:sp>
         <p:nvSpPr>
-          <p:cNvPr id="205" name="Shape 10"/>
+          <p:cNvPr id="204" name="Shape 10"/>
           <p:cNvSpPr/>
           <p:nvPr/>
         </p:nvSpPr>
         <p:spPr>
           <a:xfrm>
             <a:off x="5806440" y="1207080"/>
-            <a:ext cx="2148480" cy="392760"/>
+            <a:ext cx="2148120" cy="392400"/>
           </a:xfrm>
           <a:prstGeom prst="rect">
             <a:avLst/>
@@ -15932,14 +15982,14 @@
       </p:sp>
       <p:sp>
         <p:nvSpPr>
-          <p:cNvPr id="206" name="Text 11"/>
+          <p:cNvPr id="205" name="Text 11"/>
           <p:cNvSpPr/>
           <p:nvPr/>
         </p:nvSpPr>
         <p:spPr>
           <a:xfrm>
             <a:off x="5843160" y="1248120"/>
-            <a:ext cx="2075400" cy="310680"/>
+            <a:ext cx="2075040" cy="310320"/>
           </a:xfrm>
           <a:prstGeom prst="rect">
             <a:avLst/>
@@ -15992,14 +16042,14 @@
       </p:sp>
       <p:sp>
         <p:nvSpPr>
-          <p:cNvPr id="207" name="Shape 12"/>
+          <p:cNvPr id="206" name="Shape 12"/>
           <p:cNvSpPr/>
           <p:nvPr/>
         </p:nvSpPr>
         <p:spPr>
           <a:xfrm>
             <a:off x="7955280" y="1207080"/>
-            <a:ext cx="3721320" cy="392760"/>
+            <a:ext cx="3720960" cy="392400"/>
           </a:xfrm>
           <a:prstGeom prst="rect">
             <a:avLst/>
@@ -16038,14 +16088,14 @@
       </p:sp>
       <p:sp>
         <p:nvSpPr>
-          <p:cNvPr id="208" name="Text 13"/>
+          <p:cNvPr id="207" name="Text 13"/>
           <p:cNvSpPr/>
           <p:nvPr/>
         </p:nvSpPr>
         <p:spPr>
           <a:xfrm>
             <a:off x="7992000" y="1248120"/>
-            <a:ext cx="3648240" cy="310680"/>
+            <a:ext cx="3647880" cy="310320"/>
           </a:xfrm>
           <a:prstGeom prst="rect">
             <a:avLst/>
@@ -16098,14 +16148,14 @@
       </p:sp>
       <p:sp>
         <p:nvSpPr>
-          <p:cNvPr id="209" name="Shape 14"/>
+          <p:cNvPr id="208" name="Shape 14"/>
           <p:cNvSpPr/>
           <p:nvPr/>
         </p:nvSpPr>
         <p:spPr>
           <a:xfrm>
             <a:off x="502920" y="1600200"/>
-            <a:ext cx="2331360" cy="1234080"/>
+            <a:ext cx="2331000" cy="1233720"/>
           </a:xfrm>
           <a:prstGeom prst="rect">
             <a:avLst/>
@@ -16144,14 +16194,14 @@
       </p:sp>
       <p:sp>
         <p:nvSpPr>
-          <p:cNvPr id="210" name="Text 15"/>
+          <p:cNvPr id="209" name="Text 15"/>
           <p:cNvSpPr/>
           <p:nvPr/>
         </p:nvSpPr>
         <p:spPr>
           <a:xfrm>
             <a:off x="539640" y="1641240"/>
-            <a:ext cx="2258280" cy="1151640"/>
+            <a:ext cx="2257920" cy="1151280"/>
           </a:xfrm>
           <a:prstGeom prst="rect">
             <a:avLst/>
@@ -16189,18 +16239,7 @@
                 <a:uFillTx/>
                 <a:latin typeface="Aptos"/>
               </a:rPr>
-              <a:t>FL IDS reduces raw </a:t>
-            </a:r>
-            <a:r>
-              <a:rPr lang="en-US" sz="800" b="0" u="none" strike="noStrike">
-                <a:solidFill>
-                  <a:srgbClr val="F8FAFC"/>
-                </a:solidFill>
-                <a:effectLst/>
-                <a:uFillTx/>
-                <a:latin typeface="Aptos"/>
-              </a:rPr>
-              <a:t>data transfer [1]–[6]</a:t>
+              <a:t>FL IDS reduces raw data transfer [1]–[6]</a:t>
             </a:r>
             <a:endParaRPr lang="en-US" sz="800" b="0" u="none" strike="noStrike">
               <a:solidFill>
@@ -16215,14 +16254,14 @@
       </p:sp>
       <p:sp>
         <p:nvSpPr>
-          <p:cNvPr id="211" name="Shape 16"/>
+          <p:cNvPr id="210" name="Shape 16"/>
           <p:cNvSpPr/>
           <p:nvPr/>
         </p:nvSpPr>
         <p:spPr>
           <a:xfrm>
             <a:off x="2834640" y="1600200"/>
-            <a:ext cx="2971440" cy="1234080"/>
+            <a:ext cx="2971080" cy="1233720"/>
           </a:xfrm>
           <a:prstGeom prst="rect">
             <a:avLst/>
@@ -16261,14 +16300,14 @@
       </p:sp>
       <p:sp>
         <p:nvSpPr>
-          <p:cNvPr id="212" name="Text 17"/>
+          <p:cNvPr id="211" name="Text 17"/>
           <p:cNvSpPr/>
           <p:nvPr/>
         </p:nvSpPr>
         <p:spPr>
           <a:xfrm>
             <a:off x="2871360" y="1641240"/>
-            <a:ext cx="2898360" cy="1151640"/>
+            <a:ext cx="2898000" cy="1151280"/>
           </a:xfrm>
           <a:prstGeom prst="rect">
             <a:avLst/>
@@ -16321,14 +16360,14 @@
       </p:sp>
       <p:sp>
         <p:nvSpPr>
-          <p:cNvPr id="213" name="Shape 18"/>
+          <p:cNvPr id="212" name="Shape 18"/>
           <p:cNvSpPr/>
           <p:nvPr/>
         </p:nvSpPr>
         <p:spPr>
           <a:xfrm>
             <a:off x="5806440" y="1600200"/>
-            <a:ext cx="2148480" cy="1234080"/>
+            <a:ext cx="2148120" cy="1233720"/>
           </a:xfrm>
           <a:prstGeom prst="rect">
             <a:avLst/>
@@ -16367,14 +16406,14 @@
       </p:sp>
       <p:sp>
         <p:nvSpPr>
-          <p:cNvPr id="214" name="Text 19"/>
+          <p:cNvPr id="213" name="Text 19"/>
           <p:cNvSpPr/>
           <p:nvPr/>
         </p:nvSpPr>
         <p:spPr>
           <a:xfrm>
             <a:off x="5843160" y="1641240"/>
-            <a:ext cx="2075400" cy="1151640"/>
+            <a:ext cx="2075040" cy="1151280"/>
           </a:xfrm>
           <a:prstGeom prst="rect">
             <a:avLst/>
@@ -16427,14 +16466,14 @@
       </p:sp>
       <p:sp>
         <p:nvSpPr>
-          <p:cNvPr id="215" name="Shape 20"/>
+          <p:cNvPr id="214" name="Shape 20"/>
           <p:cNvSpPr/>
           <p:nvPr/>
         </p:nvSpPr>
         <p:spPr>
           <a:xfrm>
             <a:off x="7955280" y="1600200"/>
-            <a:ext cx="3721320" cy="1234080"/>
+            <a:ext cx="3720960" cy="1233720"/>
           </a:xfrm>
           <a:prstGeom prst="rect">
             <a:avLst/>
@@ -16473,14 +16512,14 @@
       </p:sp>
       <p:sp>
         <p:nvSpPr>
-          <p:cNvPr id="216" name="Text 21"/>
+          <p:cNvPr id="215" name="Text 21"/>
           <p:cNvSpPr/>
           <p:nvPr/>
         </p:nvSpPr>
         <p:spPr>
           <a:xfrm>
             <a:off x="7992000" y="1641240"/>
-            <a:ext cx="3648240" cy="1151640"/>
+            <a:ext cx="3647880" cy="1151280"/>
           </a:xfrm>
           <a:prstGeom prst="rect">
             <a:avLst/>
@@ -16533,14 +16572,14 @@
       </p:sp>
       <p:sp>
         <p:nvSpPr>
-          <p:cNvPr id="217" name="Shape 22"/>
+          <p:cNvPr id="216" name="Shape 22"/>
           <p:cNvSpPr/>
           <p:nvPr/>
         </p:nvSpPr>
         <p:spPr>
           <a:xfrm>
             <a:off x="502920" y="2834640"/>
-            <a:ext cx="2331360" cy="1234080"/>
+            <a:ext cx="2331000" cy="1233720"/>
           </a:xfrm>
           <a:prstGeom prst="rect">
             <a:avLst/>
@@ -16579,14 +16618,14 @@
       </p:sp>
       <p:sp>
         <p:nvSpPr>
-          <p:cNvPr id="218" name="Text 23"/>
+          <p:cNvPr id="217" name="Text 23"/>
           <p:cNvSpPr/>
           <p:nvPr/>
         </p:nvSpPr>
         <p:spPr>
           <a:xfrm>
             <a:off x="539640" y="2875680"/>
-            <a:ext cx="2258280" cy="1151640"/>
+            <a:ext cx="2257920" cy="1151280"/>
           </a:xfrm>
           <a:prstGeom prst="rect">
             <a:avLst/>
@@ -16639,14 +16678,14 @@
       </p:sp>
       <p:sp>
         <p:nvSpPr>
-          <p:cNvPr id="219" name="Shape 24"/>
+          <p:cNvPr id="218" name="Shape 24"/>
           <p:cNvSpPr/>
           <p:nvPr/>
         </p:nvSpPr>
         <p:spPr>
           <a:xfrm>
             <a:off x="2834640" y="2834640"/>
-            <a:ext cx="2971440" cy="1234080"/>
+            <a:ext cx="2971080" cy="1233720"/>
           </a:xfrm>
           <a:prstGeom prst="rect">
             <a:avLst/>
@@ -16685,14 +16724,14 @@
       </p:sp>
       <p:sp>
         <p:nvSpPr>
-          <p:cNvPr id="220" name="Text 25"/>
+          <p:cNvPr id="219" name="Text 25"/>
           <p:cNvSpPr/>
           <p:nvPr/>
         </p:nvSpPr>
         <p:spPr>
           <a:xfrm>
             <a:off x="2871360" y="2875680"/>
-            <a:ext cx="2898360" cy="1151640"/>
+            <a:ext cx="2898000" cy="1151280"/>
           </a:xfrm>
           <a:prstGeom prst="rect">
             <a:avLst/>
@@ -16745,14 +16784,14 @@
       </p:sp>
       <p:sp>
         <p:nvSpPr>
-          <p:cNvPr id="221" name="Shape 26"/>
+          <p:cNvPr id="220" name="Shape 26"/>
           <p:cNvSpPr/>
           <p:nvPr/>
         </p:nvSpPr>
         <p:spPr>
           <a:xfrm>
             <a:off x="5806440" y="2834640"/>
-            <a:ext cx="2148480" cy="1234080"/>
+            <a:ext cx="2148120" cy="1233720"/>
           </a:xfrm>
           <a:prstGeom prst="rect">
             <a:avLst/>
@@ -16791,14 +16830,14 @@
       </p:sp>
       <p:sp>
         <p:nvSpPr>
-          <p:cNvPr id="222" name="Text 27"/>
+          <p:cNvPr id="221" name="Text 27"/>
           <p:cNvSpPr/>
           <p:nvPr/>
         </p:nvSpPr>
         <p:spPr>
           <a:xfrm>
             <a:off x="5843160" y="2875680"/>
-            <a:ext cx="2075400" cy="1151640"/>
+            <a:ext cx="2075040" cy="1151280"/>
           </a:xfrm>
           <a:prstGeom prst="rect">
             <a:avLst/>
@@ -16851,14 +16890,14 @@
       </p:sp>
       <p:sp>
         <p:nvSpPr>
-          <p:cNvPr id="223" name="Shape 28"/>
+          <p:cNvPr id="222" name="Shape 28"/>
           <p:cNvSpPr/>
           <p:nvPr/>
         </p:nvSpPr>
         <p:spPr>
           <a:xfrm>
             <a:off x="7955280" y="2834640"/>
-            <a:ext cx="3721320" cy="1234080"/>
+            <a:ext cx="3720960" cy="1233720"/>
           </a:xfrm>
           <a:prstGeom prst="rect">
             <a:avLst/>
@@ -16897,14 +16936,14 @@
       </p:sp>
       <p:sp>
         <p:nvSpPr>
-          <p:cNvPr id="224" name="Text 29"/>
+          <p:cNvPr id="223" name="Text 29"/>
           <p:cNvSpPr/>
           <p:nvPr/>
         </p:nvSpPr>
         <p:spPr>
           <a:xfrm>
             <a:off x="7992000" y="2875680"/>
-            <a:ext cx="3648240" cy="1151640"/>
+            <a:ext cx="3647880" cy="1151280"/>
           </a:xfrm>
           <a:prstGeom prst="rect">
             <a:avLst/>
@@ -16942,128 +16981,7 @@
                 <a:uFillTx/>
                 <a:latin typeface="Aptos"/>
               </a:rPr>
-              <a:t>Combin</a:t>
-            </a:r>
-            <a:r>
-              <a:rPr lang="en-US" sz="800" b="0" u="none" strike="noStrike">
-                <a:solidFill>
-                  <a:srgbClr val="F8FAFC"/>
-                </a:solidFill>
-                <a:effectLst/>
-                <a:uFillTx/>
-                <a:latin typeface="Aptos"/>
-              </a:rPr>
-              <a:t>e DP </a:t>
-            </a:r>
-            <a:r>
-              <a:rPr lang="en-US" sz="800" b="0" u="none" strike="noStrike">
-                <a:solidFill>
-                  <a:srgbClr val="F8FAFC"/>
-                </a:solidFill>
-                <a:effectLst/>
-                <a:uFillTx/>
-                <a:latin typeface="Aptos"/>
-              </a:rPr>
-              <a:t>noise </a:t>
-            </a:r>
-            <a:r>
-              <a:rPr lang="en-US" sz="800" b="0" u="none" strike="noStrike">
-                <a:solidFill>
-                  <a:srgbClr val="F8FAFC"/>
-                </a:solidFill>
-                <a:effectLst/>
-                <a:uFillTx/>
-                <a:latin typeface="Aptos"/>
-              </a:rPr>
-              <a:t>with </a:t>
-            </a:r>
-            <a:r>
-              <a:rPr lang="en-US" sz="800" b="0" u="none" strike="noStrike">
-                <a:solidFill>
-                  <a:srgbClr val="F8FAFC"/>
-                </a:solidFill>
-                <a:effectLst/>
-                <a:uFillTx/>
-                <a:latin typeface="Aptos"/>
-              </a:rPr>
-              <a:t>suspici</a:t>
-            </a:r>
-            <a:r>
-              <a:rPr lang="en-US" sz="800" b="0" u="none" strike="noStrike">
-                <a:solidFill>
-                  <a:srgbClr val="F8FAFC"/>
-                </a:solidFill>
-                <a:effectLst/>
-                <a:uFillTx/>
-                <a:latin typeface="Aptos"/>
-              </a:rPr>
-              <a:t>ous-</a:t>
-            </a:r>
-            <a:r>
-              <a:rPr lang="en-US" sz="800" b="0" u="none" strike="noStrike">
-                <a:solidFill>
-                  <a:srgbClr val="F8FAFC"/>
-                </a:solidFill>
-                <a:effectLst/>
-                <a:uFillTx/>
-                <a:latin typeface="Aptos"/>
-              </a:rPr>
-              <a:t>update </a:t>
-            </a:r>
-            <a:r>
-              <a:rPr lang="en-US" sz="800" b="0" u="none" strike="noStrike">
-                <a:solidFill>
-                  <a:srgbClr val="F8FAFC"/>
-                </a:solidFill>
-                <a:effectLst/>
-                <a:uFillTx/>
-                <a:latin typeface="Aptos"/>
-              </a:rPr>
-              <a:t>validati</a:t>
-            </a:r>
-            <a:r>
-              <a:rPr lang="en-US" sz="800" b="0" u="none" strike="noStrike">
-                <a:solidFill>
-                  <a:srgbClr val="F8FAFC"/>
-                </a:solidFill>
-                <a:effectLst/>
-                <a:uFillTx/>
-                <a:latin typeface="Aptos"/>
-              </a:rPr>
-              <a:t>on </a:t>
-            </a:r>
-            <a:r>
-              <a:rPr lang="en-US" sz="800" b="0" u="none" strike="noStrike">
-                <a:solidFill>
-                  <a:srgbClr val="F8FAFC"/>
-                </a:solidFill>
-                <a:effectLst/>
-                <a:uFillTx/>
-                <a:latin typeface="Aptos"/>
-              </a:rPr>
-              <a:t>before </a:t>
-            </a:r>
-            <a:r>
-              <a:rPr lang="en-US" sz="800" b="0" u="none" strike="noStrike">
-                <a:solidFill>
-                  <a:srgbClr val="F8FAFC"/>
-                </a:solidFill>
-                <a:effectLst/>
-                <a:uFillTx/>
-                <a:latin typeface="Aptos"/>
-              </a:rPr>
-              <a:t>aggreg</a:t>
-            </a:r>
-            <a:r>
-              <a:rPr lang="en-US" sz="800" b="0" u="none" strike="noStrike">
-                <a:solidFill>
-                  <a:srgbClr val="F8FAFC"/>
-                </a:solidFill>
-                <a:effectLst/>
-                <a:uFillTx/>
-                <a:latin typeface="Aptos"/>
-              </a:rPr>
-              <a:t>ation</a:t>
+              <a:t>Combine DP noise with suspicious-update validation before aggregation</a:t>
             </a:r>
             <a:endParaRPr lang="en-US" sz="800" b="0" u="none" strike="noStrike">
               <a:solidFill>
@@ -17078,14 +16996,14 @@
       </p:sp>
       <p:sp>
         <p:nvSpPr>
-          <p:cNvPr id="225" name="Shape 30"/>
+          <p:cNvPr id="224" name="Shape 30"/>
           <p:cNvSpPr/>
           <p:nvPr/>
         </p:nvSpPr>
         <p:spPr>
           <a:xfrm>
             <a:off x="502920" y="4069080"/>
-            <a:ext cx="2331360" cy="1234080"/>
+            <a:ext cx="2331000" cy="1233720"/>
           </a:xfrm>
           <a:prstGeom prst="rect">
             <a:avLst/>
@@ -17124,14 +17042,14 @@
       </p:sp>
       <p:sp>
         <p:nvSpPr>
-          <p:cNvPr id="226" name="Text 31"/>
+          <p:cNvPr id="225" name="Text 31"/>
           <p:cNvSpPr/>
           <p:nvPr/>
         </p:nvSpPr>
         <p:spPr>
           <a:xfrm>
             <a:off x="539640" y="4110120"/>
-            <a:ext cx="2258280" cy="1151640"/>
+            <a:ext cx="2257920" cy="1151280"/>
           </a:xfrm>
           <a:prstGeom prst="rect">
             <a:avLst/>
@@ -17184,14 +17102,14 @@
       </p:sp>
       <p:sp>
         <p:nvSpPr>
-          <p:cNvPr id="227" name="Shape 32"/>
+          <p:cNvPr id="226" name="Shape 32"/>
           <p:cNvSpPr/>
           <p:nvPr/>
         </p:nvSpPr>
         <p:spPr>
           <a:xfrm>
             <a:off x="2834640" y="4069080"/>
-            <a:ext cx="2971440" cy="1234080"/>
+            <a:ext cx="2971080" cy="1233720"/>
           </a:xfrm>
           <a:prstGeom prst="rect">
             <a:avLst/>
@@ -17230,14 +17148,14 @@
       </p:sp>
       <p:sp>
         <p:nvSpPr>
-          <p:cNvPr id="228" name="Text 33"/>
+          <p:cNvPr id="227" name="Text 33"/>
           <p:cNvSpPr/>
           <p:nvPr/>
         </p:nvSpPr>
         <p:spPr>
           <a:xfrm>
             <a:off x="2871360" y="4110120"/>
-            <a:ext cx="2898360" cy="1151640"/>
+            <a:ext cx="2898000" cy="1151280"/>
           </a:xfrm>
           <a:prstGeom prst="rect">
             <a:avLst/>
@@ -17290,14 +17208,14 @@
       </p:sp>
       <p:sp>
         <p:nvSpPr>
-          <p:cNvPr id="229" name="Shape 34"/>
+          <p:cNvPr id="228" name="Shape 34"/>
           <p:cNvSpPr/>
           <p:nvPr/>
         </p:nvSpPr>
         <p:spPr>
           <a:xfrm>
             <a:off x="5806440" y="4069080"/>
-            <a:ext cx="2148480" cy="1234080"/>
+            <a:ext cx="2148120" cy="1233720"/>
           </a:xfrm>
           <a:prstGeom prst="rect">
             <a:avLst/>
@@ -17336,14 +17254,14 @@
       </p:sp>
       <p:sp>
         <p:nvSpPr>
-          <p:cNvPr id="230" name="Text 35"/>
+          <p:cNvPr id="229" name="Text 35"/>
           <p:cNvSpPr/>
           <p:nvPr/>
         </p:nvSpPr>
         <p:spPr>
           <a:xfrm>
             <a:off x="5843160" y="4110120"/>
-            <a:ext cx="2075400" cy="1151640"/>
+            <a:ext cx="2075040" cy="1151280"/>
           </a:xfrm>
           <a:prstGeom prst="rect">
             <a:avLst/>
@@ -17396,14 +17314,14 @@
       </p:sp>
       <p:sp>
         <p:nvSpPr>
-          <p:cNvPr id="231" name="Shape 36"/>
+          <p:cNvPr id="230" name="Shape 36"/>
           <p:cNvSpPr/>
           <p:nvPr/>
         </p:nvSpPr>
         <p:spPr>
           <a:xfrm>
             <a:off x="7955280" y="4069080"/>
-            <a:ext cx="3721320" cy="1234080"/>
+            <a:ext cx="3720960" cy="1233720"/>
           </a:xfrm>
           <a:prstGeom prst="rect">
             <a:avLst/>
@@ -17442,14 +17360,14 @@
       </p:sp>
       <p:sp>
         <p:nvSpPr>
-          <p:cNvPr id="232" name="Text 37"/>
+          <p:cNvPr id="231" name="Text 37"/>
           <p:cNvSpPr/>
           <p:nvPr/>
         </p:nvSpPr>
         <p:spPr>
           <a:xfrm>
             <a:off x="7992000" y="4110120"/>
-            <a:ext cx="3648240" cy="1151640"/>
+            <a:ext cx="3647880" cy="1151280"/>
           </a:xfrm>
           <a:prstGeom prst="rect">
             <a:avLst/>
@@ -17539,14 +17457,14 @@
       </p:grpSpPr>
       <p:sp>
         <p:nvSpPr>
-          <p:cNvPr id="233" name="Shape 0"/>
+          <p:cNvPr id="232" name="Shape 0"/>
           <p:cNvSpPr/>
           <p:nvPr/>
         </p:nvSpPr>
         <p:spPr>
           <a:xfrm>
             <a:off x="0" y="0"/>
-            <a:ext cx="12191400" cy="6857640"/>
+            <a:ext cx="12191040" cy="6857280"/>
           </a:xfrm>
           <a:prstGeom prst="rect">
             <a:avLst/>
@@ -17585,14 +17503,14 @@
       </p:sp>
       <p:sp>
         <p:nvSpPr>
-          <p:cNvPr id="234" name="Shape 1"/>
+          <p:cNvPr id="233" name="Shape 1"/>
           <p:cNvSpPr/>
           <p:nvPr/>
         </p:nvSpPr>
         <p:spPr>
           <a:xfrm>
             <a:off x="0" y="6364080"/>
-            <a:ext cx="12191400" cy="493560"/>
+            <a:ext cx="12191040" cy="493200"/>
           </a:xfrm>
           <a:prstGeom prst="rect">
             <a:avLst/>
@@ -17631,14 +17549,14 @@
       </p:sp>
       <p:sp>
         <p:nvSpPr>
-          <p:cNvPr id="235" name="Text 2"/>
+          <p:cNvPr id="234" name="Text 2"/>
           <p:cNvSpPr/>
           <p:nvPr/>
         </p:nvSpPr>
         <p:spPr>
           <a:xfrm>
             <a:off x="365760" y="6446520"/>
-            <a:ext cx="11475360" cy="200880"/>
+            <a:ext cx="11475000" cy="200520"/>
           </a:xfrm>
           <a:prstGeom prst="rect">
             <a:avLst/>
@@ -17692,14 +17610,14 @@
       </p:sp>
       <p:sp>
         <p:nvSpPr>
-          <p:cNvPr id="236" name="Text 3"/>
+          <p:cNvPr id="235" name="Text 3"/>
           <p:cNvSpPr/>
           <p:nvPr/>
         </p:nvSpPr>
         <p:spPr>
           <a:xfrm>
             <a:off x="502920" y="329040"/>
-            <a:ext cx="9966600" cy="411120"/>
+            <a:ext cx="9966240" cy="410760"/>
           </a:xfrm>
           <a:prstGeom prst="rect">
             <a:avLst/>
@@ -17753,14 +17671,14 @@
       </p:sp>
       <p:sp>
         <p:nvSpPr>
-          <p:cNvPr id="237" name="Shape 4"/>
+          <p:cNvPr id="236" name="Shape 4"/>
           <p:cNvSpPr/>
           <p:nvPr/>
         </p:nvSpPr>
         <p:spPr>
           <a:xfrm>
             <a:off x="502920" y="831960"/>
-            <a:ext cx="1325520" cy="36360"/>
+            <a:ext cx="1325160" cy="36000"/>
           </a:xfrm>
           <a:prstGeom prst="rect">
             <a:avLst/>
@@ -17799,14 +17717,14 @@
       </p:sp>
       <p:sp>
         <p:nvSpPr>
-          <p:cNvPr id="238" name="Text 5"/>
+          <p:cNvPr id="237" name="Text 5"/>
           <p:cNvSpPr/>
           <p:nvPr/>
         </p:nvSpPr>
         <p:spPr>
           <a:xfrm>
             <a:off x="1938600" y="768240"/>
-            <a:ext cx="7131960" cy="200880"/>
+            <a:ext cx="7131600" cy="200520"/>
           </a:xfrm>
           <a:prstGeom prst="rect">
             <a:avLst/>
@@ -17859,14 +17777,14 @@
       </p:sp>
       <p:sp>
         <p:nvSpPr>
-          <p:cNvPr id="239" name="Shape 6"/>
+          <p:cNvPr id="238" name="Shape 6"/>
           <p:cNvSpPr/>
           <p:nvPr/>
         </p:nvSpPr>
         <p:spPr>
           <a:xfrm>
             <a:off x="502920" y="1207080"/>
-            <a:ext cx="2422800" cy="392760"/>
+            <a:ext cx="2422440" cy="392400"/>
           </a:xfrm>
           <a:prstGeom prst="rect">
             <a:avLst/>
@@ -17905,14 +17823,14 @@
       </p:sp>
       <p:sp>
         <p:nvSpPr>
-          <p:cNvPr id="240" name="Text 7"/>
+          <p:cNvPr id="239" name="Text 7"/>
           <p:cNvSpPr/>
           <p:nvPr/>
         </p:nvSpPr>
         <p:spPr>
           <a:xfrm>
             <a:off x="539640" y="1248120"/>
-            <a:ext cx="2349720" cy="310680"/>
+            <a:ext cx="2349360" cy="310320"/>
           </a:xfrm>
           <a:prstGeom prst="rect">
             <a:avLst/>
@@ -17965,14 +17883,14 @@
       </p:sp>
       <p:sp>
         <p:nvSpPr>
-          <p:cNvPr id="241" name="Shape 8"/>
+          <p:cNvPr id="240" name="Shape 8"/>
           <p:cNvSpPr/>
           <p:nvPr/>
         </p:nvSpPr>
         <p:spPr>
           <a:xfrm>
             <a:off x="2926080" y="1207080"/>
-            <a:ext cx="2788560" cy="392760"/>
+            <a:ext cx="2788200" cy="392400"/>
           </a:xfrm>
           <a:prstGeom prst="rect">
             <a:avLst/>
@@ -18011,14 +17929,14 @@
       </p:sp>
       <p:sp>
         <p:nvSpPr>
-          <p:cNvPr id="242" name="Text 9"/>
+          <p:cNvPr id="241" name="Text 9"/>
           <p:cNvSpPr/>
           <p:nvPr/>
         </p:nvSpPr>
         <p:spPr>
           <a:xfrm>
             <a:off x="2962800" y="1248120"/>
-            <a:ext cx="2715480" cy="310680"/>
+            <a:ext cx="2715120" cy="310320"/>
           </a:xfrm>
           <a:prstGeom prst="rect">
             <a:avLst/>
@@ -18071,14 +17989,14 @@
       </p:sp>
       <p:sp>
         <p:nvSpPr>
-          <p:cNvPr id="243" name="Shape 10"/>
+          <p:cNvPr id="242" name="Shape 10"/>
           <p:cNvSpPr/>
           <p:nvPr/>
         </p:nvSpPr>
         <p:spPr>
           <a:xfrm>
             <a:off x="5715000" y="1207080"/>
-            <a:ext cx="2285640" cy="392760"/>
+            <a:ext cx="2285280" cy="392400"/>
           </a:xfrm>
           <a:prstGeom prst="rect">
             <a:avLst/>
@@ -18117,14 +18035,14 @@
       </p:sp>
       <p:sp>
         <p:nvSpPr>
-          <p:cNvPr id="244" name="Text 11"/>
+          <p:cNvPr id="243" name="Text 11"/>
           <p:cNvSpPr/>
           <p:nvPr/>
         </p:nvSpPr>
         <p:spPr>
           <a:xfrm>
             <a:off x="5751720" y="1248120"/>
-            <a:ext cx="2212560" cy="310680"/>
+            <a:ext cx="2212200" cy="310320"/>
           </a:xfrm>
           <a:prstGeom prst="rect">
             <a:avLst/>
@@ -18177,14 +18095,14 @@
       </p:sp>
       <p:sp>
         <p:nvSpPr>
-          <p:cNvPr id="245" name="Shape 12"/>
+          <p:cNvPr id="244" name="Shape 12"/>
           <p:cNvSpPr/>
           <p:nvPr/>
         </p:nvSpPr>
         <p:spPr>
           <a:xfrm>
             <a:off x="8001000" y="1207080"/>
-            <a:ext cx="3675600" cy="392760"/>
+            <a:ext cx="3675240" cy="392400"/>
           </a:xfrm>
           <a:prstGeom prst="rect">
             <a:avLst/>
@@ -18223,14 +18141,14 @@
       </p:sp>
       <p:sp>
         <p:nvSpPr>
-          <p:cNvPr id="246" name="Text 13"/>
+          <p:cNvPr id="245" name="Text 13"/>
           <p:cNvSpPr/>
           <p:nvPr/>
         </p:nvSpPr>
         <p:spPr>
           <a:xfrm>
             <a:off x="8037720" y="1248120"/>
-            <a:ext cx="3602520" cy="310680"/>
+            <a:ext cx="3602160" cy="310320"/>
           </a:xfrm>
           <a:prstGeom prst="rect">
             <a:avLst/>
@@ -18283,14 +18201,14 @@
       </p:sp>
       <p:sp>
         <p:nvSpPr>
-          <p:cNvPr id="247" name="Shape 14"/>
+          <p:cNvPr id="246" name="Shape 14"/>
           <p:cNvSpPr/>
           <p:nvPr/>
         </p:nvSpPr>
         <p:spPr>
           <a:xfrm>
             <a:off x="502920" y="1600200"/>
-            <a:ext cx="2422800" cy="1234080"/>
+            <a:ext cx="2422440" cy="1233720"/>
           </a:xfrm>
           <a:prstGeom prst="rect">
             <a:avLst/>
@@ -18329,14 +18247,14 @@
       </p:sp>
       <p:sp>
         <p:nvSpPr>
-          <p:cNvPr id="248" name="Text 15"/>
+          <p:cNvPr id="247" name="Text 15"/>
           <p:cNvSpPr/>
           <p:nvPr/>
         </p:nvSpPr>
         <p:spPr>
           <a:xfrm>
             <a:off x="539640" y="1641240"/>
-            <a:ext cx="2349720" cy="1151640"/>
+            <a:ext cx="2349360" cy="1151280"/>
           </a:xfrm>
           <a:prstGeom prst="rect">
             <a:avLst/>
@@ -18389,14 +18307,14 @@
       </p:sp>
       <p:sp>
         <p:nvSpPr>
-          <p:cNvPr id="249" name="Shape 16"/>
+          <p:cNvPr id="248" name="Shape 16"/>
           <p:cNvSpPr/>
           <p:nvPr/>
         </p:nvSpPr>
         <p:spPr>
           <a:xfrm>
             <a:off x="2926080" y="1600200"/>
-            <a:ext cx="2788560" cy="1234080"/>
+            <a:ext cx="2788200" cy="1233720"/>
           </a:xfrm>
           <a:prstGeom prst="rect">
             <a:avLst/>
@@ -18435,14 +18353,14 @@
       </p:sp>
       <p:sp>
         <p:nvSpPr>
-          <p:cNvPr id="250" name="Text 17"/>
+          <p:cNvPr id="249" name="Text 17"/>
           <p:cNvSpPr/>
           <p:nvPr/>
         </p:nvSpPr>
         <p:spPr>
           <a:xfrm>
             <a:off x="2962800" y="1641240"/>
-            <a:ext cx="2715480" cy="1151640"/>
+            <a:ext cx="2715120" cy="1151280"/>
           </a:xfrm>
           <a:prstGeom prst="rect">
             <a:avLst/>
@@ -18495,14 +18413,14 @@
       </p:sp>
       <p:sp>
         <p:nvSpPr>
-          <p:cNvPr id="251" name="Shape 18"/>
+          <p:cNvPr id="250" name="Shape 18"/>
           <p:cNvSpPr/>
           <p:nvPr/>
         </p:nvSpPr>
         <p:spPr>
           <a:xfrm>
             <a:off x="5715000" y="1600200"/>
-            <a:ext cx="2285640" cy="1234080"/>
+            <a:ext cx="2285280" cy="1233720"/>
           </a:xfrm>
           <a:prstGeom prst="rect">
             <a:avLst/>
@@ -18541,14 +18459,14 @@
       </p:sp>
       <p:sp>
         <p:nvSpPr>
-          <p:cNvPr id="252" name="Text 19"/>
+          <p:cNvPr id="251" name="Text 19"/>
           <p:cNvSpPr/>
           <p:nvPr/>
         </p:nvSpPr>
         <p:spPr>
           <a:xfrm>
             <a:off x="5751720" y="1641240"/>
-            <a:ext cx="2212560" cy="1151640"/>
+            <a:ext cx="2212200" cy="1151280"/>
           </a:xfrm>
           <a:prstGeom prst="rect">
             <a:avLst/>
@@ -18601,14 +18519,14 @@
       </p:sp>
       <p:sp>
         <p:nvSpPr>
-          <p:cNvPr id="253" name="Shape 20"/>
+          <p:cNvPr id="252" name="Shape 20"/>
           <p:cNvSpPr/>
           <p:nvPr/>
         </p:nvSpPr>
         <p:spPr>
           <a:xfrm>
             <a:off x="8001000" y="1600200"/>
-            <a:ext cx="3675600" cy="1234080"/>
+            <a:ext cx="3675240" cy="1233720"/>
           </a:xfrm>
           <a:prstGeom prst="rect">
             <a:avLst/>
@@ -18647,14 +18565,14 @@
       </p:sp>
       <p:sp>
         <p:nvSpPr>
-          <p:cNvPr id="254" name="Text 21"/>
+          <p:cNvPr id="253" name="Text 21"/>
           <p:cNvSpPr/>
           <p:nvPr/>
         </p:nvSpPr>
         <p:spPr>
           <a:xfrm>
             <a:off x="8037720" y="1641240"/>
-            <a:ext cx="3602520" cy="1151640"/>
+            <a:ext cx="3602160" cy="1151280"/>
           </a:xfrm>
           <a:prstGeom prst="rect">
             <a:avLst/>
@@ -18707,14 +18625,14 @@
       </p:sp>
       <p:sp>
         <p:nvSpPr>
-          <p:cNvPr id="255" name="Shape 22"/>
+          <p:cNvPr id="254" name="Shape 22"/>
           <p:cNvSpPr/>
           <p:nvPr/>
         </p:nvSpPr>
         <p:spPr>
           <a:xfrm>
             <a:off x="502920" y="2834640"/>
-            <a:ext cx="2422800" cy="1234080"/>
+            <a:ext cx="2422440" cy="1233720"/>
           </a:xfrm>
           <a:prstGeom prst="rect">
             <a:avLst/>
@@ -18753,14 +18671,14 @@
       </p:sp>
       <p:sp>
         <p:nvSpPr>
-          <p:cNvPr id="256" name="Text 23"/>
+          <p:cNvPr id="255" name="Text 23"/>
           <p:cNvSpPr/>
           <p:nvPr/>
         </p:nvSpPr>
         <p:spPr>
           <a:xfrm>
             <a:off x="539640" y="2875680"/>
-            <a:ext cx="2349720" cy="1151640"/>
+            <a:ext cx="2349360" cy="1151280"/>
           </a:xfrm>
           <a:prstGeom prst="rect">
             <a:avLst/>
@@ -18813,14 +18731,14 @@
       </p:sp>
       <p:sp>
         <p:nvSpPr>
-          <p:cNvPr id="257" name="Shape 24"/>
+          <p:cNvPr id="256" name="Shape 24"/>
           <p:cNvSpPr/>
           <p:nvPr/>
         </p:nvSpPr>
         <p:spPr>
           <a:xfrm>
             <a:off x="2926080" y="2834640"/>
-            <a:ext cx="2788560" cy="1234080"/>
+            <a:ext cx="2788200" cy="1233720"/>
           </a:xfrm>
           <a:prstGeom prst="rect">
             <a:avLst/>
@@ -18859,14 +18777,14 @@
       </p:sp>
       <p:sp>
         <p:nvSpPr>
-          <p:cNvPr id="258" name="Text 25"/>
+          <p:cNvPr id="257" name="Text 25"/>
           <p:cNvSpPr/>
           <p:nvPr/>
         </p:nvSpPr>
         <p:spPr>
           <a:xfrm>
             <a:off x="2962800" y="2875680"/>
-            <a:ext cx="2715480" cy="1151640"/>
+            <a:ext cx="2715120" cy="1151280"/>
           </a:xfrm>
           <a:prstGeom prst="rect">
             <a:avLst/>
@@ -18904,18 +18822,7 @@
                 <a:uFillTx/>
                 <a:latin typeface="Aptos"/>
               </a:rPr>
-              <a:t>Limited integration of free-rider </a:t>
-            </a:r>
-            <a:r>
-              <a:rPr lang="en-US" sz="800" b="0" u="none" strike="noStrike">
-                <a:solidFill>
-                  <a:srgbClr val="F8FAFC"/>
-                </a:solidFill>
-                <a:effectLst/>
-                <a:uFillTx/>
-                <a:latin typeface="Aptos"/>
-              </a:rPr>
-              <a:t>validation into IoT IDS workflow</a:t>
+              <a:t>Limited integration of free-rider validation into IoT IDS workflow</a:t>
             </a:r>
             <a:endParaRPr lang="en-US" sz="800" b="0" u="none" strike="noStrike">
               <a:solidFill>
@@ -18930,14 +18837,14 @@
       </p:sp>
       <p:sp>
         <p:nvSpPr>
-          <p:cNvPr id="259" name="Shape 26"/>
+          <p:cNvPr id="258" name="Shape 26"/>
           <p:cNvSpPr/>
           <p:nvPr/>
         </p:nvSpPr>
         <p:spPr>
           <a:xfrm>
             <a:off x="5715000" y="2834640"/>
-            <a:ext cx="2285640" cy="1234080"/>
+            <a:ext cx="2285280" cy="1233720"/>
           </a:xfrm>
           <a:prstGeom prst="rect">
             <a:avLst/>
@@ -18976,14 +18883,14 @@
       </p:sp>
       <p:sp>
         <p:nvSpPr>
-          <p:cNvPr id="260" name="Text 27"/>
+          <p:cNvPr id="259" name="Text 27"/>
           <p:cNvSpPr/>
           <p:nvPr/>
         </p:nvSpPr>
         <p:spPr>
           <a:xfrm>
             <a:off x="5751720" y="2875680"/>
-            <a:ext cx="2212560" cy="1151640"/>
+            <a:ext cx="2212200" cy="1151280"/>
           </a:xfrm>
           <a:prstGeom prst="rect">
             <a:avLst/>
@@ -19036,14 +18943,14 @@
       </p:sp>
       <p:sp>
         <p:nvSpPr>
-          <p:cNvPr id="261" name="Shape 28"/>
+          <p:cNvPr id="260" name="Shape 28"/>
           <p:cNvSpPr/>
           <p:nvPr/>
         </p:nvSpPr>
         <p:spPr>
           <a:xfrm>
             <a:off x="8001000" y="2834640"/>
-            <a:ext cx="3675600" cy="1234080"/>
+            <a:ext cx="3675240" cy="1233720"/>
           </a:xfrm>
           <a:prstGeom prst="rect">
             <a:avLst/>
@@ -19082,14 +18989,14 @@
       </p:sp>
       <p:sp>
         <p:nvSpPr>
-          <p:cNvPr id="262" name="Text 29"/>
+          <p:cNvPr id="261" name="Text 29"/>
           <p:cNvSpPr/>
           <p:nvPr/>
         </p:nvSpPr>
         <p:spPr>
           <a:xfrm>
             <a:off x="8037720" y="2875680"/>
-            <a:ext cx="3602520" cy="1151640"/>
+            <a:ext cx="3602160" cy="1151280"/>
           </a:xfrm>
           <a:prstGeom prst="rect">
             <a:avLst/>
@@ -19142,14 +19049,14 @@
       </p:sp>
       <p:sp>
         <p:nvSpPr>
-          <p:cNvPr id="263" name="Shape 30"/>
+          <p:cNvPr id="262" name="Shape 30"/>
           <p:cNvSpPr/>
           <p:nvPr/>
         </p:nvSpPr>
         <p:spPr>
           <a:xfrm>
             <a:off x="502920" y="4069080"/>
-            <a:ext cx="2422800" cy="1234080"/>
+            <a:ext cx="2422440" cy="1233720"/>
           </a:xfrm>
           <a:prstGeom prst="rect">
             <a:avLst/>
@@ -19188,14 +19095,14 @@
       </p:sp>
       <p:sp>
         <p:nvSpPr>
-          <p:cNvPr id="264" name="Text 31"/>
+          <p:cNvPr id="263" name="Text 31"/>
           <p:cNvSpPr/>
           <p:nvPr/>
         </p:nvSpPr>
         <p:spPr>
           <a:xfrm>
             <a:off x="539640" y="4110120"/>
-            <a:ext cx="2349720" cy="1151640"/>
+            <a:ext cx="2349360" cy="1151280"/>
           </a:xfrm>
           <a:prstGeom prst="rect">
             <a:avLst/>
@@ -19248,14 +19155,14 @@
       </p:sp>
       <p:sp>
         <p:nvSpPr>
-          <p:cNvPr id="265" name="Shape 32"/>
+          <p:cNvPr id="264" name="Shape 32"/>
           <p:cNvSpPr/>
           <p:nvPr/>
         </p:nvSpPr>
         <p:spPr>
           <a:xfrm>
             <a:off x="2926080" y="4069080"/>
-            <a:ext cx="2788560" cy="1234080"/>
+            <a:ext cx="2788200" cy="1233720"/>
           </a:xfrm>
           <a:prstGeom prst="rect">
             <a:avLst/>
@@ -19294,14 +19201,14 @@
       </p:sp>
       <p:sp>
         <p:nvSpPr>
-          <p:cNvPr id="266" name="Text 33"/>
+          <p:cNvPr id="265" name="Text 33"/>
           <p:cNvSpPr/>
           <p:nvPr/>
         </p:nvSpPr>
         <p:spPr>
           <a:xfrm>
             <a:off x="2962800" y="4110120"/>
-            <a:ext cx="2715480" cy="1151640"/>
+            <a:ext cx="2715120" cy="1151280"/>
           </a:xfrm>
           <a:prstGeom prst="rect">
             <a:avLst/>
@@ -19354,14 +19261,14 @@
       </p:sp>
       <p:sp>
         <p:nvSpPr>
-          <p:cNvPr id="267" name="Shape 34"/>
+          <p:cNvPr id="266" name="Shape 34"/>
           <p:cNvSpPr/>
           <p:nvPr/>
         </p:nvSpPr>
         <p:spPr>
           <a:xfrm>
             <a:off x="5715000" y="4069080"/>
-            <a:ext cx="2285640" cy="1234080"/>
+            <a:ext cx="2285280" cy="1233720"/>
           </a:xfrm>
           <a:prstGeom prst="rect">
             <a:avLst/>
@@ -19400,14 +19307,14 @@
       </p:sp>
       <p:sp>
         <p:nvSpPr>
-          <p:cNvPr id="268" name="Text 35"/>
+          <p:cNvPr id="267" name="Text 35"/>
           <p:cNvSpPr/>
           <p:nvPr/>
         </p:nvSpPr>
         <p:spPr>
           <a:xfrm>
             <a:off x="5751720" y="4110120"/>
-            <a:ext cx="2212560" cy="1151640"/>
+            <a:ext cx="2212200" cy="1151280"/>
           </a:xfrm>
           <a:prstGeom prst="rect">
             <a:avLst/>
@@ -19460,14 +19367,14 @@
       </p:sp>
       <p:sp>
         <p:nvSpPr>
-          <p:cNvPr id="269" name="Shape 36"/>
+          <p:cNvPr id="268" name="Shape 36"/>
           <p:cNvSpPr/>
           <p:nvPr/>
         </p:nvSpPr>
         <p:spPr>
           <a:xfrm>
             <a:off x="8001000" y="4069080"/>
-            <a:ext cx="3675600" cy="1234080"/>
+            <a:ext cx="3675240" cy="1233720"/>
           </a:xfrm>
           <a:prstGeom prst="rect">
             <a:avLst/>
@@ -19506,14 +19413,14 @@
       </p:sp>
       <p:sp>
         <p:nvSpPr>
-          <p:cNvPr id="270" name="Text 37"/>
+          <p:cNvPr id="269" name="Text 37"/>
           <p:cNvSpPr/>
           <p:nvPr/>
         </p:nvSpPr>
         <p:spPr>
           <a:xfrm>
             <a:off x="8037720" y="4110120"/>
-            <a:ext cx="3602520" cy="1151640"/>
+            <a:ext cx="3602160" cy="1151280"/>
           </a:xfrm>
           <a:prstGeom prst="rect">
             <a:avLst/>
@@ -19603,14 +19510,14 @@
       </p:grpSpPr>
       <p:sp>
         <p:nvSpPr>
-          <p:cNvPr id="271" name="Shape 0"/>
+          <p:cNvPr id="270" name="Shape 0"/>
           <p:cNvSpPr/>
           <p:nvPr/>
         </p:nvSpPr>
         <p:spPr>
           <a:xfrm>
             <a:off x="0" y="0"/>
-            <a:ext cx="12191400" cy="6857640"/>
+            <a:ext cx="12191040" cy="6857280"/>
           </a:xfrm>
           <a:prstGeom prst="rect">
             <a:avLst/>
@@ -19649,14 +19556,14 @@
       </p:sp>
       <p:sp>
         <p:nvSpPr>
-          <p:cNvPr id="272" name="Shape 1"/>
+          <p:cNvPr id="271" name="Shape 1"/>
           <p:cNvSpPr/>
           <p:nvPr/>
         </p:nvSpPr>
         <p:spPr>
           <a:xfrm>
             <a:off x="0" y="6364080"/>
-            <a:ext cx="12191400" cy="493560"/>
+            <a:ext cx="12191040" cy="493200"/>
           </a:xfrm>
           <a:prstGeom prst="rect">
             <a:avLst/>
@@ -19695,14 +19602,14 @@
       </p:sp>
       <p:sp>
         <p:nvSpPr>
-          <p:cNvPr id="273" name="Text 2"/>
+          <p:cNvPr id="272" name="Text 2"/>
           <p:cNvSpPr/>
           <p:nvPr/>
         </p:nvSpPr>
         <p:spPr>
           <a:xfrm>
             <a:off x="365760" y="6446520"/>
-            <a:ext cx="11475360" cy="200880"/>
+            <a:ext cx="11475000" cy="200520"/>
           </a:xfrm>
           <a:prstGeom prst="rect">
             <a:avLst/>
@@ -19756,14 +19663,14 @@
       </p:sp>
       <p:sp>
         <p:nvSpPr>
-          <p:cNvPr id="274" name="Text 3"/>
+          <p:cNvPr id="273" name="Text 3"/>
           <p:cNvSpPr/>
           <p:nvPr/>
         </p:nvSpPr>
         <p:spPr>
           <a:xfrm>
             <a:off x="502920" y="329040"/>
-            <a:ext cx="9966600" cy="411120"/>
+            <a:ext cx="9966240" cy="410760"/>
           </a:xfrm>
           <a:prstGeom prst="rect">
             <a:avLst/>
@@ -19817,14 +19724,14 @@
       </p:sp>
       <p:sp>
         <p:nvSpPr>
-          <p:cNvPr id="275" name="Shape 4"/>
+          <p:cNvPr id="274" name="Shape 4"/>
           <p:cNvSpPr/>
           <p:nvPr/>
         </p:nvSpPr>
         <p:spPr>
           <a:xfrm>
             <a:off x="502920" y="831960"/>
-            <a:ext cx="1325520" cy="36360"/>
+            <a:ext cx="1325160" cy="36000"/>
           </a:xfrm>
           <a:prstGeom prst="rect">
             <a:avLst/>
@@ -19863,14 +19770,14 @@
       </p:sp>
       <p:sp>
         <p:nvSpPr>
-          <p:cNvPr id="276" name="Text 5"/>
+          <p:cNvPr id="275" name="Text 5"/>
           <p:cNvSpPr/>
           <p:nvPr/>
         </p:nvSpPr>
         <p:spPr>
           <a:xfrm>
             <a:off x="1938600" y="768240"/>
-            <a:ext cx="7131960" cy="200880"/>
+            <a:ext cx="7131600" cy="200520"/>
           </a:xfrm>
           <a:prstGeom prst="rect">
             <a:avLst/>
@@ -19923,14 +19830,14 @@
       </p:sp>
       <p:sp>
         <p:nvSpPr>
-          <p:cNvPr id="277" name="Shape 6"/>
+          <p:cNvPr id="276" name="Shape 6"/>
           <p:cNvSpPr/>
           <p:nvPr/>
         </p:nvSpPr>
         <p:spPr>
           <a:xfrm>
             <a:off x="713160" y="1234440"/>
-            <a:ext cx="3108600" cy="420120"/>
+            <a:ext cx="3108240" cy="419760"/>
           </a:xfrm>
           <a:prstGeom prst="rect">
             <a:avLst/>
@@ -19969,14 +19876,14 @@
       </p:sp>
       <p:sp>
         <p:nvSpPr>
-          <p:cNvPr id="278" name="Text 7"/>
+          <p:cNvPr id="277" name="Text 7"/>
           <p:cNvSpPr/>
           <p:nvPr/>
         </p:nvSpPr>
         <p:spPr>
           <a:xfrm>
             <a:off x="749880" y="1275480"/>
-            <a:ext cx="3035520" cy="338040"/>
+            <a:ext cx="3035160" cy="337680"/>
           </a:xfrm>
           <a:prstGeom prst="rect">
             <a:avLst/>
@@ -20029,14 +19936,14 @@
       </p:sp>
       <p:sp>
         <p:nvSpPr>
-          <p:cNvPr id="279" name="Shape 8"/>
+          <p:cNvPr id="278" name="Shape 8"/>
           <p:cNvSpPr/>
           <p:nvPr/>
         </p:nvSpPr>
         <p:spPr>
           <a:xfrm>
             <a:off x="3822120" y="1234440"/>
-            <a:ext cx="3931560" cy="420120"/>
+            <a:ext cx="3931200" cy="419760"/>
           </a:xfrm>
           <a:prstGeom prst="rect">
             <a:avLst/>
@@ -20075,14 +19982,14 @@
       </p:sp>
       <p:sp>
         <p:nvSpPr>
-          <p:cNvPr id="280" name="Text 9"/>
+          <p:cNvPr id="279" name="Text 9"/>
           <p:cNvSpPr/>
           <p:nvPr/>
         </p:nvSpPr>
         <p:spPr>
           <a:xfrm>
             <a:off x="3858840" y="1275480"/>
-            <a:ext cx="3858480" cy="338040"/>
+            <a:ext cx="3858120" cy="337680"/>
           </a:xfrm>
           <a:prstGeom prst="rect">
             <a:avLst/>
@@ -20135,14 +20042,14 @@
       </p:sp>
       <p:sp>
         <p:nvSpPr>
-          <p:cNvPr id="281" name="Shape 10"/>
+          <p:cNvPr id="280" name="Shape 10"/>
           <p:cNvSpPr/>
           <p:nvPr/>
         </p:nvSpPr>
         <p:spPr>
           <a:xfrm>
             <a:off x="7754040" y="1234440"/>
-            <a:ext cx="3702960" cy="420120"/>
+            <a:ext cx="3702600" cy="419760"/>
           </a:xfrm>
           <a:prstGeom prst="rect">
             <a:avLst/>
@@ -20181,14 +20088,14 @@
       </p:sp>
       <p:sp>
         <p:nvSpPr>
-          <p:cNvPr id="282" name="Text 11"/>
+          <p:cNvPr id="281" name="Text 11"/>
           <p:cNvSpPr/>
           <p:nvPr/>
         </p:nvSpPr>
         <p:spPr>
           <a:xfrm>
             <a:off x="7790760" y="1275480"/>
-            <a:ext cx="3629880" cy="338040"/>
+            <a:ext cx="3629520" cy="337680"/>
           </a:xfrm>
           <a:prstGeom prst="rect">
             <a:avLst/>
@@ -20241,14 +20148,14 @@
       </p:sp>
       <p:sp>
         <p:nvSpPr>
-          <p:cNvPr id="283" name="Shape 12"/>
+          <p:cNvPr id="282" name="Shape 12"/>
           <p:cNvSpPr/>
           <p:nvPr/>
         </p:nvSpPr>
         <p:spPr>
           <a:xfrm>
             <a:off x="713160" y="1654920"/>
-            <a:ext cx="3108600" cy="731160"/>
+            <a:ext cx="3108240" cy="730800"/>
           </a:xfrm>
           <a:prstGeom prst="rect">
             <a:avLst/>
@@ -20287,14 +20194,14 @@
       </p:sp>
       <p:sp>
         <p:nvSpPr>
-          <p:cNvPr id="284" name="Text 13"/>
+          <p:cNvPr id="283" name="Text 13"/>
           <p:cNvSpPr/>
           <p:nvPr/>
         </p:nvSpPr>
         <p:spPr>
           <a:xfrm>
             <a:off x="749880" y="1696320"/>
-            <a:ext cx="3035520" cy="648720"/>
+            <a:ext cx="3035160" cy="648360"/>
           </a:xfrm>
           <a:prstGeom prst="rect">
             <a:avLst/>
@@ -20347,14 +20254,14 @@
       </p:sp>
       <p:sp>
         <p:nvSpPr>
-          <p:cNvPr id="285" name="Shape 14"/>
+          <p:cNvPr id="284" name="Shape 14"/>
           <p:cNvSpPr/>
           <p:nvPr/>
         </p:nvSpPr>
         <p:spPr>
           <a:xfrm>
             <a:off x="3822120" y="1654920"/>
-            <a:ext cx="3931560" cy="731160"/>
+            <a:ext cx="3931200" cy="730800"/>
           </a:xfrm>
           <a:prstGeom prst="rect">
             <a:avLst/>
@@ -20393,14 +20300,14 @@
       </p:sp>
       <p:sp>
         <p:nvSpPr>
-          <p:cNvPr id="286" name="Text 15"/>
+          <p:cNvPr id="285" name="Text 15"/>
           <p:cNvSpPr/>
           <p:nvPr/>
         </p:nvSpPr>
         <p:spPr>
           <a:xfrm>
             <a:off x="3858840" y="1696320"/>
-            <a:ext cx="3858480" cy="648720"/>
+            <a:ext cx="3858120" cy="648360"/>
           </a:xfrm>
           <a:prstGeom prst="rect">
             <a:avLst/>
@@ -20453,14 +20360,14 @@
       </p:sp>
       <p:sp>
         <p:nvSpPr>
-          <p:cNvPr id="287" name="Shape 16"/>
+          <p:cNvPr id="286" name="Shape 16"/>
           <p:cNvSpPr/>
           <p:nvPr/>
         </p:nvSpPr>
         <p:spPr>
           <a:xfrm>
             <a:off x="7754040" y="1654920"/>
-            <a:ext cx="3702960" cy="731160"/>
+            <a:ext cx="3702600" cy="730800"/>
           </a:xfrm>
           <a:prstGeom prst="rect">
             <a:avLst/>
@@ -20499,14 +20406,14 @@
       </p:sp>
       <p:sp>
         <p:nvSpPr>
-          <p:cNvPr id="288" name="Text 17"/>
+          <p:cNvPr id="287" name="Text 17"/>
           <p:cNvSpPr/>
           <p:nvPr/>
         </p:nvSpPr>
         <p:spPr>
           <a:xfrm>
             <a:off x="7790760" y="1696320"/>
-            <a:ext cx="3629880" cy="648720"/>
+            <a:ext cx="3629520" cy="648360"/>
           </a:xfrm>
           <a:prstGeom prst="rect">
             <a:avLst/>
@@ -20559,14 +20466,14 @@
       </p:sp>
       <p:sp>
         <p:nvSpPr>
-          <p:cNvPr id="289" name="Shape 18"/>
+          <p:cNvPr id="288" name="Shape 18"/>
           <p:cNvSpPr/>
           <p:nvPr/>
         </p:nvSpPr>
         <p:spPr>
           <a:xfrm>
             <a:off x="713160" y="2386440"/>
-            <a:ext cx="3108600" cy="731160"/>
+            <a:ext cx="3108240" cy="730800"/>
           </a:xfrm>
           <a:prstGeom prst="rect">
             <a:avLst/>
@@ -20605,14 +20512,14 @@
       </p:sp>
       <p:sp>
         <p:nvSpPr>
-          <p:cNvPr id="290" name="Text 19"/>
+          <p:cNvPr id="289" name="Text 19"/>
           <p:cNvSpPr/>
           <p:nvPr/>
         </p:nvSpPr>
         <p:spPr>
           <a:xfrm>
             <a:off x="749880" y="2427840"/>
-            <a:ext cx="3035520" cy="648720"/>
+            <a:ext cx="3035160" cy="648360"/>
           </a:xfrm>
           <a:prstGeom prst="rect">
             <a:avLst/>
@@ -20665,14 +20572,14 @@
       </p:sp>
       <p:sp>
         <p:nvSpPr>
-          <p:cNvPr id="291" name="Shape 20"/>
+          <p:cNvPr id="290" name="Shape 20"/>
           <p:cNvSpPr/>
           <p:nvPr/>
         </p:nvSpPr>
         <p:spPr>
           <a:xfrm>
             <a:off x="3822120" y="2386440"/>
-            <a:ext cx="3931560" cy="731160"/>
+            <a:ext cx="3931200" cy="730800"/>
           </a:xfrm>
           <a:prstGeom prst="rect">
             <a:avLst/>
@@ -20711,14 +20618,14 @@
       </p:sp>
       <p:sp>
         <p:nvSpPr>
-          <p:cNvPr id="292" name="Text 21"/>
+          <p:cNvPr id="291" name="Text 21"/>
           <p:cNvSpPr/>
           <p:nvPr/>
         </p:nvSpPr>
         <p:spPr>
           <a:xfrm>
             <a:off x="3858840" y="2427840"/>
-            <a:ext cx="3858480" cy="648720"/>
+            <a:ext cx="3858120" cy="648360"/>
           </a:xfrm>
           <a:prstGeom prst="rect">
             <a:avLst/>
@@ -20771,14 +20678,14 @@
       </p:sp>
       <p:sp>
         <p:nvSpPr>
-          <p:cNvPr id="293" name="Shape 22"/>
+          <p:cNvPr id="292" name="Shape 22"/>
           <p:cNvSpPr/>
           <p:nvPr/>
         </p:nvSpPr>
         <p:spPr>
           <a:xfrm>
             <a:off x="7754040" y="2386440"/>
-            <a:ext cx="3702960" cy="731160"/>
+            <a:ext cx="3702600" cy="730800"/>
           </a:xfrm>
           <a:prstGeom prst="rect">
             <a:avLst/>
@@ -20817,14 +20724,14 @@
       </p:sp>
       <p:sp>
         <p:nvSpPr>
-          <p:cNvPr id="294" name="Text 23"/>
+          <p:cNvPr id="293" name="Text 23"/>
           <p:cNvSpPr/>
           <p:nvPr/>
         </p:nvSpPr>
         <p:spPr>
           <a:xfrm>
             <a:off x="7790760" y="2427840"/>
-            <a:ext cx="3629880" cy="648720"/>
+            <a:ext cx="3629520" cy="648360"/>
           </a:xfrm>
           <a:prstGeom prst="rect">
             <a:avLst/>
@@ -20877,14 +20784,14 @@
       </p:sp>
       <p:sp>
         <p:nvSpPr>
-          <p:cNvPr id="295" name="Shape 24"/>
+          <p:cNvPr id="294" name="Shape 24"/>
           <p:cNvSpPr/>
           <p:nvPr/>
         </p:nvSpPr>
         <p:spPr>
           <a:xfrm>
             <a:off x="713160" y="3117960"/>
-            <a:ext cx="3108600" cy="731160"/>
+            <a:ext cx="3108240" cy="730800"/>
           </a:xfrm>
           <a:prstGeom prst="rect">
             <a:avLst/>
@@ -20923,14 +20830,14 @@
       </p:sp>
       <p:sp>
         <p:nvSpPr>
-          <p:cNvPr id="296" name="Text 25"/>
+          <p:cNvPr id="295" name="Text 25"/>
           <p:cNvSpPr/>
           <p:nvPr/>
         </p:nvSpPr>
         <p:spPr>
           <a:xfrm>
             <a:off x="749880" y="3159360"/>
-            <a:ext cx="3035520" cy="648720"/>
+            <a:ext cx="3035160" cy="648360"/>
           </a:xfrm>
           <a:prstGeom prst="rect">
             <a:avLst/>
@@ -20983,14 +20890,14 @@
       </p:sp>
       <p:sp>
         <p:nvSpPr>
-          <p:cNvPr id="297" name="Shape 26"/>
+          <p:cNvPr id="296" name="Shape 26"/>
           <p:cNvSpPr/>
           <p:nvPr/>
         </p:nvSpPr>
         <p:spPr>
           <a:xfrm>
             <a:off x="3822120" y="3117960"/>
-            <a:ext cx="3931560" cy="731160"/>
+            <a:ext cx="3931200" cy="730800"/>
           </a:xfrm>
           <a:prstGeom prst="rect">
             <a:avLst/>
@@ -21029,14 +20936,14 @@
       </p:sp>
       <p:sp>
         <p:nvSpPr>
-          <p:cNvPr id="298" name="Text 27"/>
+          <p:cNvPr id="297" name="Text 27"/>
           <p:cNvSpPr/>
           <p:nvPr/>
         </p:nvSpPr>
         <p:spPr>
           <a:xfrm>
             <a:off x="3858840" y="3159360"/>
-            <a:ext cx="3858480" cy="648720"/>
+            <a:ext cx="3858120" cy="648360"/>
           </a:xfrm>
           <a:prstGeom prst="rect">
             <a:avLst/>
@@ -21089,14 +20996,14 @@
       </p:sp>
       <p:sp>
         <p:nvSpPr>
-          <p:cNvPr id="299" name="Shape 28"/>
+          <p:cNvPr id="298" name="Shape 28"/>
           <p:cNvSpPr/>
           <p:nvPr/>
         </p:nvSpPr>
         <p:spPr>
           <a:xfrm>
             <a:off x="7754040" y="3117960"/>
-            <a:ext cx="3702960" cy="731160"/>
+            <a:ext cx="3702600" cy="730800"/>
           </a:xfrm>
           <a:prstGeom prst="rect">
             <a:avLst/>
@@ -21135,14 +21042,14 @@
       </p:sp>
       <p:sp>
         <p:nvSpPr>
-          <p:cNvPr id="300" name="Text 29"/>
+          <p:cNvPr id="299" name="Text 29"/>
           <p:cNvSpPr/>
           <p:nvPr/>
         </p:nvSpPr>
         <p:spPr>
           <a:xfrm>
             <a:off x="7790760" y="3159360"/>
-            <a:ext cx="3629880" cy="648720"/>
+            <a:ext cx="3629520" cy="648360"/>
           </a:xfrm>
           <a:prstGeom prst="rect">
             <a:avLst/>
@@ -21195,14 +21102,14 @@
       </p:sp>
       <p:sp>
         <p:nvSpPr>
-          <p:cNvPr id="301" name="Shape 30"/>
+          <p:cNvPr id="300" name="Shape 30"/>
           <p:cNvSpPr/>
           <p:nvPr/>
         </p:nvSpPr>
         <p:spPr>
           <a:xfrm>
             <a:off x="713160" y="3849480"/>
-            <a:ext cx="3108600" cy="731160"/>
+            <a:ext cx="3108240" cy="730800"/>
           </a:xfrm>
           <a:prstGeom prst="rect">
             <a:avLst/>
@@ -21241,14 +21148,14 @@
       </p:sp>
       <p:sp>
         <p:nvSpPr>
-          <p:cNvPr id="302" name="Text 31"/>
+          <p:cNvPr id="301" name="Text 31"/>
           <p:cNvSpPr/>
           <p:nvPr/>
         </p:nvSpPr>
         <p:spPr>
           <a:xfrm>
             <a:off x="749880" y="3890880"/>
-            <a:ext cx="3035520" cy="648720"/>
+            <a:ext cx="3035160" cy="648360"/>
           </a:xfrm>
           <a:prstGeom prst="rect">
             <a:avLst/>
@@ -21301,14 +21208,14 @@
       </p:sp>
       <p:sp>
         <p:nvSpPr>
-          <p:cNvPr id="303" name="Shape 32"/>
+          <p:cNvPr id="302" name="Shape 32"/>
           <p:cNvSpPr/>
           <p:nvPr/>
         </p:nvSpPr>
         <p:spPr>
           <a:xfrm>
             <a:off x="3822120" y="3849480"/>
-            <a:ext cx="3931560" cy="731160"/>
+            <a:ext cx="3931200" cy="730800"/>
           </a:xfrm>
           <a:prstGeom prst="rect">
             <a:avLst/>
@@ -21347,14 +21254,14 @@
       </p:sp>
       <p:sp>
         <p:nvSpPr>
-          <p:cNvPr id="304" name="Text 33"/>
+          <p:cNvPr id="303" name="Text 33"/>
           <p:cNvSpPr/>
           <p:nvPr/>
         </p:nvSpPr>
         <p:spPr>
           <a:xfrm>
             <a:off x="3858840" y="3890880"/>
-            <a:ext cx="3858480" cy="648720"/>
+            <a:ext cx="3858120" cy="648360"/>
           </a:xfrm>
           <a:prstGeom prst="rect">
             <a:avLst/>
@@ -21407,14 +21314,14 @@
       </p:sp>
       <p:sp>
         <p:nvSpPr>
-          <p:cNvPr id="305" name="Shape 34"/>
+          <p:cNvPr id="304" name="Shape 34"/>
           <p:cNvSpPr/>
           <p:nvPr/>
         </p:nvSpPr>
         <p:spPr>
           <a:xfrm>
             <a:off x="7754040" y="3849480"/>
-            <a:ext cx="3702960" cy="731160"/>
+            <a:ext cx="3702600" cy="730800"/>
           </a:xfrm>
           <a:prstGeom prst="rect">
             <a:avLst/>
@@ -21453,14 +21360,14 @@
       </p:sp>
       <p:sp>
         <p:nvSpPr>
-          <p:cNvPr id="306" name="Text 35"/>
+          <p:cNvPr id="305" name="Text 35"/>
           <p:cNvSpPr/>
           <p:nvPr/>
         </p:nvSpPr>
         <p:spPr>
           <a:xfrm>
             <a:off x="7790760" y="3890880"/>
-            <a:ext cx="3629880" cy="648720"/>
+            <a:ext cx="3629520" cy="648360"/>
           </a:xfrm>
           <a:prstGeom prst="rect">
             <a:avLst/>
@@ -21513,14 +21420,14 @@
       </p:sp>
       <p:sp>
         <p:nvSpPr>
-          <p:cNvPr id="307" name="Shape 36"/>
+          <p:cNvPr id="306" name="Shape 36"/>
           <p:cNvSpPr/>
           <p:nvPr/>
         </p:nvSpPr>
         <p:spPr>
           <a:xfrm>
             <a:off x="713160" y="4581000"/>
-            <a:ext cx="3108600" cy="731160"/>
+            <a:ext cx="3108240" cy="730800"/>
           </a:xfrm>
           <a:prstGeom prst="rect">
             <a:avLst/>
@@ -21559,14 +21466,14 @@
       </p:sp>
       <p:sp>
         <p:nvSpPr>
-          <p:cNvPr id="308" name="Text 37"/>
+          <p:cNvPr id="307" name="Text 37"/>
           <p:cNvSpPr/>
           <p:nvPr/>
         </p:nvSpPr>
         <p:spPr>
           <a:xfrm>
             <a:off x="749880" y="4622400"/>
-            <a:ext cx="3035520" cy="648720"/>
+            <a:ext cx="3035160" cy="648360"/>
           </a:xfrm>
           <a:prstGeom prst="rect">
             <a:avLst/>
@@ -21619,14 +21526,14 @@
       </p:sp>
       <p:sp>
         <p:nvSpPr>
-          <p:cNvPr id="309" name="Shape 38"/>
+          <p:cNvPr id="308" name="Shape 38"/>
           <p:cNvSpPr/>
           <p:nvPr/>
         </p:nvSpPr>
         <p:spPr>
           <a:xfrm>
             <a:off x="3822120" y="4581000"/>
-            <a:ext cx="3931560" cy="731160"/>
+            <a:ext cx="3931200" cy="730800"/>
           </a:xfrm>
           <a:prstGeom prst="rect">
             <a:avLst/>
@@ -21665,14 +21572,14 @@
       </p:sp>
       <p:sp>
         <p:nvSpPr>
-          <p:cNvPr id="310" name="Text 39"/>
+          <p:cNvPr id="309" name="Text 39"/>
           <p:cNvSpPr/>
           <p:nvPr/>
         </p:nvSpPr>
         <p:spPr>
           <a:xfrm>
             <a:off x="3858840" y="4622400"/>
-            <a:ext cx="3858480" cy="648720"/>
+            <a:ext cx="3858120" cy="648360"/>
           </a:xfrm>
           <a:prstGeom prst="rect">
             <a:avLst/>
@@ -21725,14 +21632,14 @@
       </p:sp>
       <p:sp>
         <p:nvSpPr>
-          <p:cNvPr id="311" name="Shape 40"/>
+          <p:cNvPr id="310" name="Shape 40"/>
           <p:cNvSpPr/>
           <p:nvPr/>
         </p:nvSpPr>
         <p:spPr>
           <a:xfrm>
             <a:off x="7754040" y="4581000"/>
-            <a:ext cx="3702960" cy="731160"/>
+            <a:ext cx="3702600" cy="730800"/>
           </a:xfrm>
           <a:prstGeom prst="rect">
             <a:avLst/>
@@ -21771,14 +21678,14 @@
       </p:sp>
       <p:sp>
         <p:nvSpPr>
-          <p:cNvPr id="312" name="Text 41"/>
+          <p:cNvPr id="311" name="Text 41"/>
           <p:cNvSpPr/>
           <p:nvPr/>
         </p:nvSpPr>
         <p:spPr>
           <a:xfrm>
             <a:off x="7790760" y="4622400"/>
-            <a:ext cx="3629880" cy="648720"/>
+            <a:ext cx="3629520" cy="648360"/>
           </a:xfrm>
           <a:prstGeom prst="rect">
             <a:avLst/>
@@ -21868,14 +21775,14 @@
       </p:grpSpPr>
       <p:sp>
         <p:nvSpPr>
-          <p:cNvPr id="313" name="Shape 0"/>
+          <p:cNvPr id="312" name="Shape 0"/>
           <p:cNvSpPr/>
           <p:nvPr/>
         </p:nvSpPr>
         <p:spPr>
           <a:xfrm>
             <a:off x="0" y="0"/>
-            <a:ext cx="12191400" cy="6857640"/>
+            <a:ext cx="12191040" cy="6857280"/>
           </a:xfrm>
           <a:prstGeom prst="rect">
             <a:avLst/>
@@ -21914,14 +21821,14 @@
       </p:sp>
       <p:sp>
         <p:nvSpPr>
-          <p:cNvPr id="314" name="Shape 1"/>
+          <p:cNvPr id="313" name="Shape 1"/>
           <p:cNvSpPr/>
           <p:nvPr/>
         </p:nvSpPr>
         <p:spPr>
           <a:xfrm>
             <a:off x="0" y="6364080"/>
-            <a:ext cx="12191400" cy="493560"/>
+            <a:ext cx="12191040" cy="493200"/>
           </a:xfrm>
           <a:prstGeom prst="rect">
             <a:avLst/>
@@ -21960,14 +21867,14 @@
       </p:sp>
       <p:sp>
         <p:nvSpPr>
-          <p:cNvPr id="315" name="Text 2"/>
+          <p:cNvPr id="314" name="Text 2"/>
           <p:cNvSpPr/>
           <p:nvPr/>
         </p:nvSpPr>
         <p:spPr>
           <a:xfrm>
             <a:off x="365760" y="6446520"/>
-            <a:ext cx="11475360" cy="200880"/>
+            <a:ext cx="11475000" cy="200520"/>
           </a:xfrm>
           <a:prstGeom prst="rect">
             <a:avLst/>
@@ -22021,14 +21928,14 @@
       </p:sp>
       <p:sp>
         <p:nvSpPr>
-          <p:cNvPr id="316" name="Text 3"/>
+          <p:cNvPr id="315" name="Text 3"/>
           <p:cNvSpPr/>
           <p:nvPr/>
         </p:nvSpPr>
         <p:spPr>
           <a:xfrm>
             <a:off x="502920" y="329040"/>
-            <a:ext cx="9966600" cy="411120"/>
+            <a:ext cx="9966240" cy="410760"/>
           </a:xfrm>
           <a:prstGeom prst="rect">
             <a:avLst/>
@@ -22082,14 +21989,14 @@
       </p:sp>
       <p:sp>
         <p:nvSpPr>
-          <p:cNvPr id="317" name="Shape 4"/>
+          <p:cNvPr id="316" name="Shape 4"/>
           <p:cNvSpPr/>
           <p:nvPr/>
         </p:nvSpPr>
         <p:spPr>
           <a:xfrm>
             <a:off x="502920" y="831960"/>
-            <a:ext cx="1325520" cy="36360"/>
+            <a:ext cx="1325160" cy="36000"/>
           </a:xfrm>
           <a:prstGeom prst="rect">
             <a:avLst/>
@@ -22128,14 +22035,14 @@
       </p:sp>
       <p:sp>
         <p:nvSpPr>
-          <p:cNvPr id="318" name="Text 5"/>
+          <p:cNvPr id="317" name="Text 5"/>
           <p:cNvSpPr/>
           <p:nvPr/>
         </p:nvSpPr>
         <p:spPr>
           <a:xfrm>
             <a:off x="1938600" y="768240"/>
-            <a:ext cx="7131960" cy="200880"/>
+            <a:ext cx="7131600" cy="200520"/>
           </a:xfrm>
           <a:prstGeom prst="rect">
             <a:avLst/>
@@ -22188,14 +22095,14 @@
       </p:sp>
       <p:sp>
         <p:nvSpPr>
-          <p:cNvPr id="319" name="Shape 6"/>
+          <p:cNvPr id="318" name="Shape 6"/>
           <p:cNvSpPr/>
           <p:nvPr/>
         </p:nvSpPr>
         <p:spPr>
           <a:xfrm>
             <a:off x="777240" y="1170360"/>
-            <a:ext cx="5257440" cy="1051200"/>
+            <a:ext cx="5257080" cy="1050840"/>
           </a:xfrm>
           <a:prstGeom prst="roundRect">
             <a:avLst>
@@ -22238,14 +22145,14 @@
       </p:sp>
       <p:sp>
         <p:nvSpPr>
-          <p:cNvPr id="320" name="Shape 7"/>
+          <p:cNvPr id="319" name="Shape 7"/>
           <p:cNvSpPr/>
           <p:nvPr/>
         </p:nvSpPr>
         <p:spPr>
           <a:xfrm>
             <a:off x="777240" y="1170360"/>
-            <a:ext cx="54360" cy="1051200"/>
+            <a:ext cx="54000" cy="1050840"/>
           </a:xfrm>
           <a:prstGeom prst="rect">
             <a:avLst/>
@@ -22267,7 +22174,7 @@
           <a:fontRef idx="minor"/>
         </p:style>
         <p:txBody>
-          <a:bodyPr lIns="90000" tIns="45000" rIns="90000" bIns="45000" anchor="t">
+          <a:bodyPr lIns="27000" tIns="45000" rIns="27000" bIns="45000" anchor="t">
             <a:noAutofit/>
           </a:bodyPr>
           <a:p>
@@ -22284,14 +22191,14 @@
       </p:sp>
       <p:sp>
         <p:nvSpPr>
-          <p:cNvPr id="321" name="Text 8"/>
+          <p:cNvPr id="320" name="Text 8"/>
           <p:cNvSpPr/>
           <p:nvPr/>
         </p:nvSpPr>
         <p:spPr>
           <a:xfrm>
             <a:off x="960120" y="1280160"/>
-            <a:ext cx="4983120" cy="237240"/>
+            <a:ext cx="4982760" cy="236880"/>
           </a:xfrm>
           <a:prstGeom prst="rect">
             <a:avLst/>
@@ -22344,14 +22251,14 @@
       </p:sp>
       <p:sp>
         <p:nvSpPr>
-          <p:cNvPr id="322" name="Text 9"/>
+          <p:cNvPr id="321" name="Text 9"/>
           <p:cNvSpPr/>
           <p:nvPr/>
         </p:nvSpPr>
         <p:spPr>
           <a:xfrm>
             <a:off x="960120" y="1581840"/>
-            <a:ext cx="4983120" cy="548280"/>
+            <a:ext cx="4982760" cy="547920"/>
           </a:xfrm>
           <a:prstGeom prst="rect">
             <a:avLst/>
@@ -22404,14 +22311,14 @@
       </p:sp>
       <p:sp>
         <p:nvSpPr>
-          <p:cNvPr id="323" name="Shape 10"/>
+          <p:cNvPr id="322" name="Shape 10"/>
           <p:cNvSpPr/>
           <p:nvPr/>
         </p:nvSpPr>
         <p:spPr>
           <a:xfrm>
             <a:off x="777240" y="2496240"/>
-            <a:ext cx="5257440" cy="1051200"/>
+            <a:ext cx="5257080" cy="1050840"/>
           </a:xfrm>
           <a:prstGeom prst="roundRect">
             <a:avLst>
@@ -22454,14 +22361,14 @@
       </p:sp>
       <p:sp>
         <p:nvSpPr>
-          <p:cNvPr id="324" name="Shape 11"/>
+          <p:cNvPr id="323" name="Shape 11"/>
           <p:cNvSpPr/>
           <p:nvPr/>
         </p:nvSpPr>
         <p:spPr>
           <a:xfrm>
             <a:off x="777240" y="2496240"/>
-            <a:ext cx="54360" cy="1051200"/>
+            <a:ext cx="54000" cy="1050840"/>
           </a:xfrm>
           <a:prstGeom prst="rect">
             <a:avLst/>
@@ -22483,7 +22390,7 @@
           <a:fontRef idx="minor"/>
         </p:style>
         <p:txBody>
-          <a:bodyPr lIns="90000" tIns="45000" rIns="90000" bIns="45000" anchor="t">
+          <a:bodyPr lIns="27000" tIns="45000" rIns="27000" bIns="45000" anchor="t">
             <a:noAutofit/>
           </a:bodyPr>
           <a:p>
@@ -22500,14 +22407,14 @@
       </p:sp>
       <p:sp>
         <p:nvSpPr>
-          <p:cNvPr id="325" name="Text 12"/>
+          <p:cNvPr id="324" name="Text 12"/>
           <p:cNvSpPr/>
           <p:nvPr/>
         </p:nvSpPr>
         <p:spPr>
           <a:xfrm>
             <a:off x="960120" y="2606040"/>
-            <a:ext cx="4983120" cy="237240"/>
+            <a:ext cx="4982760" cy="236880"/>
           </a:xfrm>
           <a:prstGeom prst="rect">
             <a:avLst/>
@@ -22560,14 +22467,14 @@
       </p:sp>
       <p:sp>
         <p:nvSpPr>
-          <p:cNvPr id="326" name="Text 13"/>
+          <p:cNvPr id="325" name="Text 13"/>
           <p:cNvSpPr/>
           <p:nvPr/>
         </p:nvSpPr>
         <p:spPr>
           <a:xfrm>
             <a:off x="960120" y="2907720"/>
-            <a:ext cx="4983120" cy="548280"/>
+            <a:ext cx="4982760" cy="547920"/>
           </a:xfrm>
           <a:prstGeom prst="rect">
             <a:avLst/>
@@ -22620,14 +22527,14 @@
       </p:sp>
       <p:sp>
         <p:nvSpPr>
-          <p:cNvPr id="327" name="Shape 14"/>
+          <p:cNvPr id="326" name="Shape 14"/>
           <p:cNvSpPr/>
           <p:nvPr/>
         </p:nvSpPr>
         <p:spPr>
           <a:xfrm>
             <a:off x="777240" y="3822120"/>
-            <a:ext cx="5257440" cy="1051200"/>
+            <a:ext cx="5257080" cy="1050840"/>
           </a:xfrm>
           <a:prstGeom prst="roundRect">
             <a:avLst>
@@ -22670,14 +22577,14 @@
       </p:sp>
       <p:sp>
         <p:nvSpPr>
-          <p:cNvPr id="328" name="Shape 15"/>
+          <p:cNvPr id="327" name="Shape 15"/>
           <p:cNvSpPr/>
           <p:nvPr/>
         </p:nvSpPr>
         <p:spPr>
           <a:xfrm>
             <a:off x="777240" y="3822120"/>
-            <a:ext cx="54360" cy="1051200"/>
+            <a:ext cx="54000" cy="1050840"/>
           </a:xfrm>
           <a:prstGeom prst="rect">
             <a:avLst/>
@@ -22699,7 +22606,7 @@
           <a:fontRef idx="minor"/>
         </p:style>
         <p:txBody>
-          <a:bodyPr lIns="90000" tIns="45000" rIns="90000" bIns="45000" anchor="t">
+          <a:bodyPr lIns="27000" tIns="45000" rIns="27000" bIns="45000" anchor="t">
             <a:noAutofit/>
           </a:bodyPr>
           <a:p>
@@ -22716,14 +22623,14 @@
       </p:sp>
       <p:sp>
         <p:nvSpPr>
-          <p:cNvPr id="329" name="Text 16"/>
+          <p:cNvPr id="328" name="Text 16"/>
           <p:cNvSpPr/>
           <p:nvPr/>
         </p:nvSpPr>
         <p:spPr>
           <a:xfrm>
             <a:off x="960120" y="3931920"/>
-            <a:ext cx="4983120" cy="237240"/>
+            <a:ext cx="4982760" cy="236880"/>
           </a:xfrm>
           <a:prstGeom prst="rect">
             <a:avLst/>
@@ -22776,14 +22683,14 @@
       </p:sp>
       <p:sp>
         <p:nvSpPr>
-          <p:cNvPr id="330" name="Text 17"/>
+          <p:cNvPr id="329" name="Text 17"/>
           <p:cNvSpPr/>
           <p:nvPr/>
         </p:nvSpPr>
         <p:spPr>
           <a:xfrm>
             <a:off x="960120" y="4233600"/>
-            <a:ext cx="4983120" cy="548280"/>
+            <a:ext cx="4982760" cy="547920"/>
           </a:xfrm>
           <a:prstGeom prst="rect">
             <a:avLst/>
@@ -22836,14 +22743,14 @@
       </p:sp>
       <p:sp>
         <p:nvSpPr>
-          <p:cNvPr id="331" name="Text 18"/>
+          <p:cNvPr id="330" name="Text 18"/>
           <p:cNvSpPr/>
           <p:nvPr/>
         </p:nvSpPr>
         <p:spPr>
           <a:xfrm>
             <a:off x="6629400" y="1234440"/>
-            <a:ext cx="3565800" cy="328680"/>
+            <a:ext cx="3565440" cy="328320"/>
           </a:xfrm>
           <a:prstGeom prst="rect">
             <a:avLst/>
@@ -22896,14 +22803,14 @@
       </p:sp>
       <p:sp>
         <p:nvSpPr>
-          <p:cNvPr id="332" name="Shape 19"/>
+          <p:cNvPr id="331" name="Shape 19"/>
           <p:cNvSpPr/>
           <p:nvPr/>
         </p:nvSpPr>
         <p:spPr>
           <a:xfrm>
             <a:off x="6629400" y="1874520"/>
-            <a:ext cx="4315680" cy="914040"/>
+            <a:ext cx="4315320" cy="913680"/>
           </a:xfrm>
           <a:prstGeom prst="roundRect">
             <a:avLst>
@@ -22946,14 +22853,14 @@
       </p:sp>
       <p:sp>
         <p:nvSpPr>
-          <p:cNvPr id="333" name="Shape 20"/>
+          <p:cNvPr id="332" name="Shape 20"/>
           <p:cNvSpPr/>
           <p:nvPr/>
         </p:nvSpPr>
         <p:spPr>
           <a:xfrm>
             <a:off x="6793920" y="2030040"/>
-            <a:ext cx="475200" cy="475200"/>
+            <a:ext cx="474840" cy="474840"/>
           </a:xfrm>
           <a:prstGeom prst="roundRect">
             <a:avLst>
@@ -22998,14 +22905,14 @@
       </p:sp>
       <p:sp>
         <p:nvSpPr>
-          <p:cNvPr id="334" name="Text 21"/>
+          <p:cNvPr id="333" name="Text 21"/>
           <p:cNvSpPr/>
           <p:nvPr/>
         </p:nvSpPr>
         <p:spPr>
           <a:xfrm>
             <a:off x="6849000" y="2094120"/>
-            <a:ext cx="365400" cy="347040"/>
+            <a:ext cx="365040" cy="346680"/>
           </a:xfrm>
           <a:prstGeom prst="rect">
             <a:avLst/>
@@ -23058,14 +22965,14 @@
       </p:sp>
       <p:sp>
         <p:nvSpPr>
-          <p:cNvPr id="335" name="Text 22"/>
+          <p:cNvPr id="334" name="Text 22"/>
           <p:cNvSpPr/>
           <p:nvPr/>
         </p:nvSpPr>
         <p:spPr>
           <a:xfrm>
             <a:off x="7397640" y="2020680"/>
-            <a:ext cx="3382920" cy="237240"/>
+            <a:ext cx="3382560" cy="236880"/>
           </a:xfrm>
           <a:prstGeom prst="rect">
             <a:avLst/>
@@ -23118,14 +23025,14 @@
       </p:sp>
       <p:sp>
         <p:nvSpPr>
-          <p:cNvPr id="336" name="Text 23"/>
+          <p:cNvPr id="335" name="Text 23"/>
           <p:cNvSpPr/>
           <p:nvPr/>
         </p:nvSpPr>
         <p:spPr>
           <a:xfrm>
             <a:off x="7397640" y="2331720"/>
-            <a:ext cx="3382920" cy="319680"/>
+            <a:ext cx="3382560" cy="319320"/>
           </a:xfrm>
           <a:prstGeom prst="rect">
             <a:avLst/>
@@ -23178,14 +23085,14 @@
       </p:sp>
       <p:sp>
         <p:nvSpPr>
-          <p:cNvPr id="337" name="Shape 24"/>
+          <p:cNvPr id="336" name="Shape 24"/>
           <p:cNvSpPr/>
           <p:nvPr/>
         </p:nvSpPr>
         <p:spPr>
           <a:xfrm>
             <a:off x="6629400" y="3090600"/>
-            <a:ext cx="4315680" cy="914040"/>
+            <a:ext cx="4315320" cy="913680"/>
           </a:xfrm>
           <a:prstGeom prst="roundRect">
             <a:avLst>
@@ -23228,14 +23135,14 @@
       </p:sp>
       <p:sp>
         <p:nvSpPr>
-          <p:cNvPr id="338" name="Shape 25"/>
+          <p:cNvPr id="337" name="Shape 25"/>
           <p:cNvSpPr/>
           <p:nvPr/>
         </p:nvSpPr>
         <p:spPr>
           <a:xfrm>
             <a:off x="6793920" y="3246120"/>
-            <a:ext cx="475200" cy="475200"/>
+            <a:ext cx="474840" cy="474840"/>
           </a:xfrm>
           <a:prstGeom prst="roundRect">
             <a:avLst>
@@ -23280,14 +23187,14 @@
       </p:sp>
       <p:sp>
         <p:nvSpPr>
-          <p:cNvPr id="339" name="Text 26"/>
+          <p:cNvPr id="338" name="Text 26"/>
           <p:cNvSpPr/>
           <p:nvPr/>
         </p:nvSpPr>
         <p:spPr>
           <a:xfrm>
             <a:off x="6849000" y="3310200"/>
-            <a:ext cx="365400" cy="347040"/>
+            <a:ext cx="365040" cy="346680"/>
           </a:xfrm>
           <a:prstGeom prst="rect">
             <a:avLst/>
@@ -23340,14 +23247,14 @@
       </p:sp>
       <p:sp>
         <p:nvSpPr>
-          <p:cNvPr id="340" name="Text 27"/>
+          <p:cNvPr id="339" name="Text 27"/>
           <p:cNvSpPr/>
           <p:nvPr/>
         </p:nvSpPr>
         <p:spPr>
           <a:xfrm>
             <a:off x="7397640" y="3237120"/>
-            <a:ext cx="3382920" cy="237240"/>
+            <a:ext cx="3382560" cy="236880"/>
           </a:xfrm>
           <a:prstGeom prst="rect">
             <a:avLst/>
@@ -23400,14 +23307,14 @@
       </p:sp>
       <p:sp>
         <p:nvSpPr>
-          <p:cNvPr id="341" name="Text 28"/>
+          <p:cNvPr id="340" name="Text 28"/>
           <p:cNvSpPr/>
           <p:nvPr/>
         </p:nvSpPr>
         <p:spPr>
           <a:xfrm>
             <a:off x="7397640" y="3547800"/>
-            <a:ext cx="3382920" cy="319680"/>
+            <a:ext cx="3382560" cy="319320"/>
           </a:xfrm>
           <a:prstGeom prst="rect">
             <a:avLst/>
